--- a/MakettMester.pptx
+++ b/MakettMester.pptx
@@ -124,6 +124,11 @@
       </a:defRPr>
     </a:lvl9pPr>
   </p:defaultTextStyle>
+  <p:extLst>
+    <p:ext uri="{EFAFB233-063F-42B5-8137-9DF3F51BA10A}">
+      <p15:sldGuideLst xmlns:p15="http://schemas.microsoft.com/office/powerpoint/2012/main"/>
+    </p:ext>
+  </p:extLst>
 </p:presentation>
 </file>
 
@@ -5715,10 +5720,10 @@
       </p:sp>
       <p:pic>
         <p:nvPicPr>
-          <p:cNvPr id="5" name="Kép 4">
+          <p:cNvPr id="6" name="Kép 5">
             <a:extLst>
               <a:ext uri="{FF2B5EF4-FFF2-40B4-BE49-F238E27FC236}">
-                <a16:creationId xmlns:a16="http://schemas.microsoft.com/office/drawing/2014/main" id="{4454745B-C5F0-42AF-98CE-706C9CB2A390}"/>
+                <a16:creationId xmlns:a16="http://schemas.microsoft.com/office/drawing/2014/main" id="{CC43FE1C-8D2A-467E-9CCE-383090BA6B16}"/>
               </a:ext>
             </a:extLst>
           </p:cNvPr>
@@ -5741,8 +5746,8 @@
         </p:blipFill>
         <p:spPr>
           <a:xfrm>
-            <a:off x="9296400" y="4114800"/>
-            <a:ext cx="2743200" cy="2743200"/>
+            <a:off x="10289628" y="5108028"/>
+            <a:ext cx="1749972" cy="1749972"/>
           </a:xfrm>
           <a:prstGeom prst="rect">
             <a:avLst/>
@@ -6135,6 +6140,42 @@
           </a:p>
         </p:txBody>
       </p:sp>
+      <p:pic>
+        <p:nvPicPr>
+          <p:cNvPr id="5" name="Kép 4">
+            <a:extLst>
+              <a:ext uri="{FF2B5EF4-FFF2-40B4-BE49-F238E27FC236}">
+                <a16:creationId xmlns:a16="http://schemas.microsoft.com/office/drawing/2014/main" id="{28A6CB1F-7DB6-47C6-806D-FD7866DF09AE}"/>
+              </a:ext>
+            </a:extLst>
+          </p:cNvPr>
+          <p:cNvPicPr>
+            <a:picLocks noChangeAspect="1"/>
+          </p:cNvPicPr>
+          <p:nvPr/>
+        </p:nvPicPr>
+        <p:blipFill>
+          <a:blip r:embed="rId3">
+            <a:extLst>
+              <a:ext uri="{28A0092B-C50C-407E-A947-70E740481C1C}">
+                <a14:useLocalDpi xmlns:a14="http://schemas.microsoft.com/office/drawing/2010/main" val="0"/>
+              </a:ext>
+            </a:extLst>
+          </a:blip>
+          <a:stretch>
+            <a:fillRect/>
+          </a:stretch>
+        </p:blipFill>
+        <p:spPr>
+          <a:xfrm>
+            <a:off x="10289628" y="5108028"/>
+            <a:ext cx="1749972" cy="1749972"/>
+          </a:xfrm>
+          <a:prstGeom prst="rect">
+            <a:avLst/>
+          </a:prstGeom>
+        </p:spPr>
+      </p:pic>
     </p:spTree>
     <p:extLst>
       <p:ext uri="{BB962C8B-B14F-4D97-AF65-F5344CB8AC3E}">
@@ -6443,6 +6484,42 @@
           </a:p>
         </p:txBody>
       </p:sp>
+      <p:pic>
+        <p:nvPicPr>
+          <p:cNvPr id="5" name="Kép 4">
+            <a:extLst>
+              <a:ext uri="{FF2B5EF4-FFF2-40B4-BE49-F238E27FC236}">
+                <a16:creationId xmlns:a16="http://schemas.microsoft.com/office/drawing/2014/main" id="{F679C2A7-3786-4D22-97CE-C54836FC4FDE}"/>
+              </a:ext>
+            </a:extLst>
+          </p:cNvPr>
+          <p:cNvPicPr>
+            <a:picLocks noChangeAspect="1"/>
+          </p:cNvPicPr>
+          <p:nvPr/>
+        </p:nvPicPr>
+        <p:blipFill>
+          <a:blip r:embed="rId3">
+            <a:extLst>
+              <a:ext uri="{28A0092B-C50C-407E-A947-70E740481C1C}">
+                <a14:useLocalDpi xmlns:a14="http://schemas.microsoft.com/office/drawing/2010/main" val="0"/>
+              </a:ext>
+            </a:extLst>
+          </a:blip>
+          <a:stretch>
+            <a:fillRect/>
+          </a:stretch>
+        </p:blipFill>
+        <p:spPr>
+          <a:xfrm>
+            <a:off x="10289628" y="5108028"/>
+            <a:ext cx="1749972" cy="1749972"/>
+          </a:xfrm>
+          <a:prstGeom prst="rect">
+            <a:avLst/>
+          </a:prstGeom>
+        </p:spPr>
+      </p:pic>
     </p:spTree>
     <p:extLst>
       <p:ext uri="{BB962C8B-B14F-4D97-AF65-F5344CB8AC3E}">
@@ -6720,6 +6797,42 @@
           </a:p>
         </p:txBody>
       </p:sp>
+      <p:pic>
+        <p:nvPicPr>
+          <p:cNvPr id="5" name="Kép 4">
+            <a:extLst>
+              <a:ext uri="{FF2B5EF4-FFF2-40B4-BE49-F238E27FC236}">
+                <a16:creationId xmlns:a16="http://schemas.microsoft.com/office/drawing/2014/main" id="{7A5A19C6-AD58-4D6E-90BF-CF23D28CC767}"/>
+              </a:ext>
+            </a:extLst>
+          </p:cNvPr>
+          <p:cNvPicPr>
+            <a:picLocks noChangeAspect="1"/>
+          </p:cNvPicPr>
+          <p:nvPr/>
+        </p:nvPicPr>
+        <p:blipFill>
+          <a:blip r:embed="rId3">
+            <a:extLst>
+              <a:ext uri="{28A0092B-C50C-407E-A947-70E740481C1C}">
+                <a14:useLocalDpi xmlns:a14="http://schemas.microsoft.com/office/drawing/2010/main" val="0"/>
+              </a:ext>
+            </a:extLst>
+          </a:blip>
+          <a:stretch>
+            <a:fillRect/>
+          </a:stretch>
+        </p:blipFill>
+        <p:spPr>
+          <a:xfrm>
+            <a:off x="10289628" y="5108028"/>
+            <a:ext cx="1749972" cy="1749972"/>
+          </a:xfrm>
+          <a:prstGeom prst="rect">
+            <a:avLst/>
+          </a:prstGeom>
+        </p:spPr>
+      </p:pic>
     </p:spTree>
     <p:extLst>
       <p:ext uri="{BB962C8B-B14F-4D97-AF65-F5344CB8AC3E}">
@@ -7038,6 +7151,42 @@
           </a:p>
         </p:txBody>
       </p:sp>
+      <p:pic>
+        <p:nvPicPr>
+          <p:cNvPr id="5" name="Kép 4">
+            <a:extLst>
+              <a:ext uri="{FF2B5EF4-FFF2-40B4-BE49-F238E27FC236}">
+                <a16:creationId xmlns:a16="http://schemas.microsoft.com/office/drawing/2014/main" id="{C8367D14-451B-48A4-814B-50595D18DA51}"/>
+              </a:ext>
+            </a:extLst>
+          </p:cNvPr>
+          <p:cNvPicPr>
+            <a:picLocks noChangeAspect="1"/>
+          </p:cNvPicPr>
+          <p:nvPr/>
+        </p:nvPicPr>
+        <p:blipFill>
+          <a:blip r:embed="rId3">
+            <a:extLst>
+              <a:ext uri="{28A0092B-C50C-407E-A947-70E740481C1C}">
+                <a14:useLocalDpi xmlns:a14="http://schemas.microsoft.com/office/drawing/2010/main" val="0"/>
+              </a:ext>
+            </a:extLst>
+          </a:blip>
+          <a:stretch>
+            <a:fillRect/>
+          </a:stretch>
+        </p:blipFill>
+        <p:spPr>
+          <a:xfrm>
+            <a:off x="10289628" y="5108028"/>
+            <a:ext cx="1749972" cy="1749972"/>
+          </a:xfrm>
+          <a:prstGeom prst="rect">
+            <a:avLst/>
+          </a:prstGeom>
+        </p:spPr>
+      </p:pic>
     </p:spTree>
     <p:extLst>
       <p:ext uri="{BB962C8B-B14F-4D97-AF65-F5344CB8AC3E}">
@@ -7422,6 +7571,42 @@
           </a:p>
         </p:txBody>
       </p:sp>
+      <p:pic>
+        <p:nvPicPr>
+          <p:cNvPr id="5" name="Kép 4">
+            <a:extLst>
+              <a:ext uri="{FF2B5EF4-FFF2-40B4-BE49-F238E27FC236}">
+                <a16:creationId xmlns:a16="http://schemas.microsoft.com/office/drawing/2014/main" id="{820A19F2-80B2-4C1E-BA45-E997E3D6C437}"/>
+              </a:ext>
+            </a:extLst>
+          </p:cNvPr>
+          <p:cNvPicPr>
+            <a:picLocks noChangeAspect="1"/>
+          </p:cNvPicPr>
+          <p:nvPr/>
+        </p:nvPicPr>
+        <p:blipFill>
+          <a:blip r:embed="rId3">
+            <a:extLst>
+              <a:ext uri="{28A0092B-C50C-407E-A947-70E740481C1C}">
+                <a14:useLocalDpi xmlns:a14="http://schemas.microsoft.com/office/drawing/2010/main" val="0"/>
+              </a:ext>
+            </a:extLst>
+          </a:blip>
+          <a:stretch>
+            <a:fillRect/>
+          </a:stretch>
+        </p:blipFill>
+        <p:spPr>
+          <a:xfrm>
+            <a:off x="10289628" y="5108028"/>
+            <a:ext cx="1749972" cy="1749972"/>
+          </a:xfrm>
+          <a:prstGeom prst="rect">
+            <a:avLst/>
+          </a:prstGeom>
+        </p:spPr>
+      </p:pic>
     </p:spTree>
     <p:extLst>
       <p:ext uri="{BB962C8B-B14F-4D97-AF65-F5344CB8AC3E}">
@@ -7699,6 +7884,42 @@
           </a:p>
         </p:txBody>
       </p:sp>
+      <p:pic>
+        <p:nvPicPr>
+          <p:cNvPr id="5" name="Kép 4">
+            <a:extLst>
+              <a:ext uri="{FF2B5EF4-FFF2-40B4-BE49-F238E27FC236}">
+                <a16:creationId xmlns:a16="http://schemas.microsoft.com/office/drawing/2014/main" id="{F23A0D2C-FE8B-4695-B4DD-2287274F9787}"/>
+              </a:ext>
+            </a:extLst>
+          </p:cNvPr>
+          <p:cNvPicPr>
+            <a:picLocks noChangeAspect="1"/>
+          </p:cNvPicPr>
+          <p:nvPr/>
+        </p:nvPicPr>
+        <p:blipFill>
+          <a:blip r:embed="rId3">
+            <a:extLst>
+              <a:ext uri="{28A0092B-C50C-407E-A947-70E740481C1C}">
+                <a14:useLocalDpi xmlns:a14="http://schemas.microsoft.com/office/drawing/2010/main" val="0"/>
+              </a:ext>
+            </a:extLst>
+          </a:blip>
+          <a:stretch>
+            <a:fillRect/>
+          </a:stretch>
+        </p:blipFill>
+        <p:spPr>
+          <a:xfrm>
+            <a:off x="10289628" y="5108028"/>
+            <a:ext cx="1749972" cy="1749972"/>
+          </a:xfrm>
+          <a:prstGeom prst="rect">
+            <a:avLst/>
+          </a:prstGeom>
+        </p:spPr>
+      </p:pic>
     </p:spTree>
     <p:extLst>
       <p:ext uri="{BB962C8B-B14F-4D97-AF65-F5344CB8AC3E}">
@@ -7976,6 +8197,42 @@
           </a:p>
         </p:txBody>
       </p:sp>
+      <p:pic>
+        <p:nvPicPr>
+          <p:cNvPr id="5" name="Kép 4">
+            <a:extLst>
+              <a:ext uri="{FF2B5EF4-FFF2-40B4-BE49-F238E27FC236}">
+                <a16:creationId xmlns:a16="http://schemas.microsoft.com/office/drawing/2014/main" id="{51BFADE6-BD58-4B42-981A-A84AD228A1E9}"/>
+              </a:ext>
+            </a:extLst>
+          </p:cNvPr>
+          <p:cNvPicPr>
+            <a:picLocks noChangeAspect="1"/>
+          </p:cNvPicPr>
+          <p:nvPr/>
+        </p:nvPicPr>
+        <p:blipFill>
+          <a:blip r:embed="rId3">
+            <a:extLst>
+              <a:ext uri="{28A0092B-C50C-407E-A947-70E740481C1C}">
+                <a14:useLocalDpi xmlns:a14="http://schemas.microsoft.com/office/drawing/2010/main" val="0"/>
+              </a:ext>
+            </a:extLst>
+          </a:blip>
+          <a:stretch>
+            <a:fillRect/>
+          </a:stretch>
+        </p:blipFill>
+        <p:spPr>
+          <a:xfrm>
+            <a:off x="10289628" y="5108028"/>
+            <a:ext cx="1749972" cy="1749972"/>
+          </a:xfrm>
+          <a:prstGeom prst="rect">
+            <a:avLst/>
+          </a:prstGeom>
+        </p:spPr>
+      </p:pic>
     </p:spTree>
     <p:extLst>
       <p:ext uri="{BB962C8B-B14F-4D97-AF65-F5344CB8AC3E}">
@@ -8258,6 +8515,42 @@
           </a:p>
         </p:txBody>
       </p:sp>
+      <p:pic>
+        <p:nvPicPr>
+          <p:cNvPr id="5" name="Kép 4">
+            <a:extLst>
+              <a:ext uri="{FF2B5EF4-FFF2-40B4-BE49-F238E27FC236}">
+                <a16:creationId xmlns:a16="http://schemas.microsoft.com/office/drawing/2014/main" id="{C2542F6F-266A-4E5F-BB37-B1580C281AB4}"/>
+              </a:ext>
+            </a:extLst>
+          </p:cNvPr>
+          <p:cNvPicPr>
+            <a:picLocks noChangeAspect="1"/>
+          </p:cNvPicPr>
+          <p:nvPr/>
+        </p:nvPicPr>
+        <p:blipFill>
+          <a:blip r:embed="rId3">
+            <a:extLst>
+              <a:ext uri="{28A0092B-C50C-407E-A947-70E740481C1C}">
+                <a14:useLocalDpi xmlns:a14="http://schemas.microsoft.com/office/drawing/2010/main" val="0"/>
+              </a:ext>
+            </a:extLst>
+          </a:blip>
+          <a:stretch>
+            <a:fillRect/>
+          </a:stretch>
+        </p:blipFill>
+        <p:spPr>
+          <a:xfrm>
+            <a:off x="10289628" y="5108028"/>
+            <a:ext cx="1749972" cy="1749972"/>
+          </a:xfrm>
+          <a:prstGeom prst="rect">
+            <a:avLst/>
+          </a:prstGeom>
+        </p:spPr>
+      </p:pic>
     </p:spTree>
     <p:extLst>
       <p:ext uri="{BB962C8B-B14F-4D97-AF65-F5344CB8AC3E}">
@@ -8656,6 +8949,42 @@
           </a:p>
         </p:txBody>
       </p:sp>
+      <p:pic>
+        <p:nvPicPr>
+          <p:cNvPr id="5" name="Kép 4">
+            <a:extLst>
+              <a:ext uri="{FF2B5EF4-FFF2-40B4-BE49-F238E27FC236}">
+                <a16:creationId xmlns:a16="http://schemas.microsoft.com/office/drawing/2014/main" id="{37060AD1-C718-41D9-B21B-3EC0A4510C0A}"/>
+              </a:ext>
+            </a:extLst>
+          </p:cNvPr>
+          <p:cNvPicPr>
+            <a:picLocks noChangeAspect="1"/>
+          </p:cNvPicPr>
+          <p:nvPr/>
+        </p:nvPicPr>
+        <p:blipFill>
+          <a:blip r:embed="rId3">
+            <a:extLst>
+              <a:ext uri="{28A0092B-C50C-407E-A947-70E740481C1C}">
+                <a14:useLocalDpi xmlns:a14="http://schemas.microsoft.com/office/drawing/2010/main" val="0"/>
+              </a:ext>
+            </a:extLst>
+          </a:blip>
+          <a:stretch>
+            <a:fillRect/>
+          </a:stretch>
+        </p:blipFill>
+        <p:spPr>
+          <a:xfrm>
+            <a:off x="10289628" y="5108028"/>
+            <a:ext cx="1749972" cy="1749972"/>
+          </a:xfrm>
+          <a:prstGeom prst="rect">
+            <a:avLst/>
+          </a:prstGeom>
+        </p:spPr>
+      </p:pic>
     </p:spTree>
     <p:extLst>
       <p:ext uri="{BB962C8B-B14F-4D97-AF65-F5344CB8AC3E}">
@@ -8937,6 +9266,42 @@
           </a:p>
         </p:txBody>
       </p:sp>
+      <p:pic>
+        <p:nvPicPr>
+          <p:cNvPr id="5" name="Kép 4">
+            <a:extLst>
+              <a:ext uri="{FF2B5EF4-FFF2-40B4-BE49-F238E27FC236}">
+                <a16:creationId xmlns:a16="http://schemas.microsoft.com/office/drawing/2014/main" id="{B14388CB-0717-4D2F-9A0F-73005423D940}"/>
+              </a:ext>
+            </a:extLst>
+          </p:cNvPr>
+          <p:cNvPicPr>
+            <a:picLocks noChangeAspect="1"/>
+          </p:cNvPicPr>
+          <p:nvPr/>
+        </p:nvPicPr>
+        <p:blipFill>
+          <a:blip r:embed="rId3">
+            <a:extLst>
+              <a:ext uri="{28A0092B-C50C-407E-A947-70E740481C1C}">
+                <a14:useLocalDpi xmlns:a14="http://schemas.microsoft.com/office/drawing/2010/main" val="0"/>
+              </a:ext>
+            </a:extLst>
+          </a:blip>
+          <a:stretch>
+            <a:fillRect/>
+          </a:stretch>
+        </p:blipFill>
+        <p:spPr>
+          <a:xfrm>
+            <a:off x="10289628" y="5108028"/>
+            <a:ext cx="1749972" cy="1749972"/>
+          </a:xfrm>
+          <a:prstGeom prst="rect">
+            <a:avLst/>
+          </a:prstGeom>
+        </p:spPr>
+      </p:pic>
     </p:spTree>
     <p:extLst>
       <p:ext uri="{BB962C8B-B14F-4D97-AF65-F5344CB8AC3E}">
@@ -9283,6 +9648,42 @@
           </a:p>
         </p:txBody>
       </p:sp>
+      <p:pic>
+        <p:nvPicPr>
+          <p:cNvPr id="5" name="Kép 4">
+            <a:extLst>
+              <a:ext uri="{FF2B5EF4-FFF2-40B4-BE49-F238E27FC236}">
+                <a16:creationId xmlns:a16="http://schemas.microsoft.com/office/drawing/2014/main" id="{284A07BC-9CCA-4FC8-B489-53C6A67805A0}"/>
+              </a:ext>
+            </a:extLst>
+          </p:cNvPr>
+          <p:cNvPicPr>
+            <a:picLocks noChangeAspect="1"/>
+          </p:cNvPicPr>
+          <p:nvPr/>
+        </p:nvPicPr>
+        <p:blipFill>
+          <a:blip r:embed="rId3">
+            <a:extLst>
+              <a:ext uri="{28A0092B-C50C-407E-A947-70E740481C1C}">
+                <a14:useLocalDpi xmlns:a14="http://schemas.microsoft.com/office/drawing/2010/main" val="0"/>
+              </a:ext>
+            </a:extLst>
+          </a:blip>
+          <a:stretch>
+            <a:fillRect/>
+          </a:stretch>
+        </p:blipFill>
+        <p:spPr>
+          <a:xfrm>
+            <a:off x="10289628" y="5108028"/>
+            <a:ext cx="1749972" cy="1749972"/>
+          </a:xfrm>
+          <a:prstGeom prst="rect">
+            <a:avLst/>
+          </a:prstGeom>
+        </p:spPr>
+      </p:pic>
     </p:spTree>
     <p:extLst>
       <p:ext uri="{BB962C8B-B14F-4D97-AF65-F5344CB8AC3E}">
@@ -9653,6 +10054,42 @@
           </a:p>
         </p:txBody>
       </p:sp>
+      <p:pic>
+        <p:nvPicPr>
+          <p:cNvPr id="5" name="Kép 4">
+            <a:extLst>
+              <a:ext uri="{FF2B5EF4-FFF2-40B4-BE49-F238E27FC236}">
+                <a16:creationId xmlns:a16="http://schemas.microsoft.com/office/drawing/2014/main" id="{4D38B262-B324-4A35-89C6-2A0CF6EB1412}"/>
+              </a:ext>
+            </a:extLst>
+          </p:cNvPr>
+          <p:cNvPicPr>
+            <a:picLocks noChangeAspect="1"/>
+          </p:cNvPicPr>
+          <p:nvPr/>
+        </p:nvPicPr>
+        <p:blipFill>
+          <a:blip r:embed="rId3">
+            <a:extLst>
+              <a:ext uri="{28A0092B-C50C-407E-A947-70E740481C1C}">
+                <a14:useLocalDpi xmlns:a14="http://schemas.microsoft.com/office/drawing/2010/main" val="0"/>
+              </a:ext>
+            </a:extLst>
+          </a:blip>
+          <a:stretch>
+            <a:fillRect/>
+          </a:stretch>
+        </p:blipFill>
+        <p:spPr>
+          <a:xfrm>
+            <a:off x="10289628" y="5108028"/>
+            <a:ext cx="1749972" cy="1749972"/>
+          </a:xfrm>
+          <a:prstGeom prst="rect">
+            <a:avLst/>
+          </a:prstGeom>
+        </p:spPr>
+      </p:pic>
     </p:spTree>
     <p:extLst>
       <p:ext uri="{BB962C8B-B14F-4D97-AF65-F5344CB8AC3E}">
@@ -9934,6 +10371,42 @@
           </a:p>
         </p:txBody>
       </p:sp>
+      <p:pic>
+        <p:nvPicPr>
+          <p:cNvPr id="5" name="Kép 4">
+            <a:extLst>
+              <a:ext uri="{FF2B5EF4-FFF2-40B4-BE49-F238E27FC236}">
+                <a16:creationId xmlns:a16="http://schemas.microsoft.com/office/drawing/2014/main" id="{4B6AD4C1-8756-453E-A291-FB423E434522}"/>
+              </a:ext>
+            </a:extLst>
+          </p:cNvPr>
+          <p:cNvPicPr>
+            <a:picLocks noChangeAspect="1"/>
+          </p:cNvPicPr>
+          <p:nvPr/>
+        </p:nvPicPr>
+        <p:blipFill>
+          <a:blip r:embed="rId3">
+            <a:extLst>
+              <a:ext uri="{28A0092B-C50C-407E-A947-70E740481C1C}">
+                <a14:useLocalDpi xmlns:a14="http://schemas.microsoft.com/office/drawing/2010/main" val="0"/>
+              </a:ext>
+            </a:extLst>
+          </a:blip>
+          <a:stretch>
+            <a:fillRect/>
+          </a:stretch>
+        </p:blipFill>
+        <p:spPr>
+          <a:xfrm>
+            <a:off x="10289628" y="5108028"/>
+            <a:ext cx="1749972" cy="1749972"/>
+          </a:xfrm>
+          <a:prstGeom prst="rect">
+            <a:avLst/>
+          </a:prstGeom>
+        </p:spPr>
+      </p:pic>
     </p:spTree>
     <p:extLst>
       <p:ext uri="{BB962C8B-B14F-4D97-AF65-F5344CB8AC3E}">
@@ -10017,6 +10490,42 @@
           </a:p>
         </p:txBody>
       </p:sp>
+      <p:pic>
+        <p:nvPicPr>
+          <p:cNvPr id="4" name="Kép 3">
+            <a:extLst>
+              <a:ext uri="{FF2B5EF4-FFF2-40B4-BE49-F238E27FC236}">
+                <a16:creationId xmlns:a16="http://schemas.microsoft.com/office/drawing/2014/main" id="{C1583940-1ECF-425E-A2BD-FAF5FC7E0A38}"/>
+              </a:ext>
+            </a:extLst>
+          </p:cNvPr>
+          <p:cNvPicPr>
+            <a:picLocks noChangeAspect="1"/>
+          </p:cNvPicPr>
+          <p:nvPr/>
+        </p:nvPicPr>
+        <p:blipFill>
+          <a:blip r:embed="rId3">
+            <a:extLst>
+              <a:ext uri="{28A0092B-C50C-407E-A947-70E740481C1C}">
+                <a14:useLocalDpi xmlns:a14="http://schemas.microsoft.com/office/drawing/2010/main" val="0"/>
+              </a:ext>
+            </a:extLst>
+          </a:blip>
+          <a:stretch>
+            <a:fillRect/>
+          </a:stretch>
+        </p:blipFill>
+        <p:spPr>
+          <a:xfrm>
+            <a:off x="10289628" y="5108028"/>
+            <a:ext cx="1749972" cy="1749972"/>
+          </a:xfrm>
+          <a:prstGeom prst="rect">
+            <a:avLst/>
+          </a:prstGeom>
+        </p:spPr>
+      </p:pic>
     </p:spTree>
     <p:extLst>
       <p:ext uri="{BB962C8B-B14F-4D97-AF65-F5344CB8AC3E}">
@@ -10325,6 +10834,42 @@
           </a:p>
         </p:txBody>
       </p:sp>
+      <p:pic>
+        <p:nvPicPr>
+          <p:cNvPr id="5" name="Kép 4">
+            <a:extLst>
+              <a:ext uri="{FF2B5EF4-FFF2-40B4-BE49-F238E27FC236}">
+                <a16:creationId xmlns:a16="http://schemas.microsoft.com/office/drawing/2014/main" id="{425528E6-C157-478B-8036-5A7CED9975C2}"/>
+              </a:ext>
+            </a:extLst>
+          </p:cNvPr>
+          <p:cNvPicPr>
+            <a:picLocks noChangeAspect="1"/>
+          </p:cNvPicPr>
+          <p:nvPr/>
+        </p:nvPicPr>
+        <p:blipFill>
+          <a:blip r:embed="rId3">
+            <a:extLst>
+              <a:ext uri="{28A0092B-C50C-407E-A947-70E740481C1C}">
+                <a14:useLocalDpi xmlns:a14="http://schemas.microsoft.com/office/drawing/2010/main" val="0"/>
+              </a:ext>
+            </a:extLst>
+          </a:blip>
+          <a:stretch>
+            <a:fillRect/>
+          </a:stretch>
+        </p:blipFill>
+        <p:spPr>
+          <a:xfrm>
+            <a:off x="10289628" y="5108028"/>
+            <a:ext cx="1749972" cy="1749972"/>
+          </a:xfrm>
+          <a:prstGeom prst="rect">
+            <a:avLst/>
+          </a:prstGeom>
+        </p:spPr>
+      </p:pic>
     </p:spTree>
     <p:extLst>
       <p:ext uri="{BB962C8B-B14F-4D97-AF65-F5344CB8AC3E}">
@@ -10606,6 +11151,42 @@
           </a:p>
         </p:txBody>
       </p:sp>
+      <p:pic>
+        <p:nvPicPr>
+          <p:cNvPr id="5" name="Kép 4">
+            <a:extLst>
+              <a:ext uri="{FF2B5EF4-FFF2-40B4-BE49-F238E27FC236}">
+                <a16:creationId xmlns:a16="http://schemas.microsoft.com/office/drawing/2014/main" id="{D85CD99C-44BB-445E-884A-0FE4988A3F59}"/>
+              </a:ext>
+            </a:extLst>
+          </p:cNvPr>
+          <p:cNvPicPr>
+            <a:picLocks noChangeAspect="1"/>
+          </p:cNvPicPr>
+          <p:nvPr/>
+        </p:nvPicPr>
+        <p:blipFill>
+          <a:blip r:embed="rId3">
+            <a:extLst>
+              <a:ext uri="{28A0092B-C50C-407E-A947-70E740481C1C}">
+                <a14:useLocalDpi xmlns:a14="http://schemas.microsoft.com/office/drawing/2010/main" val="0"/>
+              </a:ext>
+            </a:extLst>
+          </a:blip>
+          <a:stretch>
+            <a:fillRect/>
+          </a:stretch>
+        </p:blipFill>
+        <p:spPr>
+          <a:xfrm>
+            <a:off x="10289628" y="5108028"/>
+            <a:ext cx="1749972" cy="1749972"/>
+          </a:xfrm>
+          <a:prstGeom prst="rect">
+            <a:avLst/>
+          </a:prstGeom>
+        </p:spPr>
+      </p:pic>
     </p:spTree>
     <p:extLst>
       <p:ext uri="{BB962C8B-B14F-4D97-AF65-F5344CB8AC3E}">
@@ -10930,6 +11511,42 @@
           </a:p>
         </p:txBody>
       </p:sp>
+      <p:pic>
+        <p:nvPicPr>
+          <p:cNvPr id="5" name="Kép 4">
+            <a:extLst>
+              <a:ext uri="{FF2B5EF4-FFF2-40B4-BE49-F238E27FC236}">
+                <a16:creationId xmlns:a16="http://schemas.microsoft.com/office/drawing/2014/main" id="{5D3D4BD1-9705-4E8B-B43B-9F3D9C5047A7}"/>
+              </a:ext>
+            </a:extLst>
+          </p:cNvPr>
+          <p:cNvPicPr>
+            <a:picLocks noChangeAspect="1"/>
+          </p:cNvPicPr>
+          <p:nvPr/>
+        </p:nvPicPr>
+        <p:blipFill>
+          <a:blip r:embed="rId3">
+            <a:extLst>
+              <a:ext uri="{28A0092B-C50C-407E-A947-70E740481C1C}">
+                <a14:useLocalDpi xmlns:a14="http://schemas.microsoft.com/office/drawing/2010/main" val="0"/>
+              </a:ext>
+            </a:extLst>
+          </a:blip>
+          <a:stretch>
+            <a:fillRect/>
+          </a:stretch>
+        </p:blipFill>
+        <p:spPr>
+          <a:xfrm>
+            <a:off x="10289628" y="5108028"/>
+            <a:ext cx="1749972" cy="1749972"/>
+          </a:xfrm>
+          <a:prstGeom prst="rect">
+            <a:avLst/>
+          </a:prstGeom>
+        </p:spPr>
+      </p:pic>
     </p:spTree>
     <p:extLst>
       <p:ext uri="{BB962C8B-B14F-4D97-AF65-F5344CB8AC3E}">

--- a/MakettMester.pptx
+++ b/MakettMester.pptx
@@ -10465,31 +10465,6 @@
           </a:p>
         </p:txBody>
       </p:sp>
-      <p:sp>
-        <p:nvSpPr>
-          <p:cNvPr id="3" name="Tartalom helye 2">
-            <a:extLst>
-              <a:ext uri="{FF2B5EF4-FFF2-40B4-BE49-F238E27FC236}">
-                <a16:creationId xmlns:a16="http://schemas.microsoft.com/office/drawing/2014/main" id="{86130E69-2275-49FD-B40E-14C637086B44}"/>
-              </a:ext>
-            </a:extLst>
-          </p:cNvPr>
-          <p:cNvSpPr>
-            <a:spLocks noGrp="1"/>
-          </p:cNvSpPr>
-          <p:nvPr>
-            <p:ph idx="1"/>
-          </p:nvPr>
-        </p:nvSpPr>
-        <p:spPr/>
-        <p:txBody>
-          <a:bodyPr/>
-          <a:lstStyle/>
-          <a:p>
-            <a:endParaRPr lang="hu-HU" dirty="0"/>
-          </a:p>
-        </p:txBody>
-      </p:sp>
       <p:pic>
         <p:nvPicPr>
           <p:cNvPr id="4" name="Kép 3">
@@ -10520,6 +10495,36 @@
           <a:xfrm>
             <a:off x="10289628" y="5108028"/>
             <a:ext cx="1749972" cy="1749972"/>
+          </a:xfrm>
+          <a:prstGeom prst="rect">
+            <a:avLst/>
+          </a:prstGeom>
+        </p:spPr>
+      </p:pic>
+      <p:pic>
+        <p:nvPicPr>
+          <p:cNvPr id="6" name="Kép 5">
+            <a:extLst>
+              <a:ext uri="{FF2B5EF4-FFF2-40B4-BE49-F238E27FC236}">
+                <a16:creationId xmlns:a16="http://schemas.microsoft.com/office/drawing/2014/main" id="{5BBEA526-C9A5-4879-9269-78CF34379595}"/>
+              </a:ext>
+            </a:extLst>
+          </p:cNvPr>
+          <p:cNvPicPr>
+            <a:picLocks noChangeAspect="1"/>
+          </p:cNvPicPr>
+          <p:nvPr/>
+        </p:nvPicPr>
+        <p:blipFill>
+          <a:blip r:embed="rId4"/>
+          <a:stretch>
+            <a:fillRect/>
+          </a:stretch>
+        </p:blipFill>
+        <p:spPr>
+          <a:xfrm>
+            <a:off x="838200" y="1324303"/>
+            <a:ext cx="7177041" cy="5287307"/>
           </a:xfrm>
           <a:prstGeom prst="rect">
             <a:avLst/>

--- a/MakettMester.pptx
+++ b/MakettMester.pptx
@@ -5,28 +5,29 @@
     <p:sldMasterId id="2147483648" r:id="rId1"/>
   </p:sldMasterIdLst>
   <p:notesMasterIdLst>
-    <p:notesMasterId r:id="rId21"/>
+    <p:notesMasterId r:id="rId22"/>
   </p:notesMasterIdLst>
   <p:sldIdLst>
     <p:sldId id="256" r:id="rId2"/>
-    <p:sldId id="257" r:id="rId3"/>
-    <p:sldId id="274" r:id="rId4"/>
-    <p:sldId id="258" r:id="rId5"/>
-    <p:sldId id="259" r:id="rId6"/>
-    <p:sldId id="260" r:id="rId7"/>
-    <p:sldId id="261" r:id="rId8"/>
-    <p:sldId id="262" r:id="rId9"/>
-    <p:sldId id="263" r:id="rId10"/>
-    <p:sldId id="264" r:id="rId11"/>
-    <p:sldId id="265" r:id="rId12"/>
-    <p:sldId id="266" r:id="rId13"/>
-    <p:sldId id="267" r:id="rId14"/>
-    <p:sldId id="268" r:id="rId15"/>
-    <p:sldId id="269" r:id="rId16"/>
-    <p:sldId id="270" r:id="rId17"/>
-    <p:sldId id="271" r:id="rId18"/>
-    <p:sldId id="272" r:id="rId19"/>
-    <p:sldId id="273" r:id="rId20"/>
+    <p:sldId id="276" r:id="rId3"/>
+    <p:sldId id="257" r:id="rId4"/>
+    <p:sldId id="274" r:id="rId5"/>
+    <p:sldId id="258" r:id="rId6"/>
+    <p:sldId id="259" r:id="rId7"/>
+    <p:sldId id="260" r:id="rId8"/>
+    <p:sldId id="261" r:id="rId9"/>
+    <p:sldId id="262" r:id="rId10"/>
+    <p:sldId id="263" r:id="rId11"/>
+    <p:sldId id="264" r:id="rId12"/>
+    <p:sldId id="265" r:id="rId13"/>
+    <p:sldId id="266" r:id="rId14"/>
+    <p:sldId id="267" r:id="rId15"/>
+    <p:sldId id="268" r:id="rId16"/>
+    <p:sldId id="269" r:id="rId17"/>
+    <p:sldId id="270" r:id="rId18"/>
+    <p:sldId id="271" r:id="rId19"/>
+    <p:sldId id="272" r:id="rId20"/>
+    <p:sldId id="273" r:id="rId21"/>
   </p:sldIdLst>
   <p:sldSz cx="12192000" cy="6858000"/>
   <p:notesSz cx="6858000" cy="9144000"/>
@@ -10000,7 +10001,7 @@
 <dgm:dataModel xmlns:dgm="http://schemas.openxmlformats.org/drawingml/2006/diagram" xmlns:a="http://schemas.openxmlformats.org/drawingml/2006/main">
   <dgm:ptLst>
     <dgm:pt modelId="{6CCBB1A8-C620-4843-A855-65AF0FD3EBA3}" type="doc">
-      <dgm:prSet loTypeId="urn:microsoft.com/office/officeart/2008/layout/LinedList" loCatId="list" qsTypeId="urn:microsoft.com/office/officeart/2005/8/quickstyle/simple4" qsCatId="simple" csTypeId="urn:microsoft.com/office/officeart/2005/8/colors/colorful1" csCatId="colorful"/>
+      <dgm:prSet loTypeId="urn:microsoft.com/office/officeart/2008/layout/LinedList" loCatId="list" qsTypeId="urn:microsoft.com/office/officeart/2005/8/quickstyle/simple4" qsCatId="simple" csTypeId="urn:microsoft.com/office/officeart/2005/8/colors/colorful1" csCatId="colorful" phldr="1"/>
       <dgm:spPr/>
       <dgm:t>
         <a:bodyPr/>
@@ -10018,10 +10019,14 @@
         <a:lstStyle/>
         <a:p>
           <a:r>
-            <a:rPr lang="hu-HU" b="0" i="0" baseline="0"/>
-            <a:t>Regisztráció, bejelentkezés</a:t>
+            <a:rPr lang="hu-HU" dirty="0" err="1"/>
+            <a:t>Registration</a:t>
           </a:r>
-          <a:endParaRPr lang="en-US"/>
+          <a:r>
+            <a:rPr lang="hu-HU" dirty="0"/>
+            <a:t>, Login</a:t>
+          </a:r>
+          <a:endParaRPr lang="en-US" dirty="0"/>
         </a:p>
       </dgm:t>
     </dgm:pt>
@@ -10055,10 +10060,30 @@
         <a:lstStyle/>
         <a:p>
           <a:r>
-            <a:rPr lang="hu-HU" b="0" i="0" baseline="0"/>
-            <a:t>Makettlista, keresés, szűrés</a:t>
+            <a:rPr lang="hu-HU" dirty="0" err="1"/>
+            <a:t>Model</a:t>
           </a:r>
-          <a:endParaRPr lang="en-US"/>
+          <a:r>
+            <a:rPr lang="hu-HU" dirty="0"/>
+            <a:t> </a:t>
+          </a:r>
+          <a:r>
+            <a:rPr lang="hu-HU" dirty="0" err="1"/>
+            <a:t>list</a:t>
+          </a:r>
+          <a:r>
+            <a:rPr lang="hu-HU" dirty="0"/>
+            <a:t>, </a:t>
+          </a:r>
+          <a:r>
+            <a:rPr lang="hu-HU" dirty="0" err="1"/>
+            <a:t>Search</a:t>
+          </a:r>
+          <a:r>
+            <a:rPr lang="hu-HU" dirty="0"/>
+            <a:t>, Filtering</a:t>
+          </a:r>
+          <a:endParaRPr lang="en-US" dirty="0"/>
         </a:p>
       </dgm:t>
     </dgm:pt>
@@ -10092,10 +10117,18 @@
         <a:lstStyle/>
         <a:p>
           <a:r>
-            <a:rPr lang="hu-HU" b="0" i="0" baseline="0"/>
-            <a:t>Vélemények és csillagos értékelés</a:t>
+            <a:rPr lang="hu-HU" dirty="0" err="1"/>
+            <a:t>Reviews</a:t>
           </a:r>
-          <a:endParaRPr lang="en-US"/>
+          <a:r>
+            <a:rPr lang="hu-HU" dirty="0"/>
+            <a:t> and Star </a:t>
+          </a:r>
+          <a:r>
+            <a:rPr lang="hu-HU" dirty="0" err="1"/>
+            <a:t>Ratings</a:t>
+          </a:r>
+          <a:endParaRPr lang="en-US" dirty="0"/>
         </a:p>
       </dgm:t>
     </dgm:pt>
@@ -10129,10 +10162,10 @@
         <a:lstStyle/>
         <a:p>
           <a:r>
-            <a:rPr lang="hu-HU" b="0" i="0" baseline="0"/>
-            <a:t>Kedvencek</a:t>
+            <a:rPr lang="hu-HU" dirty="0" err="1"/>
+            <a:t>Favorites</a:t>
           </a:r>
-          <a:endParaRPr lang="en-US"/>
+          <a:endParaRPr lang="en-US" dirty="0"/>
         </a:p>
       </dgm:t>
     </dgm:pt>
@@ -10166,10 +10199,10 @@
         <a:lstStyle/>
         <a:p>
           <a:r>
-            <a:rPr lang="hu-HU" b="0" i="0" baseline="0"/>
-            <a:t>Fórum</a:t>
+            <a:rPr lang="hu-HU" dirty="0"/>
+            <a:t>Forum</a:t>
           </a:r>
-          <a:endParaRPr lang="en-US"/>
+          <a:endParaRPr lang="en-US" dirty="0"/>
         </a:p>
       </dgm:t>
     </dgm:pt>
@@ -10203,10 +10236,14 @@
         <a:lstStyle/>
         <a:p>
           <a:r>
-            <a:rPr lang="hu-HU" b="0" i="0" baseline="0"/>
-            <a:t>Építési napló</a:t>
+            <a:rPr lang="hu-HU" dirty="0" err="1"/>
+            <a:t>Build</a:t>
           </a:r>
-          <a:endParaRPr lang="en-US"/>
+          <a:r>
+            <a:rPr lang="hu-HU" dirty="0"/>
+            <a:t> Log</a:t>
+          </a:r>
+          <a:endParaRPr lang="en-US" dirty="0"/>
         </a:p>
       </dgm:t>
     </dgm:pt>
@@ -10240,10 +10277,18 @@
         <a:lstStyle/>
         <a:p>
           <a:r>
-            <a:rPr lang="hu-HU" b="0" i="0" baseline="0"/>
-            <a:t>Admin jóváhagyás</a:t>
+            <a:rPr lang="hu-HU" dirty="0" err="1"/>
+            <a:t>Admin</a:t>
           </a:r>
-          <a:endParaRPr lang="en-US"/>
+          <a:r>
+            <a:rPr lang="hu-HU" dirty="0"/>
+            <a:t> </a:t>
+          </a:r>
+          <a:r>
+            <a:rPr lang="hu-HU" dirty="0" err="1"/>
+            <a:t>Approval</a:t>
+          </a:r>
+          <a:endParaRPr lang="en-US" dirty="0"/>
         </a:p>
       </dgm:t>
     </dgm:pt>
@@ -15086,10 +15131,14 @@
             <a:buNone/>
           </a:pPr>
           <a:r>
-            <a:rPr lang="hu-HU" sz="3100" b="0" i="0" kern="1200" baseline="0"/>
-            <a:t>Regisztráció, bejelentkezés</a:t>
+            <a:rPr lang="hu-HU" sz="3100" kern="1200" dirty="0" err="1"/>
+            <a:t>Registration</a:t>
           </a:r>
-          <a:endParaRPr lang="en-US" sz="3100" kern="1200"/>
+          <a:r>
+            <a:rPr lang="hu-HU" sz="3100" kern="1200" dirty="0"/>
+            <a:t>, Login</a:t>
+          </a:r>
+          <a:endParaRPr lang="en-US" sz="3100" kern="1200" dirty="0"/>
         </a:p>
       </dsp:txBody>
       <dsp:txXfrm>
@@ -15227,10 +15276,30 @@
             <a:buNone/>
           </a:pPr>
           <a:r>
-            <a:rPr lang="hu-HU" sz="3100" b="0" i="0" kern="1200" baseline="0"/>
-            <a:t>Makettlista, keresés, szűrés</a:t>
+            <a:rPr lang="hu-HU" sz="3100" kern="1200" dirty="0" err="1"/>
+            <a:t>Model</a:t>
           </a:r>
-          <a:endParaRPr lang="en-US" sz="3100" kern="1200"/>
+          <a:r>
+            <a:rPr lang="hu-HU" sz="3100" kern="1200" dirty="0"/>
+            <a:t> </a:t>
+          </a:r>
+          <a:r>
+            <a:rPr lang="hu-HU" sz="3100" kern="1200" dirty="0" err="1"/>
+            <a:t>list</a:t>
+          </a:r>
+          <a:r>
+            <a:rPr lang="hu-HU" sz="3100" kern="1200" dirty="0"/>
+            <a:t>, </a:t>
+          </a:r>
+          <a:r>
+            <a:rPr lang="hu-HU" sz="3100" kern="1200" dirty="0" err="1"/>
+            <a:t>Search</a:t>
+          </a:r>
+          <a:r>
+            <a:rPr lang="hu-HU" sz="3100" kern="1200" dirty="0"/>
+            <a:t>, Filtering</a:t>
+          </a:r>
+          <a:endParaRPr lang="en-US" sz="3100" kern="1200" dirty="0"/>
         </a:p>
       </dsp:txBody>
       <dsp:txXfrm>
@@ -15368,10 +15437,18 @@
             <a:buNone/>
           </a:pPr>
           <a:r>
-            <a:rPr lang="hu-HU" sz="3100" b="0" i="0" kern="1200" baseline="0"/>
-            <a:t>Vélemények és csillagos értékelés</a:t>
+            <a:rPr lang="hu-HU" sz="3100" kern="1200" dirty="0" err="1"/>
+            <a:t>Reviews</a:t>
           </a:r>
-          <a:endParaRPr lang="en-US" sz="3100" kern="1200"/>
+          <a:r>
+            <a:rPr lang="hu-HU" sz="3100" kern="1200" dirty="0"/>
+            <a:t> and Star </a:t>
+          </a:r>
+          <a:r>
+            <a:rPr lang="hu-HU" sz="3100" kern="1200" dirty="0" err="1"/>
+            <a:t>Ratings</a:t>
+          </a:r>
+          <a:endParaRPr lang="en-US" sz="3100" kern="1200" dirty="0"/>
         </a:p>
       </dsp:txBody>
       <dsp:txXfrm>
@@ -15509,10 +15586,10 @@
             <a:buNone/>
           </a:pPr>
           <a:r>
-            <a:rPr lang="hu-HU" sz="3100" b="0" i="0" kern="1200" baseline="0"/>
-            <a:t>Kedvencek</a:t>
+            <a:rPr lang="hu-HU" sz="3100" kern="1200" dirty="0" err="1"/>
+            <a:t>Favorites</a:t>
           </a:r>
-          <a:endParaRPr lang="en-US" sz="3100" kern="1200"/>
+          <a:endParaRPr lang="en-US" sz="3100" kern="1200" dirty="0"/>
         </a:p>
       </dsp:txBody>
       <dsp:txXfrm>
@@ -15650,10 +15727,10 @@
             <a:buNone/>
           </a:pPr>
           <a:r>
-            <a:rPr lang="hu-HU" sz="3100" b="0" i="0" kern="1200" baseline="0"/>
-            <a:t>Fórum</a:t>
+            <a:rPr lang="hu-HU" sz="3100" kern="1200" dirty="0"/>
+            <a:t>Forum</a:t>
           </a:r>
-          <a:endParaRPr lang="en-US" sz="3100" kern="1200"/>
+          <a:endParaRPr lang="en-US" sz="3100" kern="1200" dirty="0"/>
         </a:p>
       </dsp:txBody>
       <dsp:txXfrm>
@@ -15791,10 +15868,14 @@
             <a:buNone/>
           </a:pPr>
           <a:r>
-            <a:rPr lang="hu-HU" sz="3100" b="0" i="0" kern="1200" baseline="0"/>
-            <a:t>Építési napló</a:t>
+            <a:rPr lang="hu-HU" sz="3100" kern="1200" dirty="0" err="1"/>
+            <a:t>Build</a:t>
           </a:r>
-          <a:endParaRPr lang="en-US" sz="3100" kern="1200"/>
+          <a:r>
+            <a:rPr lang="hu-HU" sz="3100" kern="1200" dirty="0"/>
+            <a:t> Log</a:t>
+          </a:r>
+          <a:endParaRPr lang="en-US" sz="3100" kern="1200" dirty="0"/>
         </a:p>
       </dsp:txBody>
       <dsp:txXfrm>
@@ -15932,10 +16013,18 @@
             <a:buNone/>
           </a:pPr>
           <a:r>
-            <a:rPr lang="hu-HU" sz="3100" b="0" i="0" kern="1200" baseline="0"/>
-            <a:t>Admin jóváhagyás</a:t>
+            <a:rPr lang="hu-HU" sz="3100" kern="1200" dirty="0" err="1"/>
+            <a:t>Admin</a:t>
           </a:r>
-          <a:endParaRPr lang="en-US" sz="3100" kern="1200"/>
+          <a:r>
+            <a:rPr lang="hu-HU" sz="3100" kern="1200" dirty="0"/>
+            <a:t> </a:t>
+          </a:r>
+          <a:r>
+            <a:rPr lang="hu-HU" sz="3100" kern="1200" dirty="0" err="1"/>
+            <a:t>Approval</a:t>
+          </a:r>
+          <a:endParaRPr lang="en-US" sz="3100" kern="1200" dirty="0"/>
         </a:p>
       </dsp:txBody>
       <dsp:txXfrm>
@@ -33950,7 +34039,7 @@
           <a:p>
             <a:fld id="{3F4F195F-7F2C-40F3-B247-AEA4312FB65B}" type="datetimeFigureOut">
               <a:rPr lang="hu-HU" smtClean="0"/>
-              <a:t>2026. 04. 14.</a:t>
+              <a:t>2026. 04. 17.</a:t>
             </a:fld>
             <a:endParaRPr lang="hu-HU"/>
           </a:p>
@@ -34263,15 +34352,31 @@
           <a:p>
             <a:r>
               <a:rPr lang="en-US" dirty="0"/>
-              <a:t>“Our project is called </a:t>
+              <a:t>Hello, my name is Patrik, and I would like to present our project together with my teammates, Hohn Márton and Szabados Bendegúz Henrik.</a:t>
             </a:r>
             <a:r>
-              <a:rPr lang="en-US" dirty="0" err="1"/>
-              <a:t>MakettMester</a:t>
+              <a:rPr lang="hu-HU" dirty="0"/>
+              <a:t> </a:t>
             </a:r>
             <a:r>
               <a:rPr lang="en-US" dirty="0"/>
-              <a:t>. It is a web application that implements a community platform built around scale modeling. In the system, users can browse models, write reviews, save items to favorites, use a forum, and maintain their own build logs. The presentation is divided into three parts: frontend, backend, and database.”</a:t>
+              <a:t>Our project is called MakettMester, and we created it as a community platform for people interested in scale modeling.</a:t>
+            </a:r>
+            <a:r>
+              <a:rPr lang="hu-HU" dirty="0"/>
+              <a:t> </a:t>
+            </a:r>
+            <a:r>
+              <a:rPr lang="en-US" dirty="0"/>
+              <a:t>With this application, users can browse models, write reviews, save favorites, use the forum, and track their own build logs.</a:t>
+            </a:r>
+            <a:r>
+              <a:rPr lang="hu-HU" dirty="0"/>
+              <a:t> </a:t>
+            </a:r>
+            <a:r>
+              <a:rPr lang="en-US" dirty="0"/>
+              <a:t>In this presentation, we will show the frontend, backend, and database of our system.</a:t>
             </a:r>
           </a:p>
         </p:txBody>
@@ -34313,6 +34418,93 @@
 </file>
 
 <file path=ppt/notesSlides/notesSlide10.xml><?xml version="1.0" encoding="utf-8"?>
+<p:notes xmlns:a="http://schemas.openxmlformats.org/drawingml/2006/main" xmlns:r="http://schemas.openxmlformats.org/officeDocument/2006/relationships" xmlns:p="http://schemas.openxmlformats.org/presentationml/2006/main">
+  <p:cSld>
+    <p:spTree>
+      <p:nvGrpSpPr>
+        <p:cNvPr id="1" name=""/>
+        <p:cNvGrpSpPr/>
+        <p:nvPr/>
+      </p:nvGrpSpPr>
+      <p:grpSpPr>
+        <a:xfrm>
+          <a:off x="0" y="0"/>
+          <a:ext cx="0" cy="0"/>
+          <a:chOff x="0" y="0"/>
+          <a:chExt cx="0" cy="0"/>
+        </a:xfrm>
+      </p:grpSpPr>
+      <p:sp>
+        <p:nvSpPr>
+          <p:cNvPr id="2" name="Diakép helye 1"/>
+          <p:cNvSpPr>
+            <a:spLocks noGrp="1" noRot="1" noChangeAspect="1"/>
+          </p:cNvSpPr>
+          <p:nvPr>
+            <p:ph type="sldImg"/>
+          </p:nvPr>
+        </p:nvSpPr>
+        <p:spPr/>
+      </p:sp>
+      <p:sp>
+        <p:nvSpPr>
+          <p:cNvPr id="3" name="Jegyzetek helye 2"/>
+          <p:cNvSpPr>
+            <a:spLocks noGrp="1"/>
+          </p:cNvSpPr>
+          <p:nvPr>
+            <p:ph type="body" idx="1"/>
+          </p:nvPr>
+        </p:nvSpPr>
+        <p:spPr/>
+        <p:txBody>
+          <a:bodyPr/>
+          <a:lstStyle/>
+          <a:p>
+            <a:r>
+              <a:rPr lang="hu-HU" dirty="0"/>
+              <a:t>Az adatbázist azért terveztük így, mert szerettük volna elkerülni az adatismétlést, és különválasztani a funkciókat. Így a rendszer később is könnyebben bővíthető marad. Például a fórum, a kedvencek vagy az építési tippek külön táblákat kaptak, mert ezek önálló funkcionális egységek. Az állapotkezelés és a szerepköralapú működés miatt is előnyös volt a részletesebb adatmodell.</a:t>
+            </a:r>
+          </a:p>
+        </p:txBody>
+      </p:sp>
+      <p:sp>
+        <p:nvSpPr>
+          <p:cNvPr id="4" name="Dia számának helye 3"/>
+          <p:cNvSpPr>
+            <a:spLocks noGrp="1"/>
+          </p:cNvSpPr>
+          <p:nvPr>
+            <p:ph type="sldNum" sz="quarter" idx="5"/>
+          </p:nvPr>
+        </p:nvSpPr>
+        <p:spPr/>
+        <p:txBody>
+          <a:bodyPr/>
+          <a:lstStyle/>
+          <a:p>
+            <a:fld id="{C4B2AB52-DE3E-44E0-AFFD-20264D143888}" type="slidenum">
+              <a:rPr lang="hu-HU" smtClean="0"/>
+              <a:t>10</a:t>
+            </a:fld>
+            <a:endParaRPr lang="hu-HU"/>
+          </a:p>
+        </p:txBody>
+      </p:sp>
+    </p:spTree>
+    <p:extLst>
+      <p:ext uri="{BB962C8B-B14F-4D97-AF65-F5344CB8AC3E}">
+        <p14:creationId xmlns:p14="http://schemas.microsoft.com/office/powerpoint/2010/main" val="4053797243"/>
+      </p:ext>
+    </p:extLst>
+  </p:cSld>
+  <p:clrMapOvr>
+    <a:masterClrMapping/>
+  </p:clrMapOvr>
+</p:notes>
+</file>
+
+<file path=ppt/notesSlides/notesSlide11.xml><?xml version="1.0" encoding="utf-8"?>
 <p:notes xmlns:a="http://schemas.openxmlformats.org/drawingml/2006/main" xmlns:r="http://schemas.openxmlformats.org/officeDocument/2006/relationships" xmlns:p="http://schemas.openxmlformats.org/presentationml/2006/main">
   <p:cSld>
     <p:spTree>
@@ -34444,7 +34636,7 @@
           <a:p>
             <a:fld id="{C4B2AB52-DE3E-44E0-AFFD-20264D143888}" type="slidenum">
               <a:rPr lang="hu-HU" smtClean="0"/>
-              <a:t>10</a:t>
+              <a:t>11</a:t>
             </a:fld>
             <a:endParaRPr lang="hu-HU"/>
           </a:p>
@@ -34463,7 +34655,7 @@
 </p:notes>
 </file>
 
-<file path=ppt/notesSlides/notesSlide11.xml><?xml version="1.0" encoding="utf-8"?>
+<file path=ppt/notesSlides/notesSlide12.xml><?xml version="1.0" encoding="utf-8"?>
 <p:notes xmlns:a="http://schemas.openxmlformats.org/drawingml/2006/main" xmlns:r="http://schemas.openxmlformats.org/officeDocument/2006/relationships" xmlns:p="http://schemas.openxmlformats.org/presentationml/2006/main">
   <p:cSld>
     <p:spTree>
@@ -34587,7 +34779,7 @@
           <a:p>
             <a:fld id="{C4B2AB52-DE3E-44E0-AFFD-20264D143888}" type="slidenum">
               <a:rPr lang="hu-HU" smtClean="0"/>
-              <a:t>11</a:t>
+              <a:t>12</a:t>
             </a:fld>
             <a:endParaRPr lang="hu-HU"/>
           </a:p>
@@ -34606,7 +34798,7 @@
 </p:notes>
 </file>
 
-<file path=ppt/notesSlides/notesSlide12.xml><?xml version="1.0" encoding="utf-8"?>
+<file path=ppt/notesSlides/notesSlide13.xml><?xml version="1.0" encoding="utf-8"?>
 <p:notes xmlns:a="http://schemas.openxmlformats.org/drawingml/2006/main" xmlns:r="http://schemas.openxmlformats.org/officeDocument/2006/relationships" xmlns:p="http://schemas.openxmlformats.org/presentationml/2006/main">
   <p:cSld>
     <p:spTree>
@@ -34722,7 +34914,7 @@
           <a:p>
             <a:fld id="{C4B2AB52-DE3E-44E0-AFFD-20264D143888}" type="slidenum">
               <a:rPr lang="hu-HU" smtClean="0"/>
-              <a:t>12</a:t>
+              <a:t>13</a:t>
             </a:fld>
             <a:endParaRPr lang="hu-HU"/>
           </a:p>
@@ -34741,7 +34933,7 @@
 </p:notes>
 </file>
 
-<file path=ppt/notesSlides/notesSlide13.xml><?xml version="1.0" encoding="utf-8"?>
+<file path=ppt/notesSlides/notesSlide14.xml><?xml version="1.0" encoding="utf-8"?>
 <p:notes xmlns:a="http://schemas.openxmlformats.org/drawingml/2006/main" xmlns:r="http://schemas.openxmlformats.org/officeDocument/2006/relationships" xmlns:p="http://schemas.openxmlformats.org/presentationml/2006/main">
   <p:cSld>
     <p:spTree>
@@ -34833,7 +35025,7 @@
           <a:p>
             <a:fld id="{C4B2AB52-DE3E-44E0-AFFD-20264D143888}" type="slidenum">
               <a:rPr lang="hu-HU" smtClean="0"/>
-              <a:t>13</a:t>
+              <a:t>14</a:t>
             </a:fld>
             <a:endParaRPr lang="hu-HU"/>
           </a:p>
@@ -34852,7 +35044,7 @@
 </p:notes>
 </file>
 
-<file path=ppt/notesSlides/notesSlide14.xml><?xml version="1.0" encoding="utf-8"?>
+<file path=ppt/notesSlides/notesSlide15.xml><?xml version="1.0" encoding="utf-8"?>
 <p:notes xmlns:a="http://schemas.openxmlformats.org/drawingml/2006/main" xmlns:r="http://schemas.openxmlformats.org/officeDocument/2006/relationships" xmlns:p="http://schemas.openxmlformats.org/presentationml/2006/main">
   <p:cSld>
     <p:spTree>
@@ -34960,7 +35152,7 @@
           <a:p>
             <a:fld id="{C4B2AB52-DE3E-44E0-AFFD-20264D143888}" type="slidenum">
               <a:rPr lang="hu-HU" smtClean="0"/>
-              <a:t>14</a:t>
+              <a:t>15</a:t>
             </a:fld>
             <a:endParaRPr lang="hu-HU"/>
           </a:p>
@@ -34979,7 +35171,7 @@
 </p:notes>
 </file>
 
-<file path=ppt/notesSlides/notesSlide15.xml><?xml version="1.0" encoding="utf-8"?>
+<file path=ppt/notesSlides/notesSlide16.xml><?xml version="1.0" encoding="utf-8"?>
 <p:notes xmlns:a="http://schemas.openxmlformats.org/drawingml/2006/main" xmlns:r="http://schemas.openxmlformats.org/officeDocument/2006/relationships" xmlns:p="http://schemas.openxmlformats.org/presentationml/2006/main">
   <p:cSld>
     <p:spTree>
@@ -35079,7 +35271,7 @@
           <a:p>
             <a:fld id="{C4B2AB52-DE3E-44E0-AFFD-20264D143888}" type="slidenum">
               <a:rPr lang="hu-HU" smtClean="0"/>
-              <a:t>15</a:t>
+              <a:t>16</a:t>
             </a:fld>
             <a:endParaRPr lang="hu-HU"/>
           </a:p>
@@ -35098,7 +35290,7 @@
 </p:notes>
 </file>
 
-<file path=ppt/notesSlides/notesSlide16.xml><?xml version="1.0" encoding="utf-8"?>
+<file path=ppt/notesSlides/notesSlide17.xml><?xml version="1.0" encoding="utf-8"?>
 <p:notes xmlns:a="http://schemas.openxmlformats.org/drawingml/2006/main" xmlns:r="http://schemas.openxmlformats.org/officeDocument/2006/relationships" xmlns:p="http://schemas.openxmlformats.org/presentationml/2006/main">
   <p:cSld>
     <p:spTree>
@@ -35182,7 +35374,7 @@
           <a:p>
             <a:fld id="{C4B2AB52-DE3E-44E0-AFFD-20264D143888}" type="slidenum">
               <a:rPr lang="hu-HU" smtClean="0"/>
-              <a:t>16</a:t>
+              <a:t>17</a:t>
             </a:fld>
             <a:endParaRPr lang="hu-HU"/>
           </a:p>
@@ -35201,7 +35393,7 @@
 </p:notes>
 </file>
 
-<file path=ppt/notesSlides/notesSlide17.xml><?xml version="1.0" encoding="utf-8"?>
+<file path=ppt/notesSlides/notesSlide18.xml><?xml version="1.0" encoding="utf-8"?>
 <p:notes xmlns:a="http://schemas.openxmlformats.org/drawingml/2006/main" xmlns:r="http://schemas.openxmlformats.org/officeDocument/2006/relationships" xmlns:p="http://schemas.openxmlformats.org/presentationml/2006/main">
   <p:cSld>
     <p:spTree>
@@ -35285,7 +35477,7 @@
           <a:p>
             <a:fld id="{C4B2AB52-DE3E-44E0-AFFD-20264D143888}" type="slidenum">
               <a:rPr lang="hu-HU" smtClean="0"/>
-              <a:t>17</a:t>
+              <a:t>18</a:t>
             </a:fld>
             <a:endParaRPr lang="hu-HU"/>
           </a:p>
@@ -35304,7 +35496,7 @@
 </p:notes>
 </file>
 
-<file path=ppt/notesSlides/notesSlide18.xml><?xml version="1.0" encoding="utf-8"?>
+<file path=ppt/notesSlides/notesSlide19.xml><?xml version="1.0" encoding="utf-8"?>
 <p:notes xmlns:a="http://schemas.openxmlformats.org/drawingml/2006/main" xmlns:r="http://schemas.openxmlformats.org/officeDocument/2006/relationships" xmlns:p="http://schemas.openxmlformats.org/presentationml/2006/main">
   <p:cSld>
     <p:spTree>
@@ -35396,7 +35588,7 @@
           <a:p>
             <a:fld id="{C4B2AB52-DE3E-44E0-AFFD-20264D143888}" type="slidenum">
               <a:rPr lang="hu-HU" smtClean="0"/>
-              <a:t>18</a:t>
+              <a:t>19</a:t>
             </a:fld>
             <a:endParaRPr lang="hu-HU"/>
           </a:p>
@@ -35415,7 +35607,150 @@
 </p:notes>
 </file>
 
-<file path=ppt/notesSlides/notesSlide19.xml><?xml version="1.0" encoding="utf-8"?>
+<file path=ppt/notesSlides/notesSlide2.xml><?xml version="1.0" encoding="utf-8"?>
+<p:notes xmlns:a="http://schemas.openxmlformats.org/drawingml/2006/main" xmlns:r="http://schemas.openxmlformats.org/officeDocument/2006/relationships" xmlns:p="http://schemas.openxmlformats.org/presentationml/2006/main">
+  <p:cSld>
+    <p:spTree>
+      <p:nvGrpSpPr>
+        <p:cNvPr id="1" name="">
+          <a:extLst>
+            <a:ext uri="{FF2B5EF4-FFF2-40B4-BE49-F238E27FC236}">
+              <a16:creationId xmlns:a16="http://schemas.microsoft.com/office/drawing/2014/main" id="{151C49E6-C83C-2D66-7713-95154B9EC6FA}"/>
+            </a:ext>
+          </a:extLst>
+        </p:cNvPr>
+        <p:cNvGrpSpPr/>
+        <p:nvPr/>
+      </p:nvGrpSpPr>
+      <p:grpSpPr>
+        <a:xfrm>
+          <a:off x="0" y="0"/>
+          <a:ext cx="0" cy="0"/>
+          <a:chOff x="0" y="0"/>
+          <a:chExt cx="0" cy="0"/>
+        </a:xfrm>
+      </p:grpSpPr>
+      <p:sp>
+        <p:nvSpPr>
+          <p:cNvPr id="2" name="Diakép helye 1">
+            <a:extLst>
+              <a:ext uri="{FF2B5EF4-FFF2-40B4-BE49-F238E27FC236}">
+                <a16:creationId xmlns:a16="http://schemas.microsoft.com/office/drawing/2014/main" id="{74657C0F-C1AB-EE6A-BA62-419C79E82A4A}"/>
+              </a:ext>
+            </a:extLst>
+          </p:cNvPr>
+          <p:cNvSpPr>
+            <a:spLocks noGrp="1" noRot="1" noChangeAspect="1"/>
+          </p:cNvSpPr>
+          <p:nvPr>
+            <p:ph type="sldImg"/>
+          </p:nvPr>
+        </p:nvSpPr>
+        <p:spPr/>
+      </p:sp>
+      <p:sp>
+        <p:nvSpPr>
+          <p:cNvPr id="3" name="Jegyzetek helye 2">
+            <a:extLst>
+              <a:ext uri="{FF2B5EF4-FFF2-40B4-BE49-F238E27FC236}">
+                <a16:creationId xmlns:a16="http://schemas.microsoft.com/office/drawing/2014/main" id="{D0F341A8-B6DC-632A-669D-2A5E12F17648}"/>
+              </a:ext>
+            </a:extLst>
+          </p:cNvPr>
+          <p:cNvSpPr>
+            <a:spLocks noGrp="1"/>
+          </p:cNvSpPr>
+          <p:nvPr>
+            <p:ph type="body" idx="1"/>
+          </p:nvPr>
+        </p:nvSpPr>
+        <p:spPr/>
+        <p:txBody>
+          <a:bodyPr/>
+          <a:lstStyle/>
+          <a:p>
+            <a:r>
+              <a:rPr lang="en-US" dirty="0"/>
+              <a:t>The main problem was that there is no single platform for scale model enthusiasts where everything is available in one place.</a:t>
+            </a:r>
+            <a:r>
+              <a:rPr lang="hu-HU" dirty="0"/>
+              <a:t> </a:t>
+            </a:r>
+            <a:r>
+              <a:rPr lang="en-US" dirty="0"/>
+              <a:t>Most existing websites only focus on listing models, and they don’t really support community features. Because of this, it is hard for users to share their experiences or track their own projects.</a:t>
+            </a:r>
+            <a:r>
+              <a:rPr lang="hu-HU" dirty="0"/>
+              <a:t> </a:t>
+            </a:r>
+            <a:r>
+              <a:rPr lang="en-US" dirty="0"/>
+              <a:t>Our solution was to create one platform that combines all these features. Users can browse models, write reviews, and communicate with others in the forum.</a:t>
+            </a:r>
+            <a:r>
+              <a:rPr lang="hu-HU" dirty="0"/>
+              <a:t> </a:t>
+            </a:r>
+            <a:r>
+              <a:rPr lang="en-US" dirty="0"/>
+              <a:t>We also added a build log feature, so users can track their own work step by step.</a:t>
+            </a:r>
+            <a:r>
+              <a:rPr lang="hu-HU" dirty="0"/>
+              <a:t> </a:t>
+            </a:r>
+            <a:r>
+              <a:rPr lang="en-US" dirty="0"/>
+              <a:t>In addition, we created an admin system and used role-based access control, and we made the application modern and responsive.</a:t>
+            </a:r>
+          </a:p>
+        </p:txBody>
+      </p:sp>
+      <p:sp>
+        <p:nvSpPr>
+          <p:cNvPr id="4" name="Dia számának helye 3">
+            <a:extLst>
+              <a:ext uri="{FF2B5EF4-FFF2-40B4-BE49-F238E27FC236}">
+                <a16:creationId xmlns:a16="http://schemas.microsoft.com/office/drawing/2014/main" id="{BDF2C884-5103-0818-92B0-BC6EADFEBFC1}"/>
+              </a:ext>
+            </a:extLst>
+          </p:cNvPr>
+          <p:cNvSpPr>
+            <a:spLocks noGrp="1"/>
+          </p:cNvSpPr>
+          <p:nvPr>
+            <p:ph type="sldNum" sz="quarter" idx="5"/>
+          </p:nvPr>
+        </p:nvSpPr>
+        <p:spPr/>
+        <p:txBody>
+          <a:bodyPr/>
+          <a:lstStyle/>
+          <a:p>
+            <a:fld id="{C4B2AB52-DE3E-44E0-AFFD-20264D143888}" type="slidenum">
+              <a:rPr lang="hu-HU" smtClean="0"/>
+              <a:t>2</a:t>
+            </a:fld>
+            <a:endParaRPr lang="hu-HU"/>
+          </a:p>
+        </p:txBody>
+      </p:sp>
+    </p:spTree>
+    <p:extLst>
+      <p:ext uri="{BB962C8B-B14F-4D97-AF65-F5344CB8AC3E}">
+        <p14:creationId xmlns:p14="http://schemas.microsoft.com/office/powerpoint/2010/main" val="3749620830"/>
+      </p:ext>
+    </p:extLst>
+  </p:cSld>
+  <p:clrMapOvr>
+    <a:masterClrMapping/>
+  </p:clrMapOvr>
+</p:notes>
+</file>
+
+<file path=ppt/notesSlides/notesSlide20.xml><?xml version="1.0" encoding="utf-8"?>
 <p:notes xmlns:a="http://schemas.openxmlformats.org/drawingml/2006/main" xmlns:r="http://schemas.openxmlformats.org/officeDocument/2006/relationships" xmlns:p="http://schemas.openxmlformats.org/presentationml/2006/main">
   <p:cSld>
     <p:spTree>
@@ -35499,7 +35834,7 @@
           <a:p>
             <a:fld id="{C4B2AB52-DE3E-44E0-AFFD-20264D143888}" type="slidenum">
               <a:rPr lang="hu-HU" smtClean="0"/>
-              <a:t>19</a:t>
+              <a:t>20</a:t>
             </a:fld>
             <a:endParaRPr lang="hu-HU"/>
           </a:p>
@@ -35518,7 +35853,7 @@
 </p:notes>
 </file>
 
-<file path=ppt/notesSlides/notesSlide2.xml><?xml version="1.0" encoding="utf-8"?>
+<file path=ppt/notesSlides/notesSlide3.xml><?xml version="1.0" encoding="utf-8"?>
 <p:notes xmlns:a="http://schemas.openxmlformats.org/drawingml/2006/main" xmlns:r="http://schemas.openxmlformats.org/officeDocument/2006/relationships" xmlns:p="http://schemas.openxmlformats.org/presentationml/2006/main">
   <p:cSld>
     <p:spTree>
@@ -35586,7 +35921,7 @@
           <a:p>
             <a:fld id="{C4B2AB52-DE3E-44E0-AFFD-20264D143888}" type="slidenum">
               <a:rPr lang="hu-HU" smtClean="0"/>
-              <a:t>2</a:t>
+              <a:t>3</a:t>
             </a:fld>
             <a:endParaRPr lang="hu-HU"/>
           </a:p>
@@ -35605,7 +35940,7 @@
 </p:notes>
 </file>
 
-<file path=ppt/notesSlides/notesSlide3.xml><?xml version="1.0" encoding="utf-8"?>
+<file path=ppt/notesSlides/notesSlide4.xml><?xml version="1.0" encoding="utf-8"?>
 <p:notes xmlns:a="http://schemas.openxmlformats.org/drawingml/2006/main" xmlns:r="http://schemas.openxmlformats.org/officeDocument/2006/relationships" xmlns:p="http://schemas.openxmlformats.org/presentationml/2006/main">
   <p:cSld>
     <p:spTree>
@@ -35674,7 +36009,7 @@
           <a:p>
             <a:fld id="{C4B2AB52-DE3E-44E0-AFFD-20264D143888}" type="slidenum">
               <a:rPr lang="hu-HU" smtClean="0"/>
-              <a:t>3</a:t>
+              <a:t>4</a:t>
             </a:fld>
             <a:endParaRPr lang="hu-HU"/>
           </a:p>
@@ -35693,7 +36028,7 @@
 </p:notes>
 </file>
 
-<file path=ppt/notesSlides/notesSlide4.xml><?xml version="1.0" encoding="utf-8"?>
+<file path=ppt/notesSlides/notesSlide5.xml><?xml version="1.0" encoding="utf-8"?>
 <p:notes xmlns:a="http://schemas.openxmlformats.org/drawingml/2006/main" xmlns:r="http://schemas.openxmlformats.org/officeDocument/2006/relationships" xmlns:p="http://schemas.openxmlformats.org/presentationml/2006/main">
   <p:cSld>
     <p:spTree>
@@ -35761,7 +36096,7 @@
           <a:p>
             <a:fld id="{C4B2AB52-DE3E-44E0-AFFD-20264D143888}" type="slidenum">
               <a:rPr lang="hu-HU" smtClean="0"/>
-              <a:t>4</a:t>
+              <a:t>5</a:t>
             </a:fld>
             <a:endParaRPr lang="hu-HU"/>
           </a:p>
@@ -35780,7 +36115,7 @@
 </p:notes>
 </file>
 
-<file path=ppt/notesSlides/notesSlide5.xml><?xml version="1.0" encoding="utf-8"?>
+<file path=ppt/notesSlides/notesSlide6.xml><?xml version="1.0" encoding="utf-8"?>
 <p:notes xmlns:a="http://schemas.openxmlformats.org/drawingml/2006/main" xmlns:r="http://schemas.openxmlformats.org/officeDocument/2006/relationships" xmlns:p="http://schemas.openxmlformats.org/presentationml/2006/main">
   <p:cSld>
     <p:spTree>
@@ -35825,17 +36160,10 @@
           <a:lstStyle/>
           <a:p>
             <a:r>
-              <a:rPr lang="hu-HU" dirty="0"/>
-              <a:t>A rendszer funkcionalitása elég összetett. Van regisztráció és bejelentkezés, makettek listázása, szűrése és keresése, véleményezési lehetőség csillagos értékeléssel, kedvencek kezelése, fórumrendszer, valamint építési napló funkció is. Ezen kívül elkészítettünk egy </a:t>
+              <a:rPr lang="en-US" dirty="0"/>
+              <a:t>The system’s functionality is quite complex. It includes registration and login, listing, filtering, and searching models, the ability to write reviews with star ratings, managing favorites, a forum system, and a build log feature. In addition, we developed an admin interface for approving submitted models and managing users, and we also integrated an AI chat module.</a:t>
             </a:r>
-            <a:r>
-              <a:rPr lang="hu-HU" dirty="0" err="1"/>
-              <a:t>admin</a:t>
-            </a:r>
-            <a:r>
-              <a:rPr lang="hu-HU" dirty="0"/>
-              <a:t> felületet a beküldött makettek jóváhagyására és a felhasználók kezelésére, valamint egy AI chat modult is beépítettünk.</a:t>
-            </a:r>
+            <a:endParaRPr lang="hu-HU" dirty="0"/>
           </a:p>
         </p:txBody>
       </p:sp>
@@ -35856,7 +36184,7 @@
           <a:p>
             <a:fld id="{C4B2AB52-DE3E-44E0-AFFD-20264D143888}" type="slidenum">
               <a:rPr lang="hu-HU" smtClean="0"/>
-              <a:t>5</a:t>
+              <a:t>6</a:t>
             </a:fld>
             <a:endParaRPr lang="hu-HU"/>
           </a:p>
@@ -35875,7 +36203,7 @@
 </p:notes>
 </file>
 
-<file path=ppt/notesSlides/notesSlide6.xml><?xml version="1.0" encoding="utf-8"?>
+<file path=ppt/notesSlides/notesSlide7.xml><?xml version="1.0" encoding="utf-8"?>
 <p:notes xmlns:a="http://schemas.openxmlformats.org/drawingml/2006/main" xmlns:r="http://schemas.openxmlformats.org/officeDocument/2006/relationships" xmlns:p="http://schemas.openxmlformats.org/presentationml/2006/main">
   <p:cSld>
     <p:spTree>
@@ -35943,7 +36271,7 @@
           <a:p>
             <a:fld id="{C4B2AB52-DE3E-44E0-AFFD-20264D143888}" type="slidenum">
               <a:rPr lang="hu-HU" smtClean="0"/>
-              <a:t>6</a:t>
+              <a:t>7</a:t>
             </a:fld>
             <a:endParaRPr lang="hu-HU"/>
           </a:p>
@@ -35962,7 +36290,7 @@
 </p:notes>
 </file>
 
-<file path=ppt/notesSlides/notesSlide7.xml><?xml version="1.0" encoding="utf-8"?>
+<file path=ppt/notesSlides/notesSlide8.xml><?xml version="1.0" encoding="utf-8"?>
 <p:notes xmlns:a="http://schemas.openxmlformats.org/drawingml/2006/main" xmlns:r="http://schemas.openxmlformats.org/officeDocument/2006/relationships" xmlns:p="http://schemas.openxmlformats.org/presentationml/2006/main">
   <p:cSld>
     <p:spTree>
@@ -36038,7 +36366,7 @@
           <a:p>
             <a:fld id="{C4B2AB52-DE3E-44E0-AFFD-20264D143888}" type="slidenum">
               <a:rPr lang="hu-HU" smtClean="0"/>
-              <a:t>7</a:t>
+              <a:t>8</a:t>
             </a:fld>
             <a:endParaRPr lang="hu-HU"/>
           </a:p>
@@ -36057,7 +36385,7 @@
 </p:notes>
 </file>
 
-<file path=ppt/notesSlides/notesSlide8.xml><?xml version="1.0" encoding="utf-8"?>
+<file path=ppt/notesSlides/notesSlide9.xml><?xml version="1.0" encoding="utf-8"?>
 <p:notes xmlns:a="http://schemas.openxmlformats.org/drawingml/2006/main" xmlns:r="http://schemas.openxmlformats.org/officeDocument/2006/relationships" xmlns:p="http://schemas.openxmlformats.org/presentationml/2006/main">
   <p:cSld>
     <p:spTree>
@@ -36133,7 +36461,7 @@
           <a:p>
             <a:fld id="{C4B2AB52-DE3E-44E0-AFFD-20264D143888}" type="slidenum">
               <a:rPr lang="hu-HU" smtClean="0"/>
-              <a:t>8</a:t>
+              <a:t>9</a:t>
             </a:fld>
             <a:endParaRPr lang="hu-HU"/>
           </a:p>
@@ -36143,93 +36471,6 @@
     <p:extLst>
       <p:ext uri="{BB962C8B-B14F-4D97-AF65-F5344CB8AC3E}">
         <p14:creationId xmlns:p14="http://schemas.microsoft.com/office/powerpoint/2010/main" val="2469881783"/>
-      </p:ext>
-    </p:extLst>
-  </p:cSld>
-  <p:clrMapOvr>
-    <a:masterClrMapping/>
-  </p:clrMapOvr>
-</p:notes>
-</file>
-
-<file path=ppt/notesSlides/notesSlide9.xml><?xml version="1.0" encoding="utf-8"?>
-<p:notes xmlns:a="http://schemas.openxmlformats.org/drawingml/2006/main" xmlns:r="http://schemas.openxmlformats.org/officeDocument/2006/relationships" xmlns:p="http://schemas.openxmlformats.org/presentationml/2006/main">
-  <p:cSld>
-    <p:spTree>
-      <p:nvGrpSpPr>
-        <p:cNvPr id="1" name=""/>
-        <p:cNvGrpSpPr/>
-        <p:nvPr/>
-      </p:nvGrpSpPr>
-      <p:grpSpPr>
-        <a:xfrm>
-          <a:off x="0" y="0"/>
-          <a:ext cx="0" cy="0"/>
-          <a:chOff x="0" y="0"/>
-          <a:chExt cx="0" cy="0"/>
-        </a:xfrm>
-      </p:grpSpPr>
-      <p:sp>
-        <p:nvSpPr>
-          <p:cNvPr id="2" name="Diakép helye 1"/>
-          <p:cNvSpPr>
-            <a:spLocks noGrp="1" noRot="1" noChangeAspect="1"/>
-          </p:cNvSpPr>
-          <p:nvPr>
-            <p:ph type="sldImg"/>
-          </p:nvPr>
-        </p:nvSpPr>
-        <p:spPr/>
-      </p:sp>
-      <p:sp>
-        <p:nvSpPr>
-          <p:cNvPr id="3" name="Jegyzetek helye 2"/>
-          <p:cNvSpPr>
-            <a:spLocks noGrp="1"/>
-          </p:cNvSpPr>
-          <p:nvPr>
-            <p:ph type="body" idx="1"/>
-          </p:nvPr>
-        </p:nvSpPr>
-        <p:spPr/>
-        <p:txBody>
-          <a:bodyPr/>
-          <a:lstStyle/>
-          <a:p>
-            <a:r>
-              <a:rPr lang="hu-HU" dirty="0"/>
-              <a:t>Az adatbázist azért terveztük így, mert szerettük volna elkerülni az adatismétlést, és különválasztani a funkciókat. Így a rendszer később is könnyebben bővíthető marad. Például a fórum, a kedvencek vagy az építési tippek külön táblákat kaptak, mert ezek önálló funkcionális egységek. Az állapotkezelés és a szerepköralapú működés miatt is előnyös volt a részletesebb adatmodell.</a:t>
-            </a:r>
-          </a:p>
-        </p:txBody>
-      </p:sp>
-      <p:sp>
-        <p:nvSpPr>
-          <p:cNvPr id="4" name="Dia számának helye 3"/>
-          <p:cNvSpPr>
-            <a:spLocks noGrp="1"/>
-          </p:cNvSpPr>
-          <p:nvPr>
-            <p:ph type="sldNum" sz="quarter" idx="5"/>
-          </p:nvPr>
-        </p:nvSpPr>
-        <p:spPr/>
-        <p:txBody>
-          <a:bodyPr/>
-          <a:lstStyle/>
-          <a:p>
-            <a:fld id="{C4B2AB52-DE3E-44E0-AFFD-20264D143888}" type="slidenum">
-              <a:rPr lang="hu-HU" smtClean="0"/>
-              <a:t>9</a:t>
-            </a:fld>
-            <a:endParaRPr lang="hu-HU"/>
-          </a:p>
-        </p:txBody>
-      </p:sp>
-    </p:spTree>
-    <p:extLst>
-      <p:ext uri="{BB962C8B-B14F-4D97-AF65-F5344CB8AC3E}">
-        <p14:creationId xmlns:p14="http://schemas.microsoft.com/office/powerpoint/2010/main" val="4053797243"/>
       </p:ext>
     </p:extLst>
   </p:cSld>
@@ -36386,7 +36627,7 @@
           <a:p>
             <a:fld id="{F6C265F0-9B0B-43BF-8579-E8996E214BEE}" type="datetimeFigureOut">
               <a:rPr lang="hu-HU" smtClean="0"/>
-              <a:t>2026. 04. 14.</a:t>
+              <a:t>2026. 04. 17.</a:t>
             </a:fld>
             <a:endParaRPr lang="hu-HU"/>
           </a:p>
@@ -36584,7 +36825,7 @@
           <a:p>
             <a:fld id="{F6C265F0-9B0B-43BF-8579-E8996E214BEE}" type="datetimeFigureOut">
               <a:rPr lang="hu-HU" smtClean="0"/>
-              <a:t>2026. 04. 14.</a:t>
+              <a:t>2026. 04. 17.</a:t>
             </a:fld>
             <a:endParaRPr lang="hu-HU"/>
           </a:p>
@@ -36792,7 +37033,7 @@
           <a:p>
             <a:fld id="{F6C265F0-9B0B-43BF-8579-E8996E214BEE}" type="datetimeFigureOut">
               <a:rPr lang="hu-HU" smtClean="0"/>
-              <a:t>2026. 04. 14.</a:t>
+              <a:t>2026. 04. 17.</a:t>
             </a:fld>
             <a:endParaRPr lang="hu-HU"/>
           </a:p>
@@ -36990,7 +37231,7 @@
           <a:p>
             <a:fld id="{F6C265F0-9B0B-43BF-8579-E8996E214BEE}" type="datetimeFigureOut">
               <a:rPr lang="hu-HU" smtClean="0"/>
-              <a:t>2026. 04. 14.</a:t>
+              <a:t>2026. 04. 17.</a:t>
             </a:fld>
             <a:endParaRPr lang="hu-HU"/>
           </a:p>
@@ -37265,7 +37506,7 @@
           <a:p>
             <a:fld id="{F6C265F0-9B0B-43BF-8579-E8996E214BEE}" type="datetimeFigureOut">
               <a:rPr lang="hu-HU" smtClean="0"/>
-              <a:t>2026. 04. 14.</a:t>
+              <a:t>2026. 04. 17.</a:t>
             </a:fld>
             <a:endParaRPr lang="hu-HU"/>
           </a:p>
@@ -37530,7 +37771,7 @@
           <a:p>
             <a:fld id="{F6C265F0-9B0B-43BF-8579-E8996E214BEE}" type="datetimeFigureOut">
               <a:rPr lang="hu-HU" smtClean="0"/>
-              <a:t>2026. 04. 14.</a:t>
+              <a:t>2026. 04. 17.</a:t>
             </a:fld>
             <a:endParaRPr lang="hu-HU"/>
           </a:p>
@@ -37942,7 +38183,7 @@
           <a:p>
             <a:fld id="{F6C265F0-9B0B-43BF-8579-E8996E214BEE}" type="datetimeFigureOut">
               <a:rPr lang="hu-HU" smtClean="0"/>
-              <a:t>2026. 04. 14.</a:t>
+              <a:t>2026. 04. 17.</a:t>
             </a:fld>
             <a:endParaRPr lang="hu-HU"/>
           </a:p>
@@ -38083,7 +38324,7 @@
           <a:p>
             <a:fld id="{F6C265F0-9B0B-43BF-8579-E8996E214BEE}" type="datetimeFigureOut">
               <a:rPr lang="hu-HU" smtClean="0"/>
-              <a:t>2026. 04. 14.</a:t>
+              <a:t>2026. 04. 17.</a:t>
             </a:fld>
             <a:endParaRPr lang="hu-HU"/>
           </a:p>
@@ -38196,7 +38437,7 @@
           <a:p>
             <a:fld id="{F6C265F0-9B0B-43BF-8579-E8996E214BEE}" type="datetimeFigureOut">
               <a:rPr lang="hu-HU" smtClean="0"/>
-              <a:t>2026. 04. 14.</a:t>
+              <a:t>2026. 04. 17.</a:t>
             </a:fld>
             <a:endParaRPr lang="hu-HU"/>
           </a:p>
@@ -38507,7 +38748,7 @@
           <a:p>
             <a:fld id="{F6C265F0-9B0B-43BF-8579-E8996E214BEE}" type="datetimeFigureOut">
               <a:rPr lang="hu-HU" smtClean="0"/>
-              <a:t>2026. 04. 14.</a:t>
+              <a:t>2026. 04. 17.</a:t>
             </a:fld>
             <a:endParaRPr lang="hu-HU"/>
           </a:p>
@@ -38795,7 +39036,7 @@
           <a:p>
             <a:fld id="{F6C265F0-9B0B-43BF-8579-E8996E214BEE}" type="datetimeFigureOut">
               <a:rPr lang="hu-HU" smtClean="0"/>
-              <a:t>2026. 04. 14.</a:t>
+              <a:t>2026. 04. 17.</a:t>
             </a:fld>
             <a:endParaRPr lang="hu-HU"/>
           </a:p>
@@ -39036,7 +39277,7 @@
           <a:p>
             <a:fld id="{F6C265F0-9B0B-43BF-8579-E8996E214BEE}" type="datetimeFigureOut">
               <a:rPr lang="hu-HU" smtClean="0"/>
-              <a:t>2026. 04. 14.</a:t>
+              <a:t>2026. 04. 17.</a:t>
             </a:fld>
             <a:endParaRPr lang="hu-HU"/>
           </a:p>
@@ -39709,12 +39950,36 @@
           <a:p>
             <a:pPr algn="l"/>
             <a:r>
-              <a:rPr lang="hu-HU" sz="2000">
+              <a:rPr lang="hu-HU" sz="2000" dirty="0" err="1">
                 <a:solidFill>
                   <a:schemeClr val="bg1"/>
                 </a:solidFill>
               </a:rPr>
-              <a:t>Készítette: Claus Patrik, Hohn Márton, Szabados Bendegúz Henrik</a:t>
+              <a:t>Created</a:t>
+            </a:r>
+            <a:r>
+              <a:rPr lang="hu-HU" sz="2000" dirty="0">
+                <a:solidFill>
+                  <a:schemeClr val="bg1"/>
+                </a:solidFill>
+              </a:rPr>
+              <a:t> </a:t>
+            </a:r>
+            <a:r>
+              <a:rPr lang="hu-HU" sz="2000" dirty="0" err="1">
+                <a:solidFill>
+                  <a:schemeClr val="bg1"/>
+                </a:solidFill>
+              </a:rPr>
+              <a:t>by</a:t>
+            </a:r>
+            <a:r>
+              <a:rPr lang="hu-HU" sz="2000" dirty="0">
+                <a:solidFill>
+                  <a:schemeClr val="bg1"/>
+                </a:solidFill>
+              </a:rPr>
+              <a:t>: Claus Patrik, Hohn Márton, Szabados Bendegúz Henrik</a:t>
             </a:r>
           </a:p>
         </p:txBody>
@@ -39894,6 +40159,674 @@
 </file>
 
 <file path=ppt/slides/slide10.xml><?xml version="1.0" encoding="utf-8"?>
+<p:sld xmlns:a="http://schemas.openxmlformats.org/drawingml/2006/main" xmlns:r="http://schemas.openxmlformats.org/officeDocument/2006/relationships" xmlns:p="http://schemas.openxmlformats.org/presentationml/2006/main">
+  <p:cSld>
+    <p:bg>
+      <p:bgPr>
+        <a:solidFill>
+          <a:schemeClr val="bg1"/>
+        </a:solidFill>
+        <a:effectLst/>
+      </p:bgPr>
+    </p:bg>
+    <p:spTree>
+      <p:nvGrpSpPr>
+        <p:cNvPr id="1" name=""/>
+        <p:cNvGrpSpPr/>
+        <p:nvPr/>
+      </p:nvGrpSpPr>
+      <p:grpSpPr>
+        <a:xfrm>
+          <a:off x="0" y="0"/>
+          <a:ext cx="0" cy="0"/>
+          <a:chOff x="0" y="0"/>
+          <a:chExt cx="0" cy="0"/>
+        </a:xfrm>
+      </p:grpSpPr>
+      <p:sp useBgFill="1">
+        <p:nvSpPr>
+          <p:cNvPr id="9" name="Rectangle 8">
+            <a:extLst>
+              <a:ext uri="{FF2B5EF4-FFF2-40B4-BE49-F238E27FC236}">
+                <a16:creationId xmlns:a16="http://schemas.microsoft.com/office/drawing/2014/main" id="{A61E7EDE-CB4A-402F-B0FB-8640C3589105}"/>
+              </a:ext>
+              <a:ext uri="{C183D7F6-B498-43B3-948B-1728B52AA6E4}">
+                <adec:decorative xmlns:adec="http://schemas.microsoft.com/office/drawing/2017/decorative" val="1"/>
+              </a:ext>
+            </a:extLst>
+          </p:cNvPr>
+          <p:cNvSpPr>
+            <a:spLocks noGrp="1" noRot="1" noChangeAspect="1" noMove="1" noResize="1" noEditPoints="1" noAdjustHandles="1" noChangeArrowheads="1" noChangeShapeType="1" noTextEdit="1"/>
+          </p:cNvSpPr>
+          <p:nvPr>
+            <p:extLst>
+              <p:ext uri="{386F3935-93C4-4BCD-93E2-E3B085C9AB24}">
+                <p16:designElem xmlns:p16="http://schemas.microsoft.com/office/powerpoint/2015/main" val="1"/>
+              </p:ext>
+            </p:extLst>
+          </p:nvPr>
+        </p:nvSpPr>
+        <p:spPr>
+          <a:xfrm>
+            <a:off x="3048" y="0"/>
+            <a:ext cx="12188952" cy="6858000"/>
+          </a:xfrm>
+          <a:prstGeom prst="rect">
+            <a:avLst/>
+          </a:prstGeom>
+          <a:ln>
+            <a:noFill/>
+          </a:ln>
+        </p:spPr>
+        <p:style>
+          <a:lnRef idx="2">
+            <a:schemeClr val="accent1">
+              <a:shade val="50000"/>
+            </a:schemeClr>
+          </a:lnRef>
+          <a:fillRef idx="1">
+            <a:schemeClr val="accent1"/>
+          </a:fillRef>
+          <a:effectRef idx="0">
+            <a:schemeClr val="accent1"/>
+          </a:effectRef>
+          <a:fontRef idx="minor">
+            <a:schemeClr val="lt1"/>
+          </a:fontRef>
+        </p:style>
+        <p:txBody>
+          <a:bodyPr rtlCol="0" anchor="ctr"/>
+          <a:lstStyle/>
+          <a:p>
+            <a:pPr algn="ctr"/>
+            <a:endParaRPr lang="en-US"/>
+          </a:p>
+        </p:txBody>
+      </p:sp>
+      <p:sp>
+        <p:nvSpPr>
+          <p:cNvPr id="11" name="Rectangle 10">
+            <a:extLst>
+              <a:ext uri="{FF2B5EF4-FFF2-40B4-BE49-F238E27FC236}">
+                <a16:creationId xmlns:a16="http://schemas.microsoft.com/office/drawing/2014/main" id="{6C2BBEB8-4077-499F-80FD-AA9827A8D8B7}"/>
+              </a:ext>
+              <a:ext uri="{C183D7F6-B498-43B3-948B-1728B52AA6E4}">
+                <adec:decorative xmlns:adec="http://schemas.microsoft.com/office/drawing/2017/decorative" val="1"/>
+              </a:ext>
+            </a:extLst>
+          </p:cNvPr>
+          <p:cNvSpPr>
+            <a:spLocks noGrp="1" noRot="1" noChangeAspect="1" noMove="1" noResize="1" noEditPoints="1" noAdjustHandles="1" noChangeArrowheads="1" noChangeShapeType="1" noTextEdit="1"/>
+          </p:cNvSpPr>
+          <p:nvPr>
+            <p:extLst>
+              <p:ext uri="{386F3935-93C4-4BCD-93E2-E3B085C9AB24}">
+                <p16:designElem xmlns:p16="http://schemas.microsoft.com/office/powerpoint/2015/main" val="1"/>
+              </p:ext>
+            </p:extLst>
+          </p:nvPr>
+        </p:nvSpPr>
+        <p:spPr>
+          <a:xfrm>
+            <a:off x="658395" y="608243"/>
+            <a:ext cx="3380205" cy="5445075"/>
+          </a:xfrm>
+          <a:prstGeom prst="rect">
+            <a:avLst/>
+          </a:prstGeom>
+          <a:solidFill>
+            <a:schemeClr val="tx2">
+              <a:lumMod val="50000"/>
+            </a:schemeClr>
+          </a:solidFill>
+          <a:ln>
+            <a:noFill/>
+          </a:ln>
+        </p:spPr>
+        <p:style>
+          <a:lnRef idx="2">
+            <a:schemeClr val="accent1">
+              <a:shade val="50000"/>
+            </a:schemeClr>
+          </a:lnRef>
+          <a:fillRef idx="1">
+            <a:schemeClr val="accent1"/>
+          </a:fillRef>
+          <a:effectRef idx="0">
+            <a:schemeClr val="accent1"/>
+          </a:effectRef>
+          <a:fontRef idx="minor">
+            <a:schemeClr val="lt1"/>
+          </a:fontRef>
+        </p:style>
+        <p:txBody>
+          <a:bodyPr rtlCol="0" anchor="ctr"/>
+          <a:lstStyle/>
+          <a:p>
+            <a:pPr algn="ctr"/>
+            <a:endParaRPr lang="en-US"/>
+          </a:p>
+        </p:txBody>
+      </p:sp>
+      <p:sp>
+        <p:nvSpPr>
+          <p:cNvPr id="2" name="Cím 1">
+            <a:extLst>
+              <a:ext uri="{FF2B5EF4-FFF2-40B4-BE49-F238E27FC236}">
+                <a16:creationId xmlns:a16="http://schemas.microsoft.com/office/drawing/2014/main" id="{57D8C6D9-7496-48C7-A28D-CF19A7502634}"/>
+              </a:ext>
+            </a:extLst>
+          </p:cNvPr>
+          <p:cNvSpPr>
+            <a:spLocks noGrp="1"/>
+          </p:cNvSpPr>
+          <p:nvPr>
+            <p:ph type="title"/>
+          </p:nvPr>
+        </p:nvSpPr>
+        <p:spPr>
+          <a:xfrm>
+            <a:off x="1316791" y="1005303"/>
+            <a:ext cx="2032490" cy="4427309"/>
+          </a:xfrm>
+        </p:spPr>
+        <p:txBody>
+          <a:bodyPr>
+            <a:normAutofit/>
+          </a:bodyPr>
+          <a:lstStyle/>
+          <a:p>
+            <a:r>
+              <a:rPr lang="hu-HU" sz="2800">
+                <a:solidFill>
+                  <a:schemeClr val="bg1"/>
+                </a:solidFill>
+              </a:rPr>
+              <a:t>Miért így terveztük az adatbázist?</a:t>
+            </a:r>
+          </a:p>
+        </p:txBody>
+      </p:sp>
+      <p:sp>
+        <p:nvSpPr>
+          <p:cNvPr id="4" name="Rectangle 1">
+            <a:extLst>
+              <a:ext uri="{FF2B5EF4-FFF2-40B4-BE49-F238E27FC236}">
+                <a16:creationId xmlns:a16="http://schemas.microsoft.com/office/drawing/2014/main" id="{712F3397-1552-4A30-BFC9-5533FDE01A7F}"/>
+              </a:ext>
+            </a:extLst>
+          </p:cNvPr>
+          <p:cNvSpPr>
+            <a:spLocks noGrp="1" noChangeArrowheads="1"/>
+          </p:cNvSpPr>
+          <p:nvPr>
+            <p:ph idx="1"/>
+          </p:nvPr>
+        </p:nvSpPr>
+        <p:spPr bwMode="auto">
+          <a:xfrm>
+            <a:off x="5336498" y="1288934"/>
+            <a:ext cx="5801194" cy="4280132"/>
+          </a:xfrm>
+          <a:prstGeom prst="rect">
+            <a:avLst/>
+          </a:prstGeom>
+          <a:extLst>
+            <a:ext uri="{909E8E84-426E-40DD-AFC4-6F175D3DCCD1}">
+              <a14:hiddenFill xmlns:a14="http://schemas.microsoft.com/office/drawing/2010/main">
+                <a:solidFill>
+                  <a:schemeClr val="accent1"/>
+                </a:solidFill>
+              </a14:hiddenFill>
+            </a:ext>
+            <a:ext uri="{91240B29-F687-4F45-9708-019B960494DF}">
+              <a14:hiddenLine xmlns:a14="http://schemas.microsoft.com/office/drawing/2010/main" w="9525">
+                <a:solidFill>
+                  <a:schemeClr val="tx1"/>
+                </a:solidFill>
+                <a:miter lim="800000"/>
+                <a:headEnd/>
+                <a:tailEnd/>
+              </a14:hiddenLine>
+            </a:ext>
+            <a:ext uri="{AF507438-7753-43E0-B8FC-AC1667EBCBE1}">
+              <a14:hiddenEffects xmlns:a14="http://schemas.microsoft.com/office/drawing/2010/main">
+                <a:effectLst>
+                  <a:outerShdw dist="35921" dir="2700000" algn="ctr" rotWithShape="0">
+                    <a:schemeClr val="bg2"/>
+                  </a:outerShdw>
+                </a:effectLst>
+              </a14:hiddenEffects>
+            </a:ext>
+          </a:extLst>
+        </p:spPr>
+        <p:txBody>
+          <a:bodyPr vert="horz" lIns="91440" tIns="45720" rIns="91440" bIns="45720" numCol="1" anchor="ctr" anchorCtr="0" compatLnSpc="1">
+            <a:prstTxWarp prst="textNoShape">
+              <a:avLst/>
+            </a:prstTxWarp>
+            <a:normAutofit/>
+          </a:bodyPr>
+          <a:lstStyle/>
+          <a:p>
+            <a:pPr marL="0" marR="0" lvl="0" indent="0" defTabSz="914400" rtl="0" eaLnBrk="0" fontAlgn="base" latinLnBrk="0" hangingPunct="0">
+              <a:spcBef>
+                <a:spcPct val="0"/>
+              </a:spcBef>
+              <a:spcAft>
+                <a:spcPts val="600"/>
+              </a:spcAft>
+              <a:buClrTx/>
+              <a:buSzTx/>
+              <a:buFontTx/>
+              <a:buChar char="•"/>
+              <a:tabLst/>
+            </a:pPr>
+            <a:r>
+              <a:rPr kumimoji="0" lang="hu-HU" altLang="hu-HU" sz="2000" b="0" i="0" u="none" strike="noStrike" cap="none" normalizeH="0" baseline="0">
+                <a:ln>
+                  <a:noFill/>
+                </a:ln>
+                <a:effectLst/>
+                <a:latin typeface="Arial" panose="020B0604020202020204" pitchFamily="34" charset="0"/>
+              </a:rPr>
+              <a:t>Redundancia csökkentése</a:t>
+            </a:r>
+          </a:p>
+          <a:p>
+            <a:pPr marL="0" marR="0" lvl="0" indent="0" defTabSz="914400" rtl="0" eaLnBrk="0" fontAlgn="base" latinLnBrk="0" hangingPunct="0">
+              <a:spcBef>
+                <a:spcPct val="0"/>
+              </a:spcBef>
+              <a:spcAft>
+                <a:spcPts val="600"/>
+              </a:spcAft>
+              <a:buClrTx/>
+              <a:buSzTx/>
+              <a:buFontTx/>
+              <a:buChar char="•"/>
+              <a:tabLst/>
+            </a:pPr>
+            <a:r>
+              <a:rPr kumimoji="0" lang="hu-HU" altLang="hu-HU" sz="2000" b="0" i="0" u="none" strike="noStrike" cap="none" normalizeH="0" baseline="0">
+                <a:ln>
+                  <a:noFill/>
+                </a:ln>
+                <a:effectLst/>
+                <a:latin typeface="Arial" panose="020B0604020202020204" pitchFamily="34" charset="0"/>
+              </a:rPr>
+              <a:t>Egyszerűbb lekérdezések</a:t>
+            </a:r>
+          </a:p>
+          <a:p>
+            <a:pPr marL="0" marR="0" lvl="0" indent="0" defTabSz="914400" rtl="0" eaLnBrk="0" fontAlgn="base" latinLnBrk="0" hangingPunct="0">
+              <a:spcBef>
+                <a:spcPct val="0"/>
+              </a:spcBef>
+              <a:spcAft>
+                <a:spcPts val="600"/>
+              </a:spcAft>
+              <a:buClrTx/>
+              <a:buSzTx/>
+              <a:buFontTx/>
+              <a:buChar char="•"/>
+              <a:tabLst/>
+            </a:pPr>
+            <a:r>
+              <a:rPr kumimoji="0" lang="hu-HU" altLang="hu-HU" sz="2000" b="0" i="0" u="none" strike="noStrike" cap="none" normalizeH="0" baseline="0">
+                <a:ln>
+                  <a:noFill/>
+                </a:ln>
+                <a:effectLst/>
+                <a:latin typeface="Arial" panose="020B0604020202020204" pitchFamily="34" charset="0"/>
+              </a:rPr>
+              <a:t>Jogosultságok és állapotok kezelése</a:t>
+            </a:r>
+          </a:p>
+          <a:p>
+            <a:pPr marL="0" marR="0" lvl="0" indent="0" defTabSz="914400" rtl="0" eaLnBrk="0" fontAlgn="base" latinLnBrk="0" hangingPunct="0">
+              <a:spcBef>
+                <a:spcPct val="0"/>
+              </a:spcBef>
+              <a:spcAft>
+                <a:spcPts val="600"/>
+              </a:spcAft>
+              <a:buClrTx/>
+              <a:buSzTx/>
+              <a:buFontTx/>
+              <a:buChar char="•"/>
+              <a:tabLst/>
+            </a:pPr>
+            <a:r>
+              <a:rPr kumimoji="0" lang="hu-HU" altLang="hu-HU" sz="2000" b="0" i="0" u="none" strike="noStrike" cap="none" normalizeH="0" baseline="0">
+                <a:ln>
+                  <a:noFill/>
+                </a:ln>
+                <a:effectLst/>
+                <a:latin typeface="Arial" panose="020B0604020202020204" pitchFamily="34" charset="0"/>
+              </a:rPr>
+              <a:t>Bővíthetőség</a:t>
+            </a:r>
+          </a:p>
+          <a:p>
+            <a:pPr marL="0" marR="0" lvl="0" indent="0" defTabSz="914400" rtl="0" eaLnBrk="0" fontAlgn="base" latinLnBrk="0" hangingPunct="0">
+              <a:spcBef>
+                <a:spcPct val="0"/>
+              </a:spcBef>
+              <a:spcAft>
+                <a:spcPts val="600"/>
+              </a:spcAft>
+              <a:buClrTx/>
+              <a:buSzTx/>
+              <a:buFontTx/>
+              <a:buChar char="•"/>
+              <a:tabLst/>
+            </a:pPr>
+            <a:r>
+              <a:rPr kumimoji="0" lang="hu-HU" altLang="hu-HU" sz="2000" b="0" i="0" u="none" strike="noStrike" cap="none" normalizeH="0" baseline="0">
+                <a:ln>
+                  <a:noFill/>
+                </a:ln>
+                <a:effectLst/>
+                <a:latin typeface="Arial" panose="020B0604020202020204" pitchFamily="34" charset="0"/>
+              </a:rPr>
+              <a:t>Közösségi funkciók támogatása</a:t>
+            </a:r>
+          </a:p>
+        </p:txBody>
+      </p:sp>
+      <p:sp>
+        <p:nvSpPr>
+          <p:cNvPr id="13" name="Rectangle 12">
+            <a:extLst>
+              <a:ext uri="{FF2B5EF4-FFF2-40B4-BE49-F238E27FC236}">
+                <a16:creationId xmlns:a16="http://schemas.microsoft.com/office/drawing/2014/main" id="{6F3B7728-0C26-4662-B285-85C645523C10}"/>
+              </a:ext>
+              <a:ext uri="{C183D7F6-B498-43B3-948B-1728B52AA6E4}">
+                <adec:decorative xmlns:adec="http://schemas.microsoft.com/office/drawing/2017/decorative" val="1"/>
+              </a:ext>
+            </a:extLst>
+          </p:cNvPr>
+          <p:cNvSpPr>
+            <a:spLocks noGrp="1" noRot="1" noChangeAspect="1" noMove="1" noResize="1" noEditPoints="1" noAdjustHandles="1" noChangeArrowheads="1" noChangeShapeType="1" noTextEdit="1"/>
+          </p:cNvSpPr>
+          <p:nvPr>
+            <p:extLst>
+              <p:ext uri="{386F3935-93C4-4BCD-93E2-E3B085C9AB24}">
+                <p16:designElem xmlns:p16="http://schemas.microsoft.com/office/powerpoint/2015/main" val="1"/>
+              </p:ext>
+            </p:extLst>
+          </p:nvPr>
+        </p:nvSpPr>
+        <p:spPr>
+          <a:xfrm>
+            <a:off x="0" y="6053319"/>
+            <a:ext cx="12192000" cy="64008"/>
+          </a:xfrm>
+          <a:prstGeom prst="rect">
+            <a:avLst/>
+          </a:prstGeom>
+          <a:solidFill>
+            <a:schemeClr val="tx2">
+              <a:lumMod val="50000"/>
+            </a:schemeClr>
+          </a:solidFill>
+          <a:ln>
+            <a:noFill/>
+          </a:ln>
+        </p:spPr>
+        <p:style>
+          <a:lnRef idx="2">
+            <a:schemeClr val="accent1">
+              <a:shade val="50000"/>
+            </a:schemeClr>
+          </a:lnRef>
+          <a:fillRef idx="1">
+            <a:schemeClr val="accent1"/>
+          </a:fillRef>
+          <a:effectRef idx="0">
+            <a:schemeClr val="accent1"/>
+          </a:effectRef>
+          <a:fontRef idx="minor">
+            <a:schemeClr val="lt1"/>
+          </a:fontRef>
+        </p:style>
+        <p:txBody>
+          <a:bodyPr rtlCol="0" anchor="ctr"/>
+          <a:lstStyle/>
+          <a:p>
+            <a:pPr algn="ctr"/>
+            <a:endParaRPr lang="en-US" dirty="0"/>
+          </a:p>
+        </p:txBody>
+      </p:sp>
+      <p:sp>
+        <p:nvSpPr>
+          <p:cNvPr id="15" name="Rectangle 14">
+            <a:extLst>
+              <a:ext uri="{FF2B5EF4-FFF2-40B4-BE49-F238E27FC236}">
+                <a16:creationId xmlns:a16="http://schemas.microsoft.com/office/drawing/2014/main" id="{28C367AD-9838-470A-87EF-678609CC8692}"/>
+              </a:ext>
+              <a:ext uri="{C183D7F6-B498-43B3-948B-1728B52AA6E4}">
+                <adec:decorative xmlns:adec="http://schemas.microsoft.com/office/drawing/2017/decorative" val="1"/>
+              </a:ext>
+            </a:extLst>
+          </p:cNvPr>
+          <p:cNvSpPr>
+            <a:spLocks noGrp="1" noRot="1" noChangeAspect="1" noMove="1" noResize="1" noEditPoints="1" noAdjustHandles="1" noChangeArrowheads="1" noChangeShapeType="1" noTextEdit="1"/>
+          </p:cNvSpPr>
+          <p:nvPr>
+            <p:extLst>
+              <p:ext uri="{386F3935-93C4-4BCD-93E2-E3B085C9AB24}">
+                <p16:designElem xmlns:p16="http://schemas.microsoft.com/office/powerpoint/2015/main" val="1"/>
+              </p:ext>
+            </p:extLst>
+          </p:nvPr>
+        </p:nvSpPr>
+        <p:spPr>
+          <a:xfrm rot="5400000">
+            <a:off x="-2770606" y="3396997"/>
+            <a:ext cx="6858002" cy="64008"/>
+          </a:xfrm>
+          <a:prstGeom prst="rect">
+            <a:avLst/>
+          </a:prstGeom>
+          <a:solidFill>
+            <a:schemeClr val="tx2">
+              <a:lumMod val="50000"/>
+            </a:schemeClr>
+          </a:solidFill>
+          <a:ln>
+            <a:noFill/>
+          </a:ln>
+        </p:spPr>
+        <p:style>
+          <a:lnRef idx="2">
+            <a:schemeClr val="accent1">
+              <a:shade val="50000"/>
+            </a:schemeClr>
+          </a:lnRef>
+          <a:fillRef idx="1">
+            <a:schemeClr val="accent1"/>
+          </a:fillRef>
+          <a:effectRef idx="0">
+            <a:schemeClr val="accent1"/>
+          </a:effectRef>
+          <a:fontRef idx="minor">
+            <a:schemeClr val="lt1"/>
+          </a:fontRef>
+        </p:style>
+        <p:txBody>
+          <a:bodyPr rtlCol="0" anchor="ctr"/>
+          <a:lstStyle/>
+          <a:p>
+            <a:pPr algn="ctr"/>
+            <a:endParaRPr lang="en-US"/>
+          </a:p>
+        </p:txBody>
+      </p:sp>
+      <p:sp>
+        <p:nvSpPr>
+          <p:cNvPr id="17" name="Rectangle 16">
+            <a:extLst>
+              <a:ext uri="{FF2B5EF4-FFF2-40B4-BE49-F238E27FC236}">
+                <a16:creationId xmlns:a16="http://schemas.microsoft.com/office/drawing/2014/main" id="{B0CF1642-4E76-4223-A010-6334380A22EA}"/>
+              </a:ext>
+              <a:ext uri="{C183D7F6-B498-43B3-948B-1728B52AA6E4}">
+                <adec:decorative xmlns:adec="http://schemas.microsoft.com/office/drawing/2017/decorative" val="1"/>
+              </a:ext>
+            </a:extLst>
+          </p:cNvPr>
+          <p:cNvSpPr>
+            <a:spLocks noGrp="1" noRot="1" noChangeAspect="1" noMove="1" noResize="1" noEditPoints="1" noAdjustHandles="1" noChangeArrowheads="1" noChangeShapeType="1" noTextEdit="1"/>
+          </p:cNvSpPr>
+          <p:nvPr>
+            <p:extLst>
+              <p:ext uri="{386F3935-93C4-4BCD-93E2-E3B085C9AB24}">
+                <p16:designElem xmlns:p16="http://schemas.microsoft.com/office/powerpoint/2015/main" val="1"/>
+              </p:ext>
+            </p:extLst>
+          </p:nvPr>
+        </p:nvSpPr>
+        <p:spPr>
+          <a:xfrm>
+            <a:off x="0" y="544236"/>
+            <a:ext cx="12192000" cy="64008"/>
+          </a:xfrm>
+          <a:prstGeom prst="rect">
+            <a:avLst/>
+          </a:prstGeom>
+          <a:solidFill>
+            <a:schemeClr val="tx2">
+              <a:lumMod val="50000"/>
+            </a:schemeClr>
+          </a:solidFill>
+          <a:ln>
+            <a:noFill/>
+          </a:ln>
+        </p:spPr>
+        <p:style>
+          <a:lnRef idx="2">
+            <a:schemeClr val="accent1">
+              <a:shade val="50000"/>
+            </a:schemeClr>
+          </a:lnRef>
+          <a:fillRef idx="1">
+            <a:schemeClr val="accent1"/>
+          </a:fillRef>
+          <a:effectRef idx="0">
+            <a:schemeClr val="accent1"/>
+          </a:effectRef>
+          <a:fontRef idx="minor">
+            <a:schemeClr val="lt1"/>
+          </a:fontRef>
+        </p:style>
+        <p:txBody>
+          <a:bodyPr rtlCol="0" anchor="ctr"/>
+          <a:lstStyle/>
+          <a:p>
+            <a:pPr algn="ctr"/>
+            <a:endParaRPr lang="en-US" dirty="0"/>
+          </a:p>
+        </p:txBody>
+      </p:sp>
+      <p:pic>
+        <p:nvPicPr>
+          <p:cNvPr id="6" name="Kép 5">
+            <a:extLst>
+              <a:ext uri="{FF2B5EF4-FFF2-40B4-BE49-F238E27FC236}">
+                <a16:creationId xmlns:a16="http://schemas.microsoft.com/office/drawing/2014/main" id="{89859A2F-F052-6CD9-84A4-217E3AA8477A}"/>
+              </a:ext>
+            </a:extLst>
+          </p:cNvPr>
+          <p:cNvPicPr>
+            <a:picLocks noChangeAspect="1"/>
+          </p:cNvPicPr>
+          <p:nvPr/>
+        </p:nvPicPr>
+        <p:blipFill>
+          <a:blip r:embed="rId3">
+            <a:extLst>
+              <a:ext uri="{28A0092B-C50C-407E-A947-70E740481C1C}">
+                <a14:useLocalDpi xmlns:a14="http://schemas.microsoft.com/office/drawing/2010/main" val="0"/>
+              </a:ext>
+            </a:extLst>
+          </a:blip>
+          <a:stretch>
+            <a:fillRect/>
+          </a:stretch>
+        </p:blipFill>
+        <p:spPr>
+          <a:xfrm>
+            <a:off x="10289628" y="5108028"/>
+            <a:ext cx="1749972" cy="1749972"/>
+          </a:xfrm>
+          <a:prstGeom prst="rect">
+            <a:avLst/>
+          </a:prstGeom>
+        </p:spPr>
+      </p:pic>
+      <p:pic>
+        <p:nvPicPr>
+          <p:cNvPr id="7" name="Picture 2" descr="Budapesti Gazdasági Szakképzési Centrum Pestszentlőrinci Technikum | EDIR">
+            <a:extLst>
+              <a:ext uri="{FF2B5EF4-FFF2-40B4-BE49-F238E27FC236}">
+                <a16:creationId xmlns:a16="http://schemas.microsoft.com/office/drawing/2014/main" id="{01A56FBC-DF23-DAA2-1198-340A78F38FED}"/>
+              </a:ext>
+            </a:extLst>
+          </p:cNvPr>
+          <p:cNvPicPr>
+            <a:picLocks noChangeAspect="1" noChangeArrowheads="1"/>
+          </p:cNvPicPr>
+          <p:nvPr/>
+        </p:nvPicPr>
+        <p:blipFill>
+          <a:blip r:embed="rId4">
+            <a:extLst>
+              <a:ext uri="{28A0092B-C50C-407E-A947-70E740481C1C}">
+                <a14:useLocalDpi xmlns:a14="http://schemas.microsoft.com/office/drawing/2010/main" val="0"/>
+              </a:ext>
+            </a:extLst>
+          </a:blip>
+          <a:srcRect/>
+          <a:stretch>
+            <a:fillRect/>
+          </a:stretch>
+        </p:blipFill>
+        <p:spPr bwMode="auto">
+          <a:xfrm>
+            <a:off x="296888" y="5393198"/>
+            <a:ext cx="1796980" cy="1179631"/>
+          </a:xfrm>
+          <a:prstGeom prst="rect">
+            <a:avLst/>
+          </a:prstGeom>
+          <a:noFill/>
+          <a:extLst>
+            <a:ext uri="{909E8E84-426E-40DD-AFC4-6F175D3DCCD1}">
+              <a14:hiddenFill xmlns:a14="http://schemas.microsoft.com/office/drawing/2010/main">
+                <a:solidFill>
+                  <a:srgbClr val="FFFFFF"/>
+                </a:solidFill>
+              </a14:hiddenFill>
+            </a:ext>
+          </a:extLst>
+        </p:spPr>
+      </p:pic>
+    </p:spTree>
+    <p:extLst>
+      <p:ext uri="{BB962C8B-B14F-4D97-AF65-F5344CB8AC3E}">
+        <p14:creationId xmlns:p14="http://schemas.microsoft.com/office/powerpoint/2010/main" val="3630747796"/>
+      </p:ext>
+    </p:extLst>
+  </p:cSld>
+  <p:clrMapOvr>
+    <a:masterClrMapping/>
+  </p:clrMapOvr>
+</p:sld>
+</file>
+
+<file path=ppt/slides/slide11.xml><?xml version="1.0" encoding="utf-8"?>
 <p:sld xmlns:a="http://schemas.openxmlformats.org/drawingml/2006/main" xmlns:r="http://schemas.openxmlformats.org/officeDocument/2006/relationships" xmlns:p="http://schemas.openxmlformats.org/presentationml/2006/main">
   <p:cSld>
     <p:bg>
@@ -40596,7 +41529,7 @@
 </p:sld>
 </file>
 
-<file path=ppt/slides/slide11.xml><?xml version="1.0" encoding="utf-8"?>
+<file path=ppt/slides/slide12.xml><?xml version="1.0" encoding="utf-8"?>
 <p:sld xmlns:a="http://schemas.openxmlformats.org/drawingml/2006/main" xmlns:r="http://schemas.openxmlformats.org/officeDocument/2006/relationships" xmlns:p="http://schemas.openxmlformats.org/presentationml/2006/main">
   <p:cSld>
     <p:bg>
@@ -41572,7 +42505,7 @@
 </p:sld>
 </file>
 
-<file path=ppt/slides/slide12.xml><?xml version="1.0" encoding="utf-8"?>
+<file path=ppt/slides/slide13.xml><?xml version="1.0" encoding="utf-8"?>
 <p:sld xmlns:a="http://schemas.openxmlformats.org/drawingml/2006/main" xmlns:r="http://schemas.openxmlformats.org/officeDocument/2006/relationships" xmlns:p="http://schemas.openxmlformats.org/presentationml/2006/main">
   <p:cSld>
     <p:bg>
@@ -42310,7 +43243,7 @@
 </p:sld>
 </file>
 
-<file path=ppt/slides/slide13.xml><?xml version="1.0" encoding="utf-8"?>
+<file path=ppt/slides/slide14.xml><?xml version="1.0" encoding="utf-8"?>
 <p:sld xmlns:a="http://schemas.openxmlformats.org/drawingml/2006/main" xmlns:r="http://schemas.openxmlformats.org/officeDocument/2006/relationships" xmlns:p="http://schemas.openxmlformats.org/presentationml/2006/main">
   <p:cSld>
     <p:bg>
@@ -43048,7 +43981,7 @@
 </p:sld>
 </file>
 
-<file path=ppt/slides/slide14.xml><?xml version="1.0" encoding="utf-8"?>
+<file path=ppt/slides/slide15.xml><?xml version="1.0" encoding="utf-8"?>
 <p:sld xmlns:a="http://schemas.openxmlformats.org/drawingml/2006/main" xmlns:r="http://schemas.openxmlformats.org/officeDocument/2006/relationships" xmlns:p="http://schemas.openxmlformats.org/presentationml/2006/main">
   <p:cSld>
     <p:bg>
@@ -44050,7 +44983,7 @@
 </p:sld>
 </file>
 
-<file path=ppt/slides/slide15.xml><?xml version="1.0" encoding="utf-8"?>
+<file path=ppt/slides/slide16.xml><?xml version="1.0" encoding="utf-8"?>
 <p:sld xmlns:a="http://schemas.openxmlformats.org/drawingml/2006/main" xmlns:r="http://schemas.openxmlformats.org/officeDocument/2006/relationships" xmlns:p="http://schemas.openxmlformats.org/presentationml/2006/main">
   <p:cSld>
     <p:bg>
@@ -44855,7 +45788,7 @@
 </p:sld>
 </file>
 
-<file path=ppt/slides/slide16.xml><?xml version="1.0" encoding="utf-8"?>
+<file path=ppt/slides/slide17.xml><?xml version="1.0" encoding="utf-8"?>
 <p:sld xmlns:a="http://schemas.openxmlformats.org/drawingml/2006/main" xmlns:r="http://schemas.openxmlformats.org/officeDocument/2006/relationships" xmlns:p="http://schemas.openxmlformats.org/presentationml/2006/main">
   <p:cSld>
     <p:bg>
@@ -45593,7 +46526,7 @@
 </p:sld>
 </file>
 
-<file path=ppt/slides/slide17.xml><?xml version="1.0" encoding="utf-8"?>
+<file path=ppt/slides/slide18.xml><?xml version="1.0" encoding="utf-8"?>
 <p:sld xmlns:a="http://schemas.openxmlformats.org/drawingml/2006/main" xmlns:r="http://schemas.openxmlformats.org/officeDocument/2006/relationships" xmlns:p="http://schemas.openxmlformats.org/presentationml/2006/main">
   <p:cSld>
     <p:bg>
@@ -46331,7 +47264,7 @@
 </p:sld>
 </file>
 
-<file path=ppt/slides/slide18.xml><?xml version="1.0" encoding="utf-8"?>
+<file path=ppt/slides/slide19.xml><?xml version="1.0" encoding="utf-8"?>
 <p:sld xmlns:a="http://schemas.openxmlformats.org/drawingml/2006/main" xmlns:r="http://schemas.openxmlformats.org/officeDocument/2006/relationships" xmlns:p="http://schemas.openxmlformats.org/presentationml/2006/main">
   <p:cSld>
     <p:bg>
@@ -46634,7 +47567,909 @@
 </p:sld>
 </file>
 
-<file path=ppt/slides/slide19.xml><?xml version="1.0" encoding="utf-8"?>
+<file path=ppt/slides/slide2.xml><?xml version="1.0" encoding="utf-8"?>
+<p:sld xmlns:a="http://schemas.openxmlformats.org/drawingml/2006/main" xmlns:r="http://schemas.openxmlformats.org/officeDocument/2006/relationships" xmlns:p="http://schemas.openxmlformats.org/presentationml/2006/main">
+  <p:cSld>
+    <p:bg>
+      <p:bgPr>
+        <a:solidFill>
+          <a:schemeClr val="bg1"/>
+        </a:solidFill>
+        <a:effectLst/>
+      </p:bgPr>
+    </p:bg>
+    <p:spTree>
+      <p:nvGrpSpPr>
+        <p:cNvPr id="1" name="">
+          <a:extLst>
+            <a:ext uri="{FF2B5EF4-FFF2-40B4-BE49-F238E27FC236}">
+              <a16:creationId xmlns:a16="http://schemas.microsoft.com/office/drawing/2014/main" id="{5CD657CA-252B-94AD-1FE7-A973F13B31F7}"/>
+            </a:ext>
+          </a:extLst>
+        </p:cNvPr>
+        <p:cNvGrpSpPr/>
+        <p:nvPr/>
+      </p:nvGrpSpPr>
+      <p:grpSpPr>
+        <a:xfrm>
+          <a:off x="0" y="0"/>
+          <a:ext cx="0" cy="0"/>
+          <a:chOff x="0" y="0"/>
+          <a:chExt cx="0" cy="0"/>
+        </a:xfrm>
+      </p:grpSpPr>
+      <p:sp useBgFill="1">
+        <p:nvSpPr>
+          <p:cNvPr id="19" name="Rectangle 9">
+            <a:extLst>
+              <a:ext uri="{FF2B5EF4-FFF2-40B4-BE49-F238E27FC236}">
+                <a16:creationId xmlns:a16="http://schemas.microsoft.com/office/drawing/2014/main" id="{1192DA4A-7391-502A-8FD5-D9D28F8A1700}"/>
+              </a:ext>
+              <a:ext uri="{C183D7F6-B498-43B3-948B-1728B52AA6E4}">
+                <adec:decorative xmlns:adec="http://schemas.microsoft.com/office/drawing/2017/decorative" val="1"/>
+              </a:ext>
+            </a:extLst>
+          </p:cNvPr>
+          <p:cNvSpPr>
+            <a:spLocks noGrp="1" noRot="1" noChangeAspect="1" noMove="1" noResize="1" noEditPoints="1" noAdjustHandles="1" noChangeArrowheads="1" noChangeShapeType="1" noTextEdit="1"/>
+          </p:cNvSpPr>
+          <p:nvPr>
+            <p:extLst>
+              <p:ext uri="{386F3935-93C4-4BCD-93E2-E3B085C9AB24}">
+                <p16:designElem xmlns:p16="http://schemas.microsoft.com/office/powerpoint/2015/main" val="1"/>
+              </p:ext>
+            </p:extLst>
+          </p:nvPr>
+        </p:nvSpPr>
+        <p:spPr>
+          <a:xfrm>
+            <a:off x="0" y="0"/>
+            <a:ext cx="12192000" cy="6858000"/>
+          </a:xfrm>
+          <a:prstGeom prst="rect">
+            <a:avLst/>
+          </a:prstGeom>
+          <a:ln w="12700" cap="flat" cmpd="sng" algn="ctr">
+            <a:noFill/>
+            <a:prstDash val="solid"/>
+            <a:miter lim="800000"/>
+          </a:ln>
+          <a:effectLst/>
+          <a:extLst>
+            <a:ext uri="{91240B29-F687-4F45-9708-019B960494DF}">
+              <a14:hiddenLine xmlns:a14="http://schemas.microsoft.com/office/drawing/2010/main" w="12700" cap="flat" cmpd="sng" algn="ctr">
+                <a:solidFill>
+                  <a:schemeClr val="accent1">
+                    <a:shade val="50000"/>
+                  </a:schemeClr>
+                </a:solidFill>
+                <a:prstDash val="solid"/>
+                <a:miter lim="800000"/>
+              </a14:hiddenLine>
+            </a:ext>
+          </a:extLst>
+        </p:spPr>
+        <p:style>
+          <a:lnRef idx="2">
+            <a:schemeClr val="accent1">
+              <a:shade val="50000"/>
+            </a:schemeClr>
+          </a:lnRef>
+          <a:fillRef idx="1">
+            <a:schemeClr val="accent1"/>
+          </a:fillRef>
+          <a:effectRef idx="0">
+            <a:schemeClr val="accent1"/>
+          </a:effectRef>
+          <a:fontRef idx="minor">
+            <a:schemeClr val="lt1"/>
+          </a:fontRef>
+        </p:style>
+        <p:txBody>
+          <a:bodyPr rtlCol="0" anchor="ctr"/>
+          <a:lstStyle/>
+          <a:p>
+            <a:pPr algn="ctr"/>
+            <a:endParaRPr lang="en-US"/>
+          </a:p>
+        </p:txBody>
+      </p:sp>
+      <p:sp>
+        <p:nvSpPr>
+          <p:cNvPr id="21" name="Rectangle 11">
+            <a:extLst>
+              <a:ext uri="{FF2B5EF4-FFF2-40B4-BE49-F238E27FC236}">
+                <a16:creationId xmlns:a16="http://schemas.microsoft.com/office/drawing/2014/main" id="{809E97CA-6A32-0416-BC72-0BDD6D1B12F9}"/>
+              </a:ext>
+              <a:ext uri="{C183D7F6-B498-43B3-948B-1728B52AA6E4}">
+                <adec:decorative xmlns:adec="http://schemas.microsoft.com/office/drawing/2017/decorative" val="1"/>
+              </a:ext>
+            </a:extLst>
+          </p:cNvPr>
+          <p:cNvSpPr>
+            <a:spLocks noGrp="1" noRot="1" noChangeAspect="1" noMove="1" noResize="1" noEditPoints="1" noAdjustHandles="1" noChangeArrowheads="1" noChangeShapeType="1" noTextEdit="1"/>
+          </p:cNvSpPr>
+          <p:nvPr>
+            <p:extLst>
+              <p:ext uri="{386F3935-93C4-4BCD-93E2-E3B085C9AB24}">
+                <p16:designElem xmlns:p16="http://schemas.microsoft.com/office/powerpoint/2015/main" val="1"/>
+              </p:ext>
+            </p:extLst>
+          </p:nvPr>
+        </p:nvSpPr>
+        <p:spPr>
+          <a:xfrm rot="5400000" flipH="1">
+            <a:off x="-1410084" y="1410082"/>
+            <a:ext cx="6858000" cy="4037836"/>
+          </a:xfrm>
+          <a:prstGeom prst="rect">
+            <a:avLst/>
+          </a:prstGeom>
+          <a:gradFill>
+            <a:gsLst>
+              <a:gs pos="8000">
+                <a:srgbClr val="000000"/>
+              </a:gs>
+              <a:gs pos="100000">
+                <a:schemeClr val="accent1">
+                  <a:lumMod val="75000"/>
+                </a:schemeClr>
+              </a:gs>
+            </a:gsLst>
+            <a:lin ang="3000000" scaled="0"/>
+          </a:gradFill>
+          <a:ln>
+            <a:noFill/>
+          </a:ln>
+        </p:spPr>
+        <p:style>
+          <a:lnRef idx="2">
+            <a:schemeClr val="accent1">
+              <a:shade val="50000"/>
+            </a:schemeClr>
+          </a:lnRef>
+          <a:fillRef idx="1">
+            <a:schemeClr val="accent1"/>
+          </a:fillRef>
+          <a:effectRef idx="0">
+            <a:schemeClr val="accent1"/>
+          </a:effectRef>
+          <a:fontRef idx="minor">
+            <a:schemeClr val="lt1"/>
+          </a:fontRef>
+        </p:style>
+        <p:txBody>
+          <a:bodyPr rtlCol="0" anchor="ctr"/>
+          <a:lstStyle/>
+          <a:p>
+            <a:pPr algn="ctr"/>
+            <a:endParaRPr lang="en-US"/>
+          </a:p>
+        </p:txBody>
+      </p:sp>
+      <p:sp>
+        <p:nvSpPr>
+          <p:cNvPr id="22" name="Rectangle 13">
+            <a:extLst>
+              <a:ext uri="{FF2B5EF4-FFF2-40B4-BE49-F238E27FC236}">
+                <a16:creationId xmlns:a16="http://schemas.microsoft.com/office/drawing/2014/main" id="{88A4F777-9CBF-6927-13AD-2B7B740B42FC}"/>
+              </a:ext>
+              <a:ext uri="{C183D7F6-B498-43B3-948B-1728B52AA6E4}">
+                <adec:decorative xmlns:adec="http://schemas.microsoft.com/office/drawing/2017/decorative" val="1"/>
+              </a:ext>
+            </a:extLst>
+          </p:cNvPr>
+          <p:cNvSpPr>
+            <a:spLocks noGrp="1" noRot="1" noChangeAspect="1" noMove="1" noResize="1" noEditPoints="1" noAdjustHandles="1" noChangeArrowheads="1" noChangeShapeType="1" noTextEdit="1"/>
+          </p:cNvSpPr>
+          <p:nvPr>
+            <p:extLst>
+              <p:ext uri="{386F3935-93C4-4BCD-93E2-E3B085C9AB24}">
+                <p16:designElem xmlns:p16="http://schemas.microsoft.com/office/powerpoint/2015/main" val="1"/>
+              </p:ext>
+            </p:extLst>
+          </p:nvPr>
+        </p:nvSpPr>
+        <p:spPr>
+          <a:xfrm rot="5400000" flipH="1">
+            <a:off x="-1410085" y="1420219"/>
+            <a:ext cx="6857999" cy="4037839"/>
+          </a:xfrm>
+          <a:prstGeom prst="rect">
+            <a:avLst/>
+          </a:prstGeom>
+          <a:gradFill>
+            <a:gsLst>
+              <a:gs pos="0">
+                <a:srgbClr val="000000">
+                  <a:alpha val="0"/>
+                </a:srgbClr>
+              </a:gs>
+              <a:gs pos="99000">
+                <a:schemeClr val="accent1">
+                  <a:alpha val="46000"/>
+                </a:schemeClr>
+              </a:gs>
+            </a:gsLst>
+            <a:lin ang="1800000" scaled="0"/>
+          </a:gradFill>
+          <a:ln>
+            <a:noFill/>
+          </a:ln>
+        </p:spPr>
+        <p:style>
+          <a:lnRef idx="2">
+            <a:schemeClr val="accent1">
+              <a:shade val="50000"/>
+            </a:schemeClr>
+          </a:lnRef>
+          <a:fillRef idx="1">
+            <a:schemeClr val="accent1"/>
+          </a:fillRef>
+          <a:effectRef idx="0">
+            <a:schemeClr val="accent1"/>
+          </a:effectRef>
+          <a:fontRef idx="minor">
+            <a:schemeClr val="lt1"/>
+          </a:fontRef>
+        </p:style>
+        <p:txBody>
+          <a:bodyPr rtlCol="0" anchor="ctr"/>
+          <a:lstStyle/>
+          <a:p>
+            <a:pPr algn="ctr"/>
+            <a:endParaRPr lang="en-US"/>
+          </a:p>
+        </p:txBody>
+      </p:sp>
+      <p:sp>
+        <p:nvSpPr>
+          <p:cNvPr id="23" name="Rectangle 15">
+            <a:extLst>
+              <a:ext uri="{FF2B5EF4-FFF2-40B4-BE49-F238E27FC236}">
+                <a16:creationId xmlns:a16="http://schemas.microsoft.com/office/drawing/2014/main" id="{D9F1BC3E-92BE-7C1B-FF2D-1D860C8EAD4C}"/>
+              </a:ext>
+              <a:ext uri="{C183D7F6-B498-43B3-948B-1728B52AA6E4}">
+                <adec:decorative xmlns:adec="http://schemas.microsoft.com/office/drawing/2017/decorative" val="1"/>
+              </a:ext>
+            </a:extLst>
+          </p:cNvPr>
+          <p:cNvSpPr>
+            <a:spLocks noGrp="1" noRot="1" noChangeAspect="1" noMove="1" noResize="1" noEditPoints="1" noAdjustHandles="1" noChangeArrowheads="1" noChangeShapeType="1" noTextEdit="1"/>
+          </p:cNvSpPr>
+          <p:nvPr>
+            <p:extLst>
+              <p:ext uri="{386F3935-93C4-4BCD-93E2-E3B085C9AB24}">
+                <p16:designElem xmlns:p16="http://schemas.microsoft.com/office/powerpoint/2015/main" val="1"/>
+              </p:ext>
+            </p:extLst>
+          </p:nvPr>
+        </p:nvSpPr>
+        <p:spPr>
+          <a:xfrm rot="5400000" flipH="1">
+            <a:off x="767923" y="3588085"/>
+            <a:ext cx="2501979" cy="4037841"/>
+          </a:xfrm>
+          <a:prstGeom prst="rect">
+            <a:avLst/>
+          </a:prstGeom>
+          <a:gradFill>
+            <a:gsLst>
+              <a:gs pos="2000">
+                <a:schemeClr val="accent1">
+                  <a:alpha val="29000"/>
+                </a:schemeClr>
+              </a:gs>
+              <a:gs pos="100000">
+                <a:srgbClr val="000000">
+                  <a:alpha val="30000"/>
+                </a:srgbClr>
+              </a:gs>
+            </a:gsLst>
+            <a:lin ang="7800000" scaled="0"/>
+          </a:gradFill>
+          <a:ln>
+            <a:noFill/>
+          </a:ln>
+        </p:spPr>
+        <p:style>
+          <a:lnRef idx="2">
+            <a:schemeClr val="accent1">
+              <a:shade val="50000"/>
+            </a:schemeClr>
+          </a:lnRef>
+          <a:fillRef idx="1">
+            <a:schemeClr val="accent1"/>
+          </a:fillRef>
+          <a:effectRef idx="0">
+            <a:schemeClr val="accent1"/>
+          </a:effectRef>
+          <a:fontRef idx="minor">
+            <a:schemeClr val="lt1"/>
+          </a:fontRef>
+        </p:style>
+        <p:txBody>
+          <a:bodyPr rtlCol="0" anchor="ctr"/>
+          <a:lstStyle/>
+          <a:p>
+            <a:pPr algn="ctr"/>
+            <a:endParaRPr lang="en-US" dirty="0"/>
+          </a:p>
+        </p:txBody>
+      </p:sp>
+      <p:sp>
+        <p:nvSpPr>
+          <p:cNvPr id="18" name="Freeform: Shape 17">
+            <a:extLst>
+              <a:ext uri="{FF2B5EF4-FFF2-40B4-BE49-F238E27FC236}">
+                <a16:creationId xmlns:a16="http://schemas.microsoft.com/office/drawing/2014/main" id="{F270BB71-76A9-CC27-0CE0-9F994499EF0A}"/>
+              </a:ext>
+              <a:ext uri="{C183D7F6-B498-43B3-948B-1728B52AA6E4}">
+                <adec:decorative xmlns:adec="http://schemas.microsoft.com/office/drawing/2017/decorative" val="1"/>
+              </a:ext>
+            </a:extLst>
+          </p:cNvPr>
+          <p:cNvSpPr>
+            <a:spLocks noGrp="1" noRot="1" noChangeAspect="1" noMove="1" noResize="1" noEditPoints="1" noAdjustHandles="1" noChangeArrowheads="1" noChangeShapeType="1" noTextEdit="1"/>
+          </p:cNvSpPr>
+          <p:nvPr>
+            <p:extLst>
+              <p:ext uri="{386F3935-93C4-4BCD-93E2-E3B085C9AB24}">
+                <p16:designElem xmlns:p16="http://schemas.microsoft.com/office/powerpoint/2015/main" val="1"/>
+              </p:ext>
+            </p:extLst>
+          </p:nvPr>
+        </p:nvSpPr>
+        <p:spPr>
+          <a:xfrm rot="20635413">
+            <a:off x="-501737" y="969718"/>
+            <a:ext cx="3900357" cy="4178958"/>
+          </a:xfrm>
+          <a:custGeom>
+            <a:avLst/>
+            <a:gdLst>
+              <a:gd name="connsiteX0" fmla="*/ 2432225 w 3900357"/>
+              <a:gd name="connsiteY0" fmla="*/ 93939 h 4178958"/>
+              <a:gd name="connsiteX1" fmla="*/ 3900357 w 3900357"/>
+              <a:gd name="connsiteY1" fmla="*/ 2089479 h 4178958"/>
+              <a:gd name="connsiteX2" fmla="*/ 1810878 w 3900357"/>
+              <a:gd name="connsiteY2" fmla="*/ 4178958 h 4178958"/>
+              <a:gd name="connsiteX3" fmla="*/ 78249 w 3900357"/>
+              <a:gd name="connsiteY3" fmla="*/ 3257727 h 4178958"/>
+              <a:gd name="connsiteX4" fmla="*/ 0 w 3900357"/>
+              <a:gd name="connsiteY4" fmla="*/ 3128923 h 4178958"/>
+              <a:gd name="connsiteX5" fmla="*/ 831324 w 3900357"/>
+              <a:gd name="connsiteY5" fmla="*/ 244281 h 4178958"/>
+              <a:gd name="connsiteX6" fmla="*/ 997559 w 3900357"/>
+              <a:gd name="connsiteY6" fmla="*/ 164202 h 4178958"/>
+              <a:gd name="connsiteX7" fmla="*/ 1810878 w 3900357"/>
+              <a:gd name="connsiteY7" fmla="*/ 0 h 4178958"/>
+              <a:gd name="connsiteX8" fmla="*/ 2432225 w 3900357"/>
+              <a:gd name="connsiteY8" fmla="*/ 93939 h 4178958"/>
+            </a:gdLst>
+            <a:ahLst/>
+            <a:cxnLst>
+              <a:cxn ang="0">
+                <a:pos x="connsiteX0" y="connsiteY0"/>
+              </a:cxn>
+              <a:cxn ang="0">
+                <a:pos x="connsiteX1" y="connsiteY1"/>
+              </a:cxn>
+              <a:cxn ang="0">
+                <a:pos x="connsiteX2" y="connsiteY2"/>
+              </a:cxn>
+              <a:cxn ang="0">
+                <a:pos x="connsiteX3" y="connsiteY3"/>
+              </a:cxn>
+              <a:cxn ang="0">
+                <a:pos x="connsiteX4" y="connsiteY4"/>
+              </a:cxn>
+              <a:cxn ang="0">
+                <a:pos x="connsiteX5" y="connsiteY5"/>
+              </a:cxn>
+              <a:cxn ang="0">
+                <a:pos x="connsiteX6" y="connsiteY6"/>
+              </a:cxn>
+              <a:cxn ang="0">
+                <a:pos x="connsiteX7" y="connsiteY7"/>
+              </a:cxn>
+              <a:cxn ang="0">
+                <a:pos x="connsiteX8" y="connsiteY8"/>
+              </a:cxn>
+            </a:cxnLst>
+            <a:rect l="l" t="t" r="r" b="b"/>
+            <a:pathLst>
+              <a:path w="3900357" h="4178958">
+                <a:moveTo>
+                  <a:pt x="2432225" y="93939"/>
+                </a:moveTo>
+                <a:cubicBezTo>
+                  <a:pt x="3282786" y="358491"/>
+                  <a:pt x="3900357" y="1151865"/>
+                  <a:pt x="3900357" y="2089479"/>
+                </a:cubicBezTo>
+                <a:cubicBezTo>
+                  <a:pt x="3900357" y="3243466"/>
+                  <a:pt x="2964865" y="4178958"/>
+                  <a:pt x="1810878" y="4178958"/>
+                </a:cubicBezTo>
+                <a:cubicBezTo>
+                  <a:pt x="1089636" y="4178958"/>
+                  <a:pt x="453744" y="3813531"/>
+                  <a:pt x="78249" y="3257727"/>
+                </a:cubicBezTo>
+                <a:lnTo>
+                  <a:pt x="0" y="3128923"/>
+                </a:lnTo>
+                <a:lnTo>
+                  <a:pt x="831324" y="244281"/>
+                </a:lnTo>
+                <a:lnTo>
+                  <a:pt x="997559" y="164202"/>
+                </a:lnTo>
+                <a:cubicBezTo>
+                  <a:pt x="1247540" y="58468"/>
+                  <a:pt x="1522381" y="0"/>
+                  <a:pt x="1810878" y="0"/>
+                </a:cubicBezTo>
+                <a:cubicBezTo>
+                  <a:pt x="2027251" y="0"/>
+                  <a:pt x="2235942" y="32888"/>
+                  <a:pt x="2432225" y="93939"/>
+                </a:cubicBezTo>
+                <a:close/>
+              </a:path>
+            </a:pathLst>
+          </a:custGeom>
+          <a:gradFill>
+            <a:gsLst>
+              <a:gs pos="29000">
+                <a:srgbClr val="000000">
+                  <a:alpha val="0"/>
+                </a:srgbClr>
+              </a:gs>
+              <a:gs pos="100000">
+                <a:schemeClr val="accent1">
+                  <a:alpha val="43000"/>
+                </a:schemeClr>
+              </a:gs>
+            </a:gsLst>
+            <a:lin ang="1800000" scaled="0"/>
+          </a:gradFill>
+          <a:ln>
+            <a:noFill/>
+          </a:ln>
+        </p:spPr>
+        <p:style>
+          <a:lnRef idx="2">
+            <a:schemeClr val="accent1">
+              <a:shade val="50000"/>
+            </a:schemeClr>
+          </a:lnRef>
+          <a:fillRef idx="1">
+            <a:schemeClr val="accent1"/>
+          </a:fillRef>
+          <a:effectRef idx="0">
+            <a:schemeClr val="accent1"/>
+          </a:effectRef>
+          <a:fontRef idx="minor">
+            <a:schemeClr val="lt1"/>
+          </a:fontRef>
+        </p:style>
+        <p:txBody>
+          <a:bodyPr wrap="square" rtlCol="0" anchor="ctr">
+            <a:noAutofit/>
+          </a:bodyPr>
+          <a:lstStyle/>
+          <a:p>
+            <a:pPr algn="ctr"/>
+            <a:endParaRPr lang="en-US" dirty="0"/>
+          </a:p>
+        </p:txBody>
+      </p:sp>
+      <p:sp>
+        <p:nvSpPr>
+          <p:cNvPr id="20" name="Rectangle 19">
+            <a:extLst>
+              <a:ext uri="{FF2B5EF4-FFF2-40B4-BE49-F238E27FC236}">
+                <a16:creationId xmlns:a16="http://schemas.microsoft.com/office/drawing/2014/main" id="{52484BC5-E283-EF66-6DC4-7DCF779C54EA}"/>
+              </a:ext>
+              <a:ext uri="{C183D7F6-B498-43B3-948B-1728B52AA6E4}">
+                <adec:decorative xmlns:adec="http://schemas.microsoft.com/office/drawing/2017/decorative" val="1"/>
+              </a:ext>
+            </a:extLst>
+          </p:cNvPr>
+          <p:cNvSpPr>
+            <a:spLocks noGrp="1" noRot="1" noChangeAspect="1" noMove="1" noResize="1" noEditPoints="1" noAdjustHandles="1" noChangeArrowheads="1" noChangeShapeType="1" noTextEdit="1"/>
+          </p:cNvSpPr>
+          <p:nvPr>
+            <p:extLst>
+              <p:ext uri="{386F3935-93C4-4BCD-93E2-E3B085C9AB24}">
+                <p16:designElem xmlns:p16="http://schemas.microsoft.com/office/powerpoint/2015/main" val="1"/>
+              </p:ext>
+            </p:extLst>
+          </p:nvPr>
+        </p:nvSpPr>
+        <p:spPr>
+          <a:xfrm rot="5400000" flipH="1">
+            <a:off x="-1410095" y="1410079"/>
+            <a:ext cx="6858003" cy="4037835"/>
+          </a:xfrm>
+          <a:prstGeom prst="rect">
+            <a:avLst/>
+          </a:prstGeom>
+          <a:gradFill>
+            <a:gsLst>
+              <a:gs pos="0">
+                <a:srgbClr val="000000">
+                  <a:alpha val="0"/>
+                </a:srgbClr>
+              </a:gs>
+              <a:gs pos="99000">
+                <a:schemeClr val="accent1">
+                  <a:lumMod val="60000"/>
+                  <a:lumOff val="40000"/>
+                  <a:alpha val="11000"/>
+                </a:schemeClr>
+              </a:gs>
+            </a:gsLst>
+            <a:lin ang="7200000" scaled="0"/>
+          </a:gradFill>
+          <a:ln>
+            <a:noFill/>
+          </a:ln>
+        </p:spPr>
+        <p:style>
+          <a:lnRef idx="2">
+            <a:schemeClr val="accent1">
+              <a:shade val="50000"/>
+            </a:schemeClr>
+          </a:lnRef>
+          <a:fillRef idx="1">
+            <a:schemeClr val="accent1"/>
+          </a:fillRef>
+          <a:effectRef idx="0">
+            <a:schemeClr val="accent1"/>
+          </a:effectRef>
+          <a:fontRef idx="minor">
+            <a:schemeClr val="lt1"/>
+          </a:fontRef>
+        </p:style>
+        <p:txBody>
+          <a:bodyPr rtlCol="0" anchor="ctr"/>
+          <a:lstStyle/>
+          <a:p>
+            <a:pPr algn="ctr"/>
+            <a:endParaRPr lang="en-US"/>
+          </a:p>
+        </p:txBody>
+      </p:sp>
+      <p:sp>
+        <p:nvSpPr>
+          <p:cNvPr id="2" name="Cím 1">
+            <a:extLst>
+              <a:ext uri="{FF2B5EF4-FFF2-40B4-BE49-F238E27FC236}">
+                <a16:creationId xmlns:a16="http://schemas.microsoft.com/office/drawing/2014/main" id="{4F2C65A6-2A3B-3617-9AE1-F0EF2B6ECBAE}"/>
+              </a:ext>
+            </a:extLst>
+          </p:cNvPr>
+          <p:cNvSpPr>
+            <a:spLocks noGrp="1"/>
+          </p:cNvSpPr>
+          <p:nvPr>
+            <p:ph type="title"/>
+          </p:nvPr>
+        </p:nvSpPr>
+        <p:spPr>
+          <a:xfrm>
+            <a:off x="-20" y="1683756"/>
+            <a:ext cx="4028020" cy="2396359"/>
+          </a:xfrm>
+        </p:spPr>
+        <p:txBody>
+          <a:bodyPr anchor="b">
+            <a:normAutofit/>
+          </a:bodyPr>
+          <a:lstStyle/>
+          <a:p>
+            <a:pPr algn="ctr"/>
+            <a:r>
+              <a:rPr lang="hu-HU" sz="4000" b="1" dirty="0" err="1">
+                <a:solidFill>
+                  <a:schemeClr val="bg1"/>
+                </a:solidFill>
+              </a:rPr>
+              <a:t>Problem</a:t>
+            </a:r>
+            <a:r>
+              <a:rPr lang="hu-HU" sz="4000" b="1" dirty="0">
+                <a:solidFill>
+                  <a:schemeClr val="bg1"/>
+                </a:solidFill>
+              </a:rPr>
+              <a:t> &amp; </a:t>
+            </a:r>
+            <a:r>
+              <a:rPr lang="hu-HU" sz="4000" b="1" dirty="0" err="1">
+                <a:solidFill>
+                  <a:schemeClr val="bg1"/>
+                </a:solidFill>
+              </a:rPr>
+              <a:t>Solution</a:t>
+            </a:r>
+            <a:endParaRPr lang="hu-HU" sz="4000" dirty="0">
+              <a:solidFill>
+                <a:schemeClr val="bg1"/>
+              </a:solidFill>
+            </a:endParaRPr>
+          </a:p>
+        </p:txBody>
+      </p:sp>
+      <p:pic>
+        <p:nvPicPr>
+          <p:cNvPr id="7" name="Kép 6">
+            <a:extLst>
+              <a:ext uri="{FF2B5EF4-FFF2-40B4-BE49-F238E27FC236}">
+                <a16:creationId xmlns:a16="http://schemas.microsoft.com/office/drawing/2014/main" id="{C09A2C0B-B511-3686-6235-66BA05CDD648}"/>
+              </a:ext>
+            </a:extLst>
+          </p:cNvPr>
+          <p:cNvPicPr>
+            <a:picLocks noChangeAspect="1"/>
+          </p:cNvPicPr>
+          <p:nvPr/>
+        </p:nvPicPr>
+        <p:blipFill>
+          <a:blip r:embed="rId3">
+            <a:extLst>
+              <a:ext uri="{28A0092B-C50C-407E-A947-70E740481C1C}">
+                <a14:useLocalDpi xmlns:a14="http://schemas.microsoft.com/office/drawing/2010/main" val="0"/>
+              </a:ext>
+            </a:extLst>
+          </a:blip>
+          <a:stretch>
+            <a:fillRect/>
+          </a:stretch>
+        </p:blipFill>
+        <p:spPr>
+          <a:xfrm>
+            <a:off x="10289628" y="5108028"/>
+            <a:ext cx="1749972" cy="1749972"/>
+          </a:xfrm>
+          <a:prstGeom prst="rect">
+            <a:avLst/>
+          </a:prstGeom>
+        </p:spPr>
+      </p:pic>
+      <p:pic>
+        <p:nvPicPr>
+          <p:cNvPr id="8" name="Picture 2" descr="Budapesti Gazdasági Szakképzési Centrum Pestszentlőrinci Technikum | EDIR">
+            <a:extLst>
+              <a:ext uri="{FF2B5EF4-FFF2-40B4-BE49-F238E27FC236}">
+                <a16:creationId xmlns:a16="http://schemas.microsoft.com/office/drawing/2014/main" id="{E8B7CEC3-BCDA-6B80-AF65-2D4A4E4B6405}"/>
+              </a:ext>
+            </a:extLst>
+          </p:cNvPr>
+          <p:cNvPicPr>
+            <a:picLocks noChangeAspect="1" noChangeArrowheads="1"/>
+          </p:cNvPicPr>
+          <p:nvPr/>
+        </p:nvPicPr>
+        <p:blipFill>
+          <a:blip r:embed="rId4">
+            <a:extLst>
+              <a:ext uri="{28A0092B-C50C-407E-A947-70E740481C1C}">
+                <a14:useLocalDpi xmlns:a14="http://schemas.microsoft.com/office/drawing/2010/main" val="0"/>
+              </a:ext>
+            </a:extLst>
+          </a:blip>
+          <a:srcRect/>
+          <a:stretch>
+            <a:fillRect/>
+          </a:stretch>
+        </p:blipFill>
+        <p:spPr bwMode="auto">
+          <a:xfrm>
+            <a:off x="296888" y="5393198"/>
+            <a:ext cx="1796980" cy="1179631"/>
+          </a:xfrm>
+          <a:prstGeom prst="rect">
+            <a:avLst/>
+          </a:prstGeom>
+          <a:noFill/>
+          <a:extLst>
+            <a:ext uri="{909E8E84-426E-40DD-AFC4-6F175D3DCCD1}">
+              <a14:hiddenFill xmlns:a14="http://schemas.microsoft.com/office/drawing/2010/main">
+                <a:solidFill>
+                  <a:srgbClr val="FFFFFF"/>
+                </a:solidFill>
+              </a14:hiddenFill>
+            </a:ext>
+          </a:extLst>
+        </p:spPr>
+      </p:pic>
+      <p:sp>
+        <p:nvSpPr>
+          <p:cNvPr id="9" name="Szövegdoboz 8">
+            <a:extLst>
+              <a:ext uri="{FF2B5EF4-FFF2-40B4-BE49-F238E27FC236}">
+                <a16:creationId xmlns:a16="http://schemas.microsoft.com/office/drawing/2014/main" id="{8D2885BE-216D-1E76-909C-7C40347A5D8E}"/>
+              </a:ext>
+            </a:extLst>
+          </p:cNvPr>
+          <p:cNvSpPr txBox="1"/>
+          <p:nvPr/>
+        </p:nvSpPr>
+        <p:spPr>
+          <a:xfrm>
+            <a:off x="4164861" y="435682"/>
+            <a:ext cx="4787753" cy="1200329"/>
+          </a:xfrm>
+          <a:prstGeom prst="rect">
+            <a:avLst/>
+          </a:prstGeom>
+          <a:noFill/>
+        </p:spPr>
+        <p:txBody>
+          <a:bodyPr wrap="square">
+            <a:spAutoFit/>
+          </a:bodyPr>
+          <a:lstStyle/>
+          <a:p>
+            <a:pPr>
+              <a:buNone/>
+            </a:pPr>
+            <a:r>
+              <a:rPr lang="en-US" b="1" dirty="0"/>
+              <a:t>Problem:</a:t>
+            </a:r>
+            <a:endParaRPr lang="en-US" dirty="0"/>
+          </a:p>
+          <a:p>
+            <a:pPr>
+              <a:buFont typeface="Arial" panose="020B0604020202020204" pitchFamily="34" charset="0"/>
+              <a:buChar char="•"/>
+            </a:pPr>
+            <a:r>
+              <a:rPr lang="en-US" dirty="0"/>
+              <a:t>No unified platform for scale model enthusiasts </a:t>
+            </a:r>
+          </a:p>
+          <a:p>
+            <a:pPr>
+              <a:buFont typeface="Arial" panose="020B0604020202020204" pitchFamily="34" charset="0"/>
+              <a:buChar char="•"/>
+            </a:pPr>
+            <a:r>
+              <a:rPr lang="en-US" dirty="0"/>
+              <a:t>Limited community features on existing sites </a:t>
+            </a:r>
+          </a:p>
+          <a:p>
+            <a:pPr>
+              <a:buFont typeface="Arial" panose="020B0604020202020204" pitchFamily="34" charset="0"/>
+              <a:buChar char="•"/>
+            </a:pPr>
+            <a:r>
+              <a:rPr lang="en-US" dirty="0"/>
+              <a:t>Difficult to track and share building projects</a:t>
+            </a:r>
+          </a:p>
+        </p:txBody>
+      </p:sp>
+      <p:sp>
+        <p:nvSpPr>
+          <p:cNvPr id="10" name="Szövegdoboz 9">
+            <a:extLst>
+              <a:ext uri="{FF2B5EF4-FFF2-40B4-BE49-F238E27FC236}">
+                <a16:creationId xmlns:a16="http://schemas.microsoft.com/office/drawing/2014/main" id="{24A94027-36A6-32B8-AAE2-6979D14A2077}"/>
+              </a:ext>
+            </a:extLst>
+          </p:cNvPr>
+          <p:cNvSpPr txBox="1"/>
+          <p:nvPr/>
+        </p:nvSpPr>
+        <p:spPr>
+          <a:xfrm>
+            <a:off x="4164861" y="2423475"/>
+            <a:ext cx="3862277" cy="2031325"/>
+          </a:xfrm>
+          <a:prstGeom prst="rect">
+            <a:avLst/>
+          </a:prstGeom>
+          <a:noFill/>
+        </p:spPr>
+        <p:txBody>
+          <a:bodyPr wrap="square">
+            <a:spAutoFit/>
+          </a:bodyPr>
+          <a:lstStyle/>
+          <a:p>
+            <a:pPr>
+              <a:buNone/>
+            </a:pPr>
+            <a:r>
+              <a:rPr lang="en-US" b="1" dirty="0"/>
+              <a:t>Solution:</a:t>
+            </a:r>
+            <a:endParaRPr lang="en-US" dirty="0"/>
+          </a:p>
+          <a:p>
+            <a:pPr>
+              <a:buFont typeface="Arial" panose="020B0604020202020204" pitchFamily="34" charset="0"/>
+              <a:buChar char="•"/>
+            </a:pPr>
+            <a:r>
+              <a:rPr lang="en-US" dirty="0"/>
+              <a:t>A centralized web application </a:t>
+            </a:r>
+          </a:p>
+          <a:p>
+            <a:pPr>
+              <a:buFont typeface="Arial" panose="020B0604020202020204" pitchFamily="34" charset="0"/>
+              <a:buChar char="•"/>
+            </a:pPr>
+            <a:r>
+              <a:rPr lang="en-US" dirty="0"/>
+              <a:t>Model browsing, searching, and rating </a:t>
+            </a:r>
+          </a:p>
+          <a:p>
+            <a:pPr>
+              <a:buFont typeface="Arial" panose="020B0604020202020204" pitchFamily="34" charset="0"/>
+              <a:buChar char="•"/>
+            </a:pPr>
+            <a:r>
+              <a:rPr lang="en-US" dirty="0"/>
+              <a:t>Community features (forum, reviews) </a:t>
+            </a:r>
+          </a:p>
+          <a:p>
+            <a:pPr>
+              <a:buFont typeface="Arial" panose="020B0604020202020204" pitchFamily="34" charset="0"/>
+              <a:buChar char="•"/>
+            </a:pPr>
+            <a:r>
+              <a:rPr lang="en-US" dirty="0"/>
+              <a:t>Build log for tracking personal projects </a:t>
+            </a:r>
+          </a:p>
+          <a:p>
+            <a:pPr>
+              <a:buFont typeface="Arial" panose="020B0604020202020204" pitchFamily="34" charset="0"/>
+              <a:buChar char="•"/>
+            </a:pPr>
+            <a:r>
+              <a:rPr lang="en-US" dirty="0"/>
+              <a:t>Role-based access and admin system </a:t>
+            </a:r>
+          </a:p>
+          <a:p>
+            <a:pPr>
+              <a:buFont typeface="Arial" panose="020B0604020202020204" pitchFamily="34" charset="0"/>
+              <a:buChar char="•"/>
+            </a:pPr>
+            <a:r>
+              <a:rPr lang="en-US" dirty="0"/>
+              <a:t>Modern, responsive design</a:t>
+            </a:r>
+          </a:p>
+        </p:txBody>
+      </p:sp>
+    </p:spTree>
+    <p:extLst>
+      <p:ext uri="{BB962C8B-B14F-4D97-AF65-F5344CB8AC3E}">
+        <p14:creationId xmlns:p14="http://schemas.microsoft.com/office/powerpoint/2010/main" val="1018540325"/>
+      </p:ext>
+    </p:extLst>
+  </p:cSld>
+  <p:clrMapOvr>
+    <a:masterClrMapping/>
+  </p:clrMapOvr>
+</p:sld>
+</file>
+
+<file path=ppt/slides/slide20.xml><?xml version="1.0" encoding="utf-8"?>
 <p:sld xmlns:a="http://schemas.openxmlformats.org/drawingml/2006/main" xmlns:r="http://schemas.openxmlformats.org/officeDocument/2006/relationships" xmlns:p="http://schemas.openxmlformats.org/presentationml/2006/main">
   <p:cSld>
     <p:bg>
@@ -46937,7 +48772,7 @@
 </p:sld>
 </file>
 
-<file path=ppt/slides/slide2.xml><?xml version="1.0" encoding="utf-8"?>
+<file path=ppt/slides/slide3.xml><?xml version="1.0" encoding="utf-8"?>
 <p:sld xmlns:a="http://schemas.openxmlformats.org/drawingml/2006/main" xmlns:r="http://schemas.openxmlformats.org/officeDocument/2006/relationships" xmlns:p="http://schemas.openxmlformats.org/presentationml/2006/main">
   <p:cSld>
     <p:bg>
@@ -47688,7 +49523,7 @@
 </p:sld>
 </file>
 
-<file path=ppt/slides/slide3.xml><?xml version="1.0" encoding="utf-8"?>
+<file path=ppt/slides/slide4.xml><?xml version="1.0" encoding="utf-8"?>
 <p:sld xmlns:a="http://schemas.openxmlformats.org/drawingml/2006/main" xmlns:r="http://schemas.openxmlformats.org/officeDocument/2006/relationships" xmlns:p="http://schemas.openxmlformats.org/presentationml/2006/main">
   <p:cSld>
     <p:bg>
@@ -48463,7 +50298,7 @@
 </p:sld>
 </file>
 
-<file path=ppt/slides/slide4.xml><?xml version="1.0" encoding="utf-8"?>
+<file path=ppt/slides/slide5.xml><?xml version="1.0" encoding="utf-8"?>
 <p:sld xmlns:a="http://schemas.openxmlformats.org/drawingml/2006/main" xmlns:r="http://schemas.openxmlformats.org/officeDocument/2006/relationships" xmlns:p="http://schemas.openxmlformats.org/presentationml/2006/main">
   <p:cSld>
     <p:bg>
@@ -49618,7 +51453,7 @@
 </p:sld>
 </file>
 
-<file path=ppt/slides/slide5.xml><?xml version="1.0" encoding="utf-8"?>
+<file path=ppt/slides/slide6.xml><?xml version="1.0" encoding="utf-8"?>
 <p:sld xmlns:a="http://schemas.openxmlformats.org/drawingml/2006/main" xmlns:r="http://schemas.openxmlformats.org/officeDocument/2006/relationships" xmlns:p="http://schemas.openxmlformats.org/presentationml/2006/main">
   <p:cSld>
     <p:bg>
@@ -50219,13 +52054,26 @@
           <a:p>
             <a:pPr algn="r"/>
             <a:r>
-              <a:rPr lang="hu-HU" sz="4000">
+              <a:rPr lang="hu-HU" sz="4000" dirty="0">
                 <a:solidFill>
-                  <a:srgbClr val="FFFFFF"/>
+                  <a:schemeClr val="bg1"/>
                 </a:solidFill>
               </a:rPr>
-              <a:t>Fő funkciók</a:t>
+              <a:t>Main </a:t>
             </a:r>
+            <a:r>
+              <a:rPr lang="hu-HU" sz="4000" dirty="0" err="1">
+                <a:solidFill>
+                  <a:schemeClr val="bg1"/>
+                </a:solidFill>
+              </a:rPr>
+              <a:t>Features</a:t>
+            </a:r>
+            <a:endParaRPr lang="hu-HU" sz="4000" dirty="0">
+              <a:solidFill>
+                <a:schemeClr val="bg1"/>
+              </a:solidFill>
+            </a:endParaRPr>
           </a:p>
         </p:txBody>
       </p:sp>
@@ -50245,7 +52093,7 @@
             <p:ph idx="1"/>
             <p:extLst>
               <p:ext uri="{D42A27DB-BD31-4B8C-83A1-F6EECF244321}">
-                <p14:modId xmlns:p14="http://schemas.microsoft.com/office/powerpoint/2010/main" val="1189642815"/>
+                <p14:modId xmlns:p14="http://schemas.microsoft.com/office/powerpoint/2010/main" val="3508835196"/>
               </p:ext>
             </p:extLst>
           </p:nvPr>
@@ -50356,7 +52204,7 @@
 </p:sld>
 </file>
 
-<file path=ppt/slides/slide6.xml><?xml version="1.0" encoding="utf-8"?>
+<file path=ppt/slides/slide7.xml><?xml version="1.0" encoding="utf-8"?>
 <p:sld xmlns:a="http://schemas.openxmlformats.org/drawingml/2006/main" xmlns:r="http://schemas.openxmlformats.org/officeDocument/2006/relationships" xmlns:p="http://schemas.openxmlformats.org/presentationml/2006/main">
   <p:cSld>
     <p:bg>
@@ -51327,7 +53175,7 @@
 </p:sld>
 </file>
 
-<file path=ppt/slides/slide7.xml><?xml version="1.0" encoding="utf-8"?>
+<file path=ppt/slides/slide8.xml><?xml version="1.0" encoding="utf-8"?>
 <p:sld xmlns:a="http://schemas.openxmlformats.org/drawingml/2006/main" xmlns:r="http://schemas.openxmlformats.org/officeDocument/2006/relationships" xmlns:p="http://schemas.openxmlformats.org/presentationml/2006/main">
   <p:cSld>
     <p:bg>
@@ -51993,7 +53841,7 @@
 </p:sld>
 </file>
 
-<file path=ppt/slides/slide8.xml><?xml version="1.0" encoding="utf-8"?>
+<file path=ppt/slides/slide9.xml><?xml version="1.0" encoding="utf-8"?>
 <p:sld xmlns:a="http://schemas.openxmlformats.org/drawingml/2006/main" xmlns:r="http://schemas.openxmlformats.org/officeDocument/2006/relationships" xmlns:p="http://schemas.openxmlformats.org/presentationml/2006/main">
   <p:cSld>
     <p:bg>
@@ -52287,674 +54135,6 @@
     <p:extLst>
       <p:ext uri="{BB962C8B-B14F-4D97-AF65-F5344CB8AC3E}">
         <p14:creationId xmlns:p14="http://schemas.microsoft.com/office/powerpoint/2010/main" val="1506434704"/>
-      </p:ext>
-    </p:extLst>
-  </p:cSld>
-  <p:clrMapOvr>
-    <a:masterClrMapping/>
-  </p:clrMapOvr>
-</p:sld>
-</file>
-
-<file path=ppt/slides/slide9.xml><?xml version="1.0" encoding="utf-8"?>
-<p:sld xmlns:a="http://schemas.openxmlformats.org/drawingml/2006/main" xmlns:r="http://schemas.openxmlformats.org/officeDocument/2006/relationships" xmlns:p="http://schemas.openxmlformats.org/presentationml/2006/main">
-  <p:cSld>
-    <p:bg>
-      <p:bgPr>
-        <a:solidFill>
-          <a:schemeClr val="bg1"/>
-        </a:solidFill>
-        <a:effectLst/>
-      </p:bgPr>
-    </p:bg>
-    <p:spTree>
-      <p:nvGrpSpPr>
-        <p:cNvPr id="1" name=""/>
-        <p:cNvGrpSpPr/>
-        <p:nvPr/>
-      </p:nvGrpSpPr>
-      <p:grpSpPr>
-        <a:xfrm>
-          <a:off x="0" y="0"/>
-          <a:ext cx="0" cy="0"/>
-          <a:chOff x="0" y="0"/>
-          <a:chExt cx="0" cy="0"/>
-        </a:xfrm>
-      </p:grpSpPr>
-      <p:sp useBgFill="1">
-        <p:nvSpPr>
-          <p:cNvPr id="9" name="Rectangle 8">
-            <a:extLst>
-              <a:ext uri="{FF2B5EF4-FFF2-40B4-BE49-F238E27FC236}">
-                <a16:creationId xmlns:a16="http://schemas.microsoft.com/office/drawing/2014/main" id="{A61E7EDE-CB4A-402F-B0FB-8640C3589105}"/>
-              </a:ext>
-              <a:ext uri="{C183D7F6-B498-43B3-948B-1728B52AA6E4}">
-                <adec:decorative xmlns:adec="http://schemas.microsoft.com/office/drawing/2017/decorative" val="1"/>
-              </a:ext>
-            </a:extLst>
-          </p:cNvPr>
-          <p:cNvSpPr>
-            <a:spLocks noGrp="1" noRot="1" noChangeAspect="1" noMove="1" noResize="1" noEditPoints="1" noAdjustHandles="1" noChangeArrowheads="1" noChangeShapeType="1" noTextEdit="1"/>
-          </p:cNvSpPr>
-          <p:nvPr>
-            <p:extLst>
-              <p:ext uri="{386F3935-93C4-4BCD-93E2-E3B085C9AB24}">
-                <p16:designElem xmlns:p16="http://schemas.microsoft.com/office/powerpoint/2015/main" val="1"/>
-              </p:ext>
-            </p:extLst>
-          </p:nvPr>
-        </p:nvSpPr>
-        <p:spPr>
-          <a:xfrm>
-            <a:off x="3048" y="0"/>
-            <a:ext cx="12188952" cy="6858000"/>
-          </a:xfrm>
-          <a:prstGeom prst="rect">
-            <a:avLst/>
-          </a:prstGeom>
-          <a:ln>
-            <a:noFill/>
-          </a:ln>
-        </p:spPr>
-        <p:style>
-          <a:lnRef idx="2">
-            <a:schemeClr val="accent1">
-              <a:shade val="50000"/>
-            </a:schemeClr>
-          </a:lnRef>
-          <a:fillRef idx="1">
-            <a:schemeClr val="accent1"/>
-          </a:fillRef>
-          <a:effectRef idx="0">
-            <a:schemeClr val="accent1"/>
-          </a:effectRef>
-          <a:fontRef idx="minor">
-            <a:schemeClr val="lt1"/>
-          </a:fontRef>
-        </p:style>
-        <p:txBody>
-          <a:bodyPr rtlCol="0" anchor="ctr"/>
-          <a:lstStyle/>
-          <a:p>
-            <a:pPr algn="ctr"/>
-            <a:endParaRPr lang="en-US"/>
-          </a:p>
-        </p:txBody>
-      </p:sp>
-      <p:sp>
-        <p:nvSpPr>
-          <p:cNvPr id="11" name="Rectangle 10">
-            <a:extLst>
-              <a:ext uri="{FF2B5EF4-FFF2-40B4-BE49-F238E27FC236}">
-                <a16:creationId xmlns:a16="http://schemas.microsoft.com/office/drawing/2014/main" id="{6C2BBEB8-4077-499F-80FD-AA9827A8D8B7}"/>
-              </a:ext>
-              <a:ext uri="{C183D7F6-B498-43B3-948B-1728B52AA6E4}">
-                <adec:decorative xmlns:adec="http://schemas.microsoft.com/office/drawing/2017/decorative" val="1"/>
-              </a:ext>
-            </a:extLst>
-          </p:cNvPr>
-          <p:cNvSpPr>
-            <a:spLocks noGrp="1" noRot="1" noChangeAspect="1" noMove="1" noResize="1" noEditPoints="1" noAdjustHandles="1" noChangeArrowheads="1" noChangeShapeType="1" noTextEdit="1"/>
-          </p:cNvSpPr>
-          <p:nvPr>
-            <p:extLst>
-              <p:ext uri="{386F3935-93C4-4BCD-93E2-E3B085C9AB24}">
-                <p16:designElem xmlns:p16="http://schemas.microsoft.com/office/powerpoint/2015/main" val="1"/>
-              </p:ext>
-            </p:extLst>
-          </p:nvPr>
-        </p:nvSpPr>
-        <p:spPr>
-          <a:xfrm>
-            <a:off x="658395" y="608243"/>
-            <a:ext cx="3380205" cy="5445075"/>
-          </a:xfrm>
-          <a:prstGeom prst="rect">
-            <a:avLst/>
-          </a:prstGeom>
-          <a:solidFill>
-            <a:schemeClr val="tx2">
-              <a:lumMod val="50000"/>
-            </a:schemeClr>
-          </a:solidFill>
-          <a:ln>
-            <a:noFill/>
-          </a:ln>
-        </p:spPr>
-        <p:style>
-          <a:lnRef idx="2">
-            <a:schemeClr val="accent1">
-              <a:shade val="50000"/>
-            </a:schemeClr>
-          </a:lnRef>
-          <a:fillRef idx="1">
-            <a:schemeClr val="accent1"/>
-          </a:fillRef>
-          <a:effectRef idx="0">
-            <a:schemeClr val="accent1"/>
-          </a:effectRef>
-          <a:fontRef idx="minor">
-            <a:schemeClr val="lt1"/>
-          </a:fontRef>
-        </p:style>
-        <p:txBody>
-          <a:bodyPr rtlCol="0" anchor="ctr"/>
-          <a:lstStyle/>
-          <a:p>
-            <a:pPr algn="ctr"/>
-            <a:endParaRPr lang="en-US"/>
-          </a:p>
-        </p:txBody>
-      </p:sp>
-      <p:sp>
-        <p:nvSpPr>
-          <p:cNvPr id="2" name="Cím 1">
-            <a:extLst>
-              <a:ext uri="{FF2B5EF4-FFF2-40B4-BE49-F238E27FC236}">
-                <a16:creationId xmlns:a16="http://schemas.microsoft.com/office/drawing/2014/main" id="{57D8C6D9-7496-48C7-A28D-CF19A7502634}"/>
-              </a:ext>
-            </a:extLst>
-          </p:cNvPr>
-          <p:cNvSpPr>
-            <a:spLocks noGrp="1"/>
-          </p:cNvSpPr>
-          <p:nvPr>
-            <p:ph type="title"/>
-          </p:nvPr>
-        </p:nvSpPr>
-        <p:spPr>
-          <a:xfrm>
-            <a:off x="1316791" y="1005303"/>
-            <a:ext cx="2032490" cy="4427309"/>
-          </a:xfrm>
-        </p:spPr>
-        <p:txBody>
-          <a:bodyPr>
-            <a:normAutofit/>
-          </a:bodyPr>
-          <a:lstStyle/>
-          <a:p>
-            <a:r>
-              <a:rPr lang="hu-HU" sz="2800">
-                <a:solidFill>
-                  <a:schemeClr val="bg1"/>
-                </a:solidFill>
-              </a:rPr>
-              <a:t>Miért így terveztük az adatbázist?</a:t>
-            </a:r>
-          </a:p>
-        </p:txBody>
-      </p:sp>
-      <p:sp>
-        <p:nvSpPr>
-          <p:cNvPr id="4" name="Rectangle 1">
-            <a:extLst>
-              <a:ext uri="{FF2B5EF4-FFF2-40B4-BE49-F238E27FC236}">
-                <a16:creationId xmlns:a16="http://schemas.microsoft.com/office/drawing/2014/main" id="{712F3397-1552-4A30-BFC9-5533FDE01A7F}"/>
-              </a:ext>
-            </a:extLst>
-          </p:cNvPr>
-          <p:cNvSpPr>
-            <a:spLocks noGrp="1" noChangeArrowheads="1"/>
-          </p:cNvSpPr>
-          <p:nvPr>
-            <p:ph idx="1"/>
-          </p:nvPr>
-        </p:nvSpPr>
-        <p:spPr bwMode="auto">
-          <a:xfrm>
-            <a:off x="5336498" y="1288934"/>
-            <a:ext cx="5801194" cy="4280132"/>
-          </a:xfrm>
-          <a:prstGeom prst="rect">
-            <a:avLst/>
-          </a:prstGeom>
-          <a:extLst>
-            <a:ext uri="{909E8E84-426E-40DD-AFC4-6F175D3DCCD1}">
-              <a14:hiddenFill xmlns:a14="http://schemas.microsoft.com/office/drawing/2010/main">
-                <a:solidFill>
-                  <a:schemeClr val="accent1"/>
-                </a:solidFill>
-              </a14:hiddenFill>
-            </a:ext>
-            <a:ext uri="{91240B29-F687-4F45-9708-019B960494DF}">
-              <a14:hiddenLine xmlns:a14="http://schemas.microsoft.com/office/drawing/2010/main" w="9525">
-                <a:solidFill>
-                  <a:schemeClr val="tx1"/>
-                </a:solidFill>
-                <a:miter lim="800000"/>
-                <a:headEnd/>
-                <a:tailEnd/>
-              </a14:hiddenLine>
-            </a:ext>
-            <a:ext uri="{AF507438-7753-43E0-B8FC-AC1667EBCBE1}">
-              <a14:hiddenEffects xmlns:a14="http://schemas.microsoft.com/office/drawing/2010/main">
-                <a:effectLst>
-                  <a:outerShdw dist="35921" dir="2700000" algn="ctr" rotWithShape="0">
-                    <a:schemeClr val="bg2"/>
-                  </a:outerShdw>
-                </a:effectLst>
-              </a14:hiddenEffects>
-            </a:ext>
-          </a:extLst>
-        </p:spPr>
-        <p:txBody>
-          <a:bodyPr vert="horz" lIns="91440" tIns="45720" rIns="91440" bIns="45720" numCol="1" anchor="ctr" anchorCtr="0" compatLnSpc="1">
-            <a:prstTxWarp prst="textNoShape">
-              <a:avLst/>
-            </a:prstTxWarp>
-            <a:normAutofit/>
-          </a:bodyPr>
-          <a:lstStyle/>
-          <a:p>
-            <a:pPr marL="0" marR="0" lvl="0" indent="0" defTabSz="914400" rtl="0" eaLnBrk="0" fontAlgn="base" latinLnBrk="0" hangingPunct="0">
-              <a:spcBef>
-                <a:spcPct val="0"/>
-              </a:spcBef>
-              <a:spcAft>
-                <a:spcPts val="600"/>
-              </a:spcAft>
-              <a:buClrTx/>
-              <a:buSzTx/>
-              <a:buFontTx/>
-              <a:buChar char="•"/>
-              <a:tabLst/>
-            </a:pPr>
-            <a:r>
-              <a:rPr kumimoji="0" lang="hu-HU" altLang="hu-HU" sz="2000" b="0" i="0" u="none" strike="noStrike" cap="none" normalizeH="0" baseline="0">
-                <a:ln>
-                  <a:noFill/>
-                </a:ln>
-                <a:effectLst/>
-                <a:latin typeface="Arial" panose="020B0604020202020204" pitchFamily="34" charset="0"/>
-              </a:rPr>
-              <a:t>Redundancia csökkentése</a:t>
-            </a:r>
-          </a:p>
-          <a:p>
-            <a:pPr marL="0" marR="0" lvl="0" indent="0" defTabSz="914400" rtl="0" eaLnBrk="0" fontAlgn="base" latinLnBrk="0" hangingPunct="0">
-              <a:spcBef>
-                <a:spcPct val="0"/>
-              </a:spcBef>
-              <a:spcAft>
-                <a:spcPts val="600"/>
-              </a:spcAft>
-              <a:buClrTx/>
-              <a:buSzTx/>
-              <a:buFontTx/>
-              <a:buChar char="•"/>
-              <a:tabLst/>
-            </a:pPr>
-            <a:r>
-              <a:rPr kumimoji="0" lang="hu-HU" altLang="hu-HU" sz="2000" b="0" i="0" u="none" strike="noStrike" cap="none" normalizeH="0" baseline="0">
-                <a:ln>
-                  <a:noFill/>
-                </a:ln>
-                <a:effectLst/>
-                <a:latin typeface="Arial" panose="020B0604020202020204" pitchFamily="34" charset="0"/>
-              </a:rPr>
-              <a:t>Egyszerűbb lekérdezések</a:t>
-            </a:r>
-          </a:p>
-          <a:p>
-            <a:pPr marL="0" marR="0" lvl="0" indent="0" defTabSz="914400" rtl="0" eaLnBrk="0" fontAlgn="base" latinLnBrk="0" hangingPunct="0">
-              <a:spcBef>
-                <a:spcPct val="0"/>
-              </a:spcBef>
-              <a:spcAft>
-                <a:spcPts val="600"/>
-              </a:spcAft>
-              <a:buClrTx/>
-              <a:buSzTx/>
-              <a:buFontTx/>
-              <a:buChar char="•"/>
-              <a:tabLst/>
-            </a:pPr>
-            <a:r>
-              <a:rPr kumimoji="0" lang="hu-HU" altLang="hu-HU" sz="2000" b="0" i="0" u="none" strike="noStrike" cap="none" normalizeH="0" baseline="0">
-                <a:ln>
-                  <a:noFill/>
-                </a:ln>
-                <a:effectLst/>
-                <a:latin typeface="Arial" panose="020B0604020202020204" pitchFamily="34" charset="0"/>
-              </a:rPr>
-              <a:t>Jogosultságok és állapotok kezelése</a:t>
-            </a:r>
-          </a:p>
-          <a:p>
-            <a:pPr marL="0" marR="0" lvl="0" indent="0" defTabSz="914400" rtl="0" eaLnBrk="0" fontAlgn="base" latinLnBrk="0" hangingPunct="0">
-              <a:spcBef>
-                <a:spcPct val="0"/>
-              </a:spcBef>
-              <a:spcAft>
-                <a:spcPts val="600"/>
-              </a:spcAft>
-              <a:buClrTx/>
-              <a:buSzTx/>
-              <a:buFontTx/>
-              <a:buChar char="•"/>
-              <a:tabLst/>
-            </a:pPr>
-            <a:r>
-              <a:rPr kumimoji="0" lang="hu-HU" altLang="hu-HU" sz="2000" b="0" i="0" u="none" strike="noStrike" cap="none" normalizeH="0" baseline="0">
-                <a:ln>
-                  <a:noFill/>
-                </a:ln>
-                <a:effectLst/>
-                <a:latin typeface="Arial" panose="020B0604020202020204" pitchFamily="34" charset="0"/>
-              </a:rPr>
-              <a:t>Bővíthetőség</a:t>
-            </a:r>
-          </a:p>
-          <a:p>
-            <a:pPr marL="0" marR="0" lvl="0" indent="0" defTabSz="914400" rtl="0" eaLnBrk="0" fontAlgn="base" latinLnBrk="0" hangingPunct="0">
-              <a:spcBef>
-                <a:spcPct val="0"/>
-              </a:spcBef>
-              <a:spcAft>
-                <a:spcPts val="600"/>
-              </a:spcAft>
-              <a:buClrTx/>
-              <a:buSzTx/>
-              <a:buFontTx/>
-              <a:buChar char="•"/>
-              <a:tabLst/>
-            </a:pPr>
-            <a:r>
-              <a:rPr kumimoji="0" lang="hu-HU" altLang="hu-HU" sz="2000" b="0" i="0" u="none" strike="noStrike" cap="none" normalizeH="0" baseline="0">
-                <a:ln>
-                  <a:noFill/>
-                </a:ln>
-                <a:effectLst/>
-                <a:latin typeface="Arial" panose="020B0604020202020204" pitchFamily="34" charset="0"/>
-              </a:rPr>
-              <a:t>Közösségi funkciók támogatása</a:t>
-            </a:r>
-          </a:p>
-        </p:txBody>
-      </p:sp>
-      <p:sp>
-        <p:nvSpPr>
-          <p:cNvPr id="13" name="Rectangle 12">
-            <a:extLst>
-              <a:ext uri="{FF2B5EF4-FFF2-40B4-BE49-F238E27FC236}">
-                <a16:creationId xmlns:a16="http://schemas.microsoft.com/office/drawing/2014/main" id="{6F3B7728-0C26-4662-B285-85C645523C10}"/>
-              </a:ext>
-              <a:ext uri="{C183D7F6-B498-43B3-948B-1728B52AA6E4}">
-                <adec:decorative xmlns:adec="http://schemas.microsoft.com/office/drawing/2017/decorative" val="1"/>
-              </a:ext>
-            </a:extLst>
-          </p:cNvPr>
-          <p:cNvSpPr>
-            <a:spLocks noGrp="1" noRot="1" noChangeAspect="1" noMove="1" noResize="1" noEditPoints="1" noAdjustHandles="1" noChangeArrowheads="1" noChangeShapeType="1" noTextEdit="1"/>
-          </p:cNvSpPr>
-          <p:nvPr>
-            <p:extLst>
-              <p:ext uri="{386F3935-93C4-4BCD-93E2-E3B085C9AB24}">
-                <p16:designElem xmlns:p16="http://schemas.microsoft.com/office/powerpoint/2015/main" val="1"/>
-              </p:ext>
-            </p:extLst>
-          </p:nvPr>
-        </p:nvSpPr>
-        <p:spPr>
-          <a:xfrm>
-            <a:off x="0" y="6053319"/>
-            <a:ext cx="12192000" cy="64008"/>
-          </a:xfrm>
-          <a:prstGeom prst="rect">
-            <a:avLst/>
-          </a:prstGeom>
-          <a:solidFill>
-            <a:schemeClr val="tx2">
-              <a:lumMod val="50000"/>
-            </a:schemeClr>
-          </a:solidFill>
-          <a:ln>
-            <a:noFill/>
-          </a:ln>
-        </p:spPr>
-        <p:style>
-          <a:lnRef idx="2">
-            <a:schemeClr val="accent1">
-              <a:shade val="50000"/>
-            </a:schemeClr>
-          </a:lnRef>
-          <a:fillRef idx="1">
-            <a:schemeClr val="accent1"/>
-          </a:fillRef>
-          <a:effectRef idx="0">
-            <a:schemeClr val="accent1"/>
-          </a:effectRef>
-          <a:fontRef idx="minor">
-            <a:schemeClr val="lt1"/>
-          </a:fontRef>
-        </p:style>
-        <p:txBody>
-          <a:bodyPr rtlCol="0" anchor="ctr"/>
-          <a:lstStyle/>
-          <a:p>
-            <a:pPr algn="ctr"/>
-            <a:endParaRPr lang="en-US" dirty="0"/>
-          </a:p>
-        </p:txBody>
-      </p:sp>
-      <p:sp>
-        <p:nvSpPr>
-          <p:cNvPr id="15" name="Rectangle 14">
-            <a:extLst>
-              <a:ext uri="{FF2B5EF4-FFF2-40B4-BE49-F238E27FC236}">
-                <a16:creationId xmlns:a16="http://schemas.microsoft.com/office/drawing/2014/main" id="{28C367AD-9838-470A-87EF-678609CC8692}"/>
-              </a:ext>
-              <a:ext uri="{C183D7F6-B498-43B3-948B-1728B52AA6E4}">
-                <adec:decorative xmlns:adec="http://schemas.microsoft.com/office/drawing/2017/decorative" val="1"/>
-              </a:ext>
-            </a:extLst>
-          </p:cNvPr>
-          <p:cNvSpPr>
-            <a:spLocks noGrp="1" noRot="1" noChangeAspect="1" noMove="1" noResize="1" noEditPoints="1" noAdjustHandles="1" noChangeArrowheads="1" noChangeShapeType="1" noTextEdit="1"/>
-          </p:cNvSpPr>
-          <p:nvPr>
-            <p:extLst>
-              <p:ext uri="{386F3935-93C4-4BCD-93E2-E3B085C9AB24}">
-                <p16:designElem xmlns:p16="http://schemas.microsoft.com/office/powerpoint/2015/main" val="1"/>
-              </p:ext>
-            </p:extLst>
-          </p:nvPr>
-        </p:nvSpPr>
-        <p:spPr>
-          <a:xfrm rot="5400000">
-            <a:off x="-2770606" y="3396997"/>
-            <a:ext cx="6858002" cy="64008"/>
-          </a:xfrm>
-          <a:prstGeom prst="rect">
-            <a:avLst/>
-          </a:prstGeom>
-          <a:solidFill>
-            <a:schemeClr val="tx2">
-              <a:lumMod val="50000"/>
-            </a:schemeClr>
-          </a:solidFill>
-          <a:ln>
-            <a:noFill/>
-          </a:ln>
-        </p:spPr>
-        <p:style>
-          <a:lnRef idx="2">
-            <a:schemeClr val="accent1">
-              <a:shade val="50000"/>
-            </a:schemeClr>
-          </a:lnRef>
-          <a:fillRef idx="1">
-            <a:schemeClr val="accent1"/>
-          </a:fillRef>
-          <a:effectRef idx="0">
-            <a:schemeClr val="accent1"/>
-          </a:effectRef>
-          <a:fontRef idx="minor">
-            <a:schemeClr val="lt1"/>
-          </a:fontRef>
-        </p:style>
-        <p:txBody>
-          <a:bodyPr rtlCol="0" anchor="ctr"/>
-          <a:lstStyle/>
-          <a:p>
-            <a:pPr algn="ctr"/>
-            <a:endParaRPr lang="en-US"/>
-          </a:p>
-        </p:txBody>
-      </p:sp>
-      <p:sp>
-        <p:nvSpPr>
-          <p:cNvPr id="17" name="Rectangle 16">
-            <a:extLst>
-              <a:ext uri="{FF2B5EF4-FFF2-40B4-BE49-F238E27FC236}">
-                <a16:creationId xmlns:a16="http://schemas.microsoft.com/office/drawing/2014/main" id="{B0CF1642-4E76-4223-A010-6334380A22EA}"/>
-              </a:ext>
-              <a:ext uri="{C183D7F6-B498-43B3-948B-1728B52AA6E4}">
-                <adec:decorative xmlns:adec="http://schemas.microsoft.com/office/drawing/2017/decorative" val="1"/>
-              </a:ext>
-            </a:extLst>
-          </p:cNvPr>
-          <p:cNvSpPr>
-            <a:spLocks noGrp="1" noRot="1" noChangeAspect="1" noMove="1" noResize="1" noEditPoints="1" noAdjustHandles="1" noChangeArrowheads="1" noChangeShapeType="1" noTextEdit="1"/>
-          </p:cNvSpPr>
-          <p:nvPr>
-            <p:extLst>
-              <p:ext uri="{386F3935-93C4-4BCD-93E2-E3B085C9AB24}">
-                <p16:designElem xmlns:p16="http://schemas.microsoft.com/office/powerpoint/2015/main" val="1"/>
-              </p:ext>
-            </p:extLst>
-          </p:nvPr>
-        </p:nvSpPr>
-        <p:spPr>
-          <a:xfrm>
-            <a:off x="0" y="544236"/>
-            <a:ext cx="12192000" cy="64008"/>
-          </a:xfrm>
-          <a:prstGeom prst="rect">
-            <a:avLst/>
-          </a:prstGeom>
-          <a:solidFill>
-            <a:schemeClr val="tx2">
-              <a:lumMod val="50000"/>
-            </a:schemeClr>
-          </a:solidFill>
-          <a:ln>
-            <a:noFill/>
-          </a:ln>
-        </p:spPr>
-        <p:style>
-          <a:lnRef idx="2">
-            <a:schemeClr val="accent1">
-              <a:shade val="50000"/>
-            </a:schemeClr>
-          </a:lnRef>
-          <a:fillRef idx="1">
-            <a:schemeClr val="accent1"/>
-          </a:fillRef>
-          <a:effectRef idx="0">
-            <a:schemeClr val="accent1"/>
-          </a:effectRef>
-          <a:fontRef idx="minor">
-            <a:schemeClr val="lt1"/>
-          </a:fontRef>
-        </p:style>
-        <p:txBody>
-          <a:bodyPr rtlCol="0" anchor="ctr"/>
-          <a:lstStyle/>
-          <a:p>
-            <a:pPr algn="ctr"/>
-            <a:endParaRPr lang="en-US" dirty="0"/>
-          </a:p>
-        </p:txBody>
-      </p:sp>
-      <p:pic>
-        <p:nvPicPr>
-          <p:cNvPr id="6" name="Kép 5">
-            <a:extLst>
-              <a:ext uri="{FF2B5EF4-FFF2-40B4-BE49-F238E27FC236}">
-                <a16:creationId xmlns:a16="http://schemas.microsoft.com/office/drawing/2014/main" id="{89859A2F-F052-6CD9-84A4-217E3AA8477A}"/>
-              </a:ext>
-            </a:extLst>
-          </p:cNvPr>
-          <p:cNvPicPr>
-            <a:picLocks noChangeAspect="1"/>
-          </p:cNvPicPr>
-          <p:nvPr/>
-        </p:nvPicPr>
-        <p:blipFill>
-          <a:blip r:embed="rId3">
-            <a:extLst>
-              <a:ext uri="{28A0092B-C50C-407E-A947-70E740481C1C}">
-                <a14:useLocalDpi xmlns:a14="http://schemas.microsoft.com/office/drawing/2010/main" val="0"/>
-              </a:ext>
-            </a:extLst>
-          </a:blip>
-          <a:stretch>
-            <a:fillRect/>
-          </a:stretch>
-        </p:blipFill>
-        <p:spPr>
-          <a:xfrm>
-            <a:off x="10289628" y="5108028"/>
-            <a:ext cx="1749972" cy="1749972"/>
-          </a:xfrm>
-          <a:prstGeom prst="rect">
-            <a:avLst/>
-          </a:prstGeom>
-        </p:spPr>
-      </p:pic>
-      <p:pic>
-        <p:nvPicPr>
-          <p:cNvPr id="7" name="Picture 2" descr="Budapesti Gazdasági Szakképzési Centrum Pestszentlőrinci Technikum | EDIR">
-            <a:extLst>
-              <a:ext uri="{FF2B5EF4-FFF2-40B4-BE49-F238E27FC236}">
-                <a16:creationId xmlns:a16="http://schemas.microsoft.com/office/drawing/2014/main" id="{01A56FBC-DF23-DAA2-1198-340A78F38FED}"/>
-              </a:ext>
-            </a:extLst>
-          </p:cNvPr>
-          <p:cNvPicPr>
-            <a:picLocks noChangeAspect="1" noChangeArrowheads="1"/>
-          </p:cNvPicPr>
-          <p:nvPr/>
-        </p:nvPicPr>
-        <p:blipFill>
-          <a:blip r:embed="rId4">
-            <a:extLst>
-              <a:ext uri="{28A0092B-C50C-407E-A947-70E740481C1C}">
-                <a14:useLocalDpi xmlns:a14="http://schemas.microsoft.com/office/drawing/2010/main" val="0"/>
-              </a:ext>
-            </a:extLst>
-          </a:blip>
-          <a:srcRect/>
-          <a:stretch>
-            <a:fillRect/>
-          </a:stretch>
-        </p:blipFill>
-        <p:spPr bwMode="auto">
-          <a:xfrm>
-            <a:off x="296888" y="5393198"/>
-            <a:ext cx="1796980" cy="1179631"/>
-          </a:xfrm>
-          <a:prstGeom prst="rect">
-            <a:avLst/>
-          </a:prstGeom>
-          <a:noFill/>
-          <a:extLst>
-            <a:ext uri="{909E8E84-426E-40DD-AFC4-6F175D3DCCD1}">
-              <a14:hiddenFill xmlns:a14="http://schemas.microsoft.com/office/drawing/2010/main">
-                <a:solidFill>
-                  <a:srgbClr val="FFFFFF"/>
-                </a:solidFill>
-              </a14:hiddenFill>
-            </a:ext>
-          </a:extLst>
-        </p:spPr>
-      </p:pic>
-    </p:spTree>
-    <p:extLst>
-      <p:ext uri="{BB962C8B-B14F-4D97-AF65-F5344CB8AC3E}">
-        <p14:creationId xmlns:p14="http://schemas.microsoft.com/office/powerpoint/2010/main" val="3630747796"/>
       </p:ext>
     </p:extLst>
   </p:cSld>

--- a/MakettMester.pptx
+++ b/MakettMester.pptx
@@ -5,7 +5,7 @@
     <p:sldMasterId id="2147483648" r:id="rId1"/>
   </p:sldMasterIdLst>
   <p:notesMasterIdLst>
-    <p:notesMasterId r:id="rId22"/>
+    <p:notesMasterId r:id="rId21"/>
   </p:notesMasterIdLst>
   <p:sldIdLst>
     <p:sldId id="256" r:id="rId2"/>
@@ -18,16 +18,15 @@
     <p:sldId id="272" r:id="rId9"/>
     <p:sldId id="279" r:id="rId10"/>
     <p:sldId id="280" r:id="rId11"/>
-    <p:sldId id="281" r:id="rId12"/>
-    <p:sldId id="282" r:id="rId13"/>
-    <p:sldId id="264" r:id="rId14"/>
-    <p:sldId id="266" r:id="rId15"/>
-    <p:sldId id="284" r:id="rId16"/>
-    <p:sldId id="283" r:id="rId17"/>
-    <p:sldId id="260" r:id="rId18"/>
-    <p:sldId id="261" r:id="rId19"/>
-    <p:sldId id="263" r:id="rId20"/>
-    <p:sldId id="273" r:id="rId21"/>
+    <p:sldId id="282" r:id="rId12"/>
+    <p:sldId id="264" r:id="rId13"/>
+    <p:sldId id="266" r:id="rId14"/>
+    <p:sldId id="284" r:id="rId15"/>
+    <p:sldId id="283" r:id="rId16"/>
+    <p:sldId id="260" r:id="rId17"/>
+    <p:sldId id="261" r:id="rId18"/>
+    <p:sldId id="263" r:id="rId19"/>
+    <p:sldId id="273" r:id="rId20"/>
   </p:sldIdLst>
   <p:sldSz cx="12192000" cy="6858000"/>
   <p:notesSz cx="6858000" cy="9144000"/>
@@ -28284,52 +28283,17 @@
               <a:defRPr/>
             </a:pPr>
             <a:r>
-              <a:rPr lang="hu-HU" sz="1200" dirty="0">
-                <a:solidFill>
-                  <a:schemeClr val="bg1"/>
-                </a:solidFill>
-              </a:rPr>
-              <a:t>Példák az újra hasznosított komponensekre. Például a </a:t>
+              <a:rPr lang="en-GB" dirty="0"/>
+              <a:t>Another important aspect of our project was the reuse of components. For example, the </a:t>
             </a:r>
             <a:r>
-              <a:rPr lang="hu-HU" sz="1200" dirty="0" err="1">
-                <a:solidFill>
-                  <a:schemeClr val="bg1"/>
-                </a:solidFill>
-              </a:rPr>
+              <a:rPr lang="en-GB" dirty="0" err="1"/>
               <a:t>MakettCard</a:t>
             </a:r>
             <a:r>
-              <a:rPr lang="hu-HU" sz="1200" dirty="0">
-                <a:solidFill>
-                  <a:schemeClr val="bg1"/>
-                </a:solidFill>
-              </a:rPr>
-              <a:t> komponenst több oldalon is ugyanazzal a dizájnnal jelenítettük meg, csak más adatokat kapott. Ugyanez igaz a </a:t>
+              <a:rPr lang="en-GB" dirty="0"/>
+              <a:t> component is used on multiple pages with the same design, while displaying different data. The same approach was applied to the modal windows, which share a common structure and functionality throughout the application. This made the code more consistent, easier to maintain, and reduced the amount of duplicated code.</a:t>
             </a:r>
-            <a:r>
-              <a:rPr lang="hu-HU" sz="1200" dirty="0" err="1">
-                <a:solidFill>
-                  <a:schemeClr val="bg1"/>
-                </a:solidFill>
-              </a:rPr>
-              <a:t>modal</a:t>
-            </a:r>
-            <a:r>
-              <a:rPr lang="hu-HU" sz="1200" dirty="0">
-                <a:solidFill>
-                  <a:schemeClr val="bg1"/>
-                </a:solidFill>
-              </a:rPr>
-              <a:t> ablakokra is, amelyek közös struktúrát és működést használnak. Ez átláthatóbbá és könnyebben karbantarthatóvá tette a kódot.</a:t>
-            </a:r>
-            <a:endParaRPr lang="en-US" sz="1200" dirty="0">
-              <a:solidFill>
-                <a:schemeClr val="bg1"/>
-              </a:solidFill>
-            </a:endParaRPr>
-          </a:p>
-          <a:p>
             <a:endParaRPr lang="hu-HU" dirty="0"/>
           </a:p>
         </p:txBody>
@@ -28414,170 +28378,6 @@
           <a:bodyPr/>
           <a:lstStyle/>
           <a:p>
-            <a:r>
-              <a:rPr lang="en-GB" dirty="0"/>
-              <a:t>A </a:t>
-            </a:r>
-            <a:r>
-              <a:rPr lang="en-GB" dirty="0" err="1"/>
-              <a:t>fórum</a:t>
-            </a:r>
-            <a:r>
-              <a:rPr lang="en-GB" dirty="0"/>
-              <a:t> </a:t>
-            </a:r>
-            <a:r>
-              <a:rPr lang="en-GB" dirty="0" err="1"/>
-              <a:t>adatai</a:t>
-            </a:r>
-            <a:r>
-              <a:rPr lang="en-GB" dirty="0"/>
-              <a:t> backend API-</a:t>
-            </a:r>
-            <a:r>
-              <a:rPr lang="en-GB" dirty="0" err="1"/>
-              <a:t>ból</a:t>
-            </a:r>
-            <a:r>
-              <a:rPr lang="en-GB" dirty="0"/>
-              <a:t> </a:t>
-            </a:r>
-            <a:r>
-              <a:rPr lang="en-GB" dirty="0" err="1"/>
-              <a:t>töltődnek</a:t>
-            </a:r>
-            <a:r>
-              <a:rPr lang="en-GB" dirty="0"/>
-              <a:t> be, </a:t>
-            </a:r>
-            <a:r>
-              <a:rPr lang="en-GB" dirty="0" err="1"/>
-              <a:t>és</a:t>
-            </a:r>
-            <a:r>
-              <a:rPr lang="en-GB" dirty="0"/>
-              <a:t> a </a:t>
-            </a:r>
-            <a:r>
-              <a:rPr lang="en-GB" dirty="0" err="1"/>
-              <a:t>felület</a:t>
-            </a:r>
-            <a:r>
-              <a:rPr lang="en-GB" dirty="0"/>
-              <a:t> </a:t>
-            </a:r>
-            <a:r>
-              <a:rPr lang="en-GB" dirty="0" err="1"/>
-              <a:t>dinamikusan</a:t>
-            </a:r>
-            <a:r>
-              <a:rPr lang="en-GB" dirty="0"/>
-              <a:t> </a:t>
-            </a:r>
-            <a:r>
-              <a:rPr lang="en-GB" dirty="0" err="1"/>
-              <a:t>frissül</a:t>
-            </a:r>
-            <a:r>
-              <a:rPr lang="en-GB" dirty="0"/>
-              <a:t> </a:t>
-            </a:r>
-            <a:r>
-              <a:rPr lang="en-GB" dirty="0" err="1"/>
-              <a:t>új</a:t>
-            </a:r>
-            <a:r>
-              <a:rPr lang="en-GB" dirty="0"/>
-              <a:t> </a:t>
-            </a:r>
-            <a:r>
-              <a:rPr lang="en-GB" dirty="0" err="1"/>
-              <a:t>hozzászólások</a:t>
-            </a:r>
-            <a:r>
-              <a:rPr lang="en-GB" dirty="0"/>
-              <a:t> </a:t>
-            </a:r>
-            <a:r>
-              <a:rPr lang="en-GB" dirty="0" err="1"/>
-              <a:t>esetén</a:t>
-            </a:r>
-            <a:r>
-              <a:rPr lang="en-GB" dirty="0"/>
-              <a:t>. A</a:t>
-            </a:r>
-            <a:r>
-              <a:rPr lang="hu-HU" dirty="0"/>
-              <a:t> felhasználók szerepkörét a</a:t>
-            </a:r>
-            <a:r>
-              <a:rPr lang="en-GB" dirty="0"/>
-              <a:t> frontend </a:t>
-            </a:r>
-            <a:r>
-              <a:rPr lang="en-GB" dirty="0" err="1"/>
-              <a:t>ellenőrzi</a:t>
-            </a:r>
-            <a:r>
-              <a:rPr lang="en-GB" dirty="0"/>
-              <a:t>, </a:t>
-            </a:r>
-            <a:r>
-              <a:rPr lang="en-GB" dirty="0" err="1"/>
-              <a:t>és</a:t>
-            </a:r>
-            <a:r>
-              <a:rPr lang="en-GB" dirty="0"/>
-              <a:t> </a:t>
-            </a:r>
-            <a:r>
-              <a:rPr lang="en-GB" dirty="0" err="1"/>
-              <a:t>csak</a:t>
-            </a:r>
-            <a:r>
-              <a:rPr lang="en-GB" dirty="0"/>
-              <a:t> </a:t>
-            </a:r>
-            <a:r>
-              <a:rPr lang="en-GB" dirty="0" err="1"/>
-              <a:t>bizonyos</a:t>
-            </a:r>
-            <a:r>
-              <a:rPr lang="en-GB" dirty="0"/>
-              <a:t> </a:t>
-            </a:r>
-            <a:r>
-              <a:rPr lang="en-GB" dirty="0" err="1"/>
-              <a:t>jogosultságok</a:t>
-            </a:r>
-            <a:r>
-              <a:rPr lang="en-GB" dirty="0"/>
-              <a:t> </a:t>
-            </a:r>
-            <a:r>
-              <a:rPr lang="en-GB" dirty="0" err="1"/>
-              <a:t>esetén</a:t>
-            </a:r>
-            <a:r>
-              <a:rPr lang="en-GB" dirty="0"/>
-              <a:t> </a:t>
-            </a:r>
-            <a:r>
-              <a:rPr lang="en-GB" dirty="0" err="1"/>
-              <a:t>jelenít</a:t>
-            </a:r>
-            <a:r>
-              <a:rPr lang="en-GB" dirty="0"/>
-              <a:t> meg admin </a:t>
-            </a:r>
-            <a:r>
-              <a:rPr lang="en-GB" dirty="0" err="1"/>
-              <a:t>funkciókat</a:t>
-            </a:r>
-            <a:r>
-              <a:rPr lang="en-GB" dirty="0"/>
-              <a:t>.</a:t>
-            </a:r>
             <a:endParaRPr lang="hu-HU" dirty="0"/>
           </a:p>
         </p:txBody>
@@ -28608,7 +28408,7 @@
     </p:spTree>
     <p:extLst>
       <p:ext uri="{BB962C8B-B14F-4D97-AF65-F5344CB8AC3E}">
-        <p14:creationId xmlns:p14="http://schemas.microsoft.com/office/powerpoint/2010/main" val="116143499"/>
+        <p14:creationId xmlns:p14="http://schemas.microsoft.com/office/powerpoint/2010/main" val="367687938"/>
       </p:ext>
     </p:extLst>
   </p:cSld>
@@ -28619,90 +28419,6 @@
 </file>
 
 <file path=ppt/notesSlides/notesSlide12.xml><?xml version="1.0" encoding="utf-8"?>
-<p:notes xmlns:a="http://schemas.openxmlformats.org/drawingml/2006/main" xmlns:r="http://schemas.openxmlformats.org/officeDocument/2006/relationships" xmlns:p="http://schemas.openxmlformats.org/presentationml/2006/main">
-  <p:cSld>
-    <p:spTree>
-      <p:nvGrpSpPr>
-        <p:cNvPr id="1" name=""/>
-        <p:cNvGrpSpPr/>
-        <p:nvPr/>
-      </p:nvGrpSpPr>
-      <p:grpSpPr>
-        <a:xfrm>
-          <a:off x="0" y="0"/>
-          <a:ext cx="0" cy="0"/>
-          <a:chOff x="0" y="0"/>
-          <a:chExt cx="0" cy="0"/>
-        </a:xfrm>
-      </p:grpSpPr>
-      <p:sp>
-        <p:nvSpPr>
-          <p:cNvPr id="2" name="Diakép helye 1"/>
-          <p:cNvSpPr>
-            <a:spLocks noGrp="1" noRot="1" noChangeAspect="1"/>
-          </p:cNvSpPr>
-          <p:nvPr>
-            <p:ph type="sldImg"/>
-          </p:nvPr>
-        </p:nvSpPr>
-        <p:spPr/>
-      </p:sp>
-      <p:sp>
-        <p:nvSpPr>
-          <p:cNvPr id="3" name="Jegyzetek helye 2"/>
-          <p:cNvSpPr>
-            <a:spLocks noGrp="1"/>
-          </p:cNvSpPr>
-          <p:nvPr>
-            <p:ph type="body" idx="1"/>
-          </p:nvPr>
-        </p:nvSpPr>
-        <p:spPr/>
-        <p:txBody>
-          <a:bodyPr/>
-          <a:lstStyle/>
-          <a:p>
-            <a:endParaRPr lang="hu-HU" dirty="0"/>
-          </a:p>
-        </p:txBody>
-      </p:sp>
-      <p:sp>
-        <p:nvSpPr>
-          <p:cNvPr id="4" name="Dia számának helye 3"/>
-          <p:cNvSpPr>
-            <a:spLocks noGrp="1"/>
-          </p:cNvSpPr>
-          <p:nvPr>
-            <p:ph type="sldNum" sz="quarter" idx="5"/>
-          </p:nvPr>
-        </p:nvSpPr>
-        <p:spPr/>
-        <p:txBody>
-          <a:bodyPr/>
-          <a:lstStyle/>
-          <a:p>
-            <a:fld id="{C4B2AB52-DE3E-44E0-AFFD-20264D143888}" type="slidenum">
-              <a:rPr lang="hu-HU" smtClean="0"/>
-              <a:t>12</a:t>
-            </a:fld>
-            <a:endParaRPr lang="hu-HU"/>
-          </a:p>
-        </p:txBody>
-      </p:sp>
-    </p:spTree>
-    <p:extLst>
-      <p:ext uri="{BB962C8B-B14F-4D97-AF65-F5344CB8AC3E}">
-        <p14:creationId xmlns:p14="http://schemas.microsoft.com/office/powerpoint/2010/main" val="367687938"/>
-      </p:ext>
-    </p:extLst>
-  </p:cSld>
-  <p:clrMapOvr>
-    <a:masterClrMapping/>
-  </p:clrMapOvr>
-</p:notes>
-</file>
-
-<file path=ppt/notesSlides/notesSlide13.xml><?xml version="1.0" encoding="utf-8"?>
 <p:notes xmlns:a="http://schemas.openxmlformats.org/drawingml/2006/main" xmlns:r="http://schemas.openxmlformats.org/officeDocument/2006/relationships" xmlns:p="http://schemas.openxmlformats.org/presentationml/2006/main">
   <p:cSld>
     <p:spTree>
@@ -28818,7 +28534,7 @@
           <a:p>
             <a:fld id="{C4B2AB52-DE3E-44E0-AFFD-20264D143888}" type="slidenum">
               <a:rPr lang="hu-HU" smtClean="0"/>
-              <a:t>13</a:t>
+              <a:t>12</a:t>
             </a:fld>
             <a:endParaRPr lang="hu-HU"/>
           </a:p>
@@ -28837,7 +28553,7 @@
 </p:notes>
 </file>
 
-<file path=ppt/notesSlides/notesSlide14.xml><?xml version="1.0" encoding="utf-8"?>
+<file path=ppt/notesSlides/notesSlide13.xml><?xml version="1.0" encoding="utf-8"?>
 <p:notes xmlns:a="http://schemas.openxmlformats.org/drawingml/2006/main" xmlns:r="http://schemas.openxmlformats.org/officeDocument/2006/relationships" xmlns:p="http://schemas.openxmlformats.org/presentationml/2006/main">
   <p:cSld>
     <p:spTree>
@@ -28953,7 +28669,7 @@
           <a:p>
             <a:fld id="{C4B2AB52-DE3E-44E0-AFFD-20264D143888}" type="slidenum">
               <a:rPr lang="hu-HU" smtClean="0"/>
-              <a:t>14</a:t>
+              <a:t>13</a:t>
             </a:fld>
             <a:endParaRPr lang="hu-HU"/>
           </a:p>
@@ -28972,7 +28688,7 @@
 </p:notes>
 </file>
 
-<file path=ppt/notesSlides/notesSlide15.xml><?xml version="1.0" encoding="utf-8"?>
+<file path=ppt/notesSlides/notesSlide14.xml><?xml version="1.0" encoding="utf-8"?>
 <p:notes xmlns:a="http://schemas.openxmlformats.org/drawingml/2006/main" xmlns:r="http://schemas.openxmlformats.org/officeDocument/2006/relationships" xmlns:p="http://schemas.openxmlformats.org/presentationml/2006/main">
   <p:cSld>
     <p:spTree>
@@ -29200,7 +28916,7 @@
           <a:p>
             <a:fld id="{C4B2AB52-DE3E-44E0-AFFD-20264D143888}" type="slidenum">
               <a:rPr lang="hu-HU" smtClean="0"/>
-              <a:t>15</a:t>
+              <a:t>14</a:t>
             </a:fld>
             <a:endParaRPr lang="hu-HU"/>
           </a:p>
@@ -29219,7 +28935,7 @@
 </p:notes>
 </file>
 
-<file path=ppt/notesSlides/notesSlide16.xml><?xml version="1.0" encoding="utf-8"?>
+<file path=ppt/notesSlides/notesSlide15.xml><?xml version="1.0" encoding="utf-8"?>
 <p:notes xmlns:a="http://schemas.openxmlformats.org/drawingml/2006/main" xmlns:r="http://schemas.openxmlformats.org/officeDocument/2006/relationships" xmlns:p="http://schemas.openxmlformats.org/presentationml/2006/main">
   <p:cSld>
     <p:spTree>
@@ -29308,7 +29024,7 @@
           <a:p>
             <a:fld id="{C4B2AB52-DE3E-44E0-AFFD-20264D143888}" type="slidenum">
               <a:rPr lang="hu-HU" smtClean="0"/>
-              <a:t>16</a:t>
+              <a:t>15</a:t>
             </a:fld>
             <a:endParaRPr lang="hu-HU"/>
           </a:p>
@@ -29327,7 +29043,7 @@
 </p:notes>
 </file>
 
-<file path=ppt/notesSlides/notesSlide17.xml><?xml version="1.0" encoding="utf-8"?>
+<file path=ppt/notesSlides/notesSlide16.xml><?xml version="1.0" encoding="utf-8"?>
 <p:notes xmlns:a="http://schemas.openxmlformats.org/drawingml/2006/main" xmlns:r="http://schemas.openxmlformats.org/officeDocument/2006/relationships" xmlns:p="http://schemas.openxmlformats.org/presentationml/2006/main">
   <p:cSld>
     <p:spTree>
@@ -29395,7 +29111,7 @@
           <a:p>
             <a:fld id="{C4B2AB52-DE3E-44E0-AFFD-20264D143888}" type="slidenum">
               <a:rPr lang="hu-HU" smtClean="0"/>
-              <a:t>17</a:t>
+              <a:t>16</a:t>
             </a:fld>
             <a:endParaRPr lang="hu-HU"/>
           </a:p>
@@ -29414,7 +29130,7 @@
 </p:notes>
 </file>
 
-<file path=ppt/notesSlides/notesSlide18.xml><?xml version="1.0" encoding="utf-8"?>
+<file path=ppt/notesSlides/notesSlide17.xml><?xml version="1.0" encoding="utf-8"?>
 <p:notes xmlns:a="http://schemas.openxmlformats.org/drawingml/2006/main" xmlns:r="http://schemas.openxmlformats.org/officeDocument/2006/relationships" xmlns:p="http://schemas.openxmlformats.org/presentationml/2006/main">
   <p:cSld>
     <p:spTree>
@@ -29490,7 +29206,7 @@
           <a:p>
             <a:fld id="{C4B2AB52-DE3E-44E0-AFFD-20264D143888}" type="slidenum">
               <a:rPr lang="hu-HU" smtClean="0"/>
-              <a:t>18</a:t>
+              <a:t>17</a:t>
             </a:fld>
             <a:endParaRPr lang="hu-HU"/>
           </a:p>
@@ -29509,7 +29225,7 @@
 </p:notes>
 </file>
 
-<file path=ppt/notesSlides/notesSlide19.xml><?xml version="1.0" encoding="utf-8"?>
+<file path=ppt/notesSlides/notesSlide18.xml><?xml version="1.0" encoding="utf-8"?>
 <p:notes xmlns:a="http://schemas.openxmlformats.org/drawingml/2006/main" xmlns:r="http://schemas.openxmlformats.org/officeDocument/2006/relationships" xmlns:p="http://schemas.openxmlformats.org/presentationml/2006/main">
   <p:cSld>
     <p:spTree>
@@ -29577,6 +29293,109 @@
           <a:p>
             <a:fld id="{C4B2AB52-DE3E-44E0-AFFD-20264D143888}" type="slidenum">
               <a:rPr lang="hu-HU" smtClean="0"/>
+              <a:t>18</a:t>
+            </a:fld>
+            <a:endParaRPr lang="hu-HU"/>
+          </a:p>
+        </p:txBody>
+      </p:sp>
+    </p:spTree>
+    <p:extLst>
+      <p:ext uri="{BB962C8B-B14F-4D97-AF65-F5344CB8AC3E}">
+        <p14:creationId xmlns:p14="http://schemas.microsoft.com/office/powerpoint/2010/main" val="4053797243"/>
+      </p:ext>
+    </p:extLst>
+  </p:cSld>
+  <p:clrMapOvr>
+    <a:masterClrMapping/>
+  </p:clrMapOvr>
+</p:notes>
+</file>
+
+<file path=ppt/notesSlides/notesSlide19.xml><?xml version="1.0" encoding="utf-8"?>
+<p:notes xmlns:a="http://schemas.openxmlformats.org/drawingml/2006/main" xmlns:r="http://schemas.openxmlformats.org/officeDocument/2006/relationships" xmlns:p="http://schemas.openxmlformats.org/presentationml/2006/main">
+  <p:cSld>
+    <p:spTree>
+      <p:nvGrpSpPr>
+        <p:cNvPr id="1" name=""/>
+        <p:cNvGrpSpPr/>
+        <p:nvPr/>
+      </p:nvGrpSpPr>
+      <p:grpSpPr>
+        <a:xfrm>
+          <a:off x="0" y="0"/>
+          <a:ext cx="0" cy="0"/>
+          <a:chOff x="0" y="0"/>
+          <a:chExt cx="0" cy="0"/>
+        </a:xfrm>
+      </p:grpSpPr>
+      <p:sp>
+        <p:nvSpPr>
+          <p:cNvPr id="2" name="Diakép helye 1"/>
+          <p:cNvSpPr>
+            <a:spLocks noGrp="1" noRot="1" noChangeAspect="1"/>
+          </p:cNvSpPr>
+          <p:nvPr>
+            <p:ph type="sldImg"/>
+          </p:nvPr>
+        </p:nvSpPr>
+        <p:spPr/>
+      </p:sp>
+      <p:sp>
+        <p:nvSpPr>
+          <p:cNvPr id="3" name="Jegyzetek helye 2"/>
+          <p:cNvSpPr>
+            <a:spLocks noGrp="1"/>
+          </p:cNvSpPr>
+          <p:nvPr>
+            <p:ph type="body" idx="1"/>
+          </p:nvPr>
+        </p:nvSpPr>
+        <p:spPr/>
+        <p:txBody>
+          <a:bodyPr/>
+          <a:lstStyle/>
+          <a:p>
+            <a:r>
+              <a:rPr lang="hu-HU" dirty="0"/>
+              <a:t>Összességében a </a:t>
+            </a:r>
+            <a:r>
+              <a:rPr lang="hu-HU" dirty="0" err="1"/>
+              <a:t>MakettMester</a:t>
+            </a:r>
+            <a:r>
+              <a:rPr lang="hu-HU" dirty="0"/>
+              <a:t> egy teljes </a:t>
+            </a:r>
+            <a:r>
+              <a:rPr lang="hu-HU" dirty="0" err="1"/>
+              <a:t>full-stack</a:t>
+            </a:r>
+            <a:r>
+              <a:rPr lang="hu-HU" dirty="0"/>
+              <a:t> alkalmazás lett, amely valós közösségi funkciókat valósít meg. A projekt során külön figyeltünk a moduláris felépítésre, a biztonságra, a bővíthetőségre és a felhasználói élményre. A rendszer jelenlegi állapotában is jól használható, de továbbfejleszthető például fejlettebb kereséssel, statisztikákkal, még jobb mobilélménnyel vagy összetettebb AI segítséggel.</a:t>
+            </a:r>
+          </a:p>
+        </p:txBody>
+      </p:sp>
+      <p:sp>
+        <p:nvSpPr>
+          <p:cNvPr id="4" name="Dia számának helye 3"/>
+          <p:cNvSpPr>
+            <a:spLocks noGrp="1"/>
+          </p:cNvSpPr>
+          <p:nvPr>
+            <p:ph type="sldNum" sz="quarter" idx="5"/>
+          </p:nvPr>
+        </p:nvSpPr>
+        <p:spPr/>
+        <p:txBody>
+          <a:bodyPr/>
+          <a:lstStyle/>
+          <a:p>
+            <a:fld id="{C4B2AB52-DE3E-44E0-AFFD-20264D143888}" type="slidenum">
+              <a:rPr lang="hu-HU" smtClean="0"/>
               <a:t>19</a:t>
             </a:fld>
             <a:endParaRPr lang="hu-HU"/>
@@ -29586,7 +29405,7 @@
     </p:spTree>
     <p:extLst>
       <p:ext uri="{BB962C8B-B14F-4D97-AF65-F5344CB8AC3E}">
-        <p14:creationId xmlns:p14="http://schemas.microsoft.com/office/powerpoint/2010/main" val="4053797243"/>
+        <p14:creationId xmlns:p14="http://schemas.microsoft.com/office/powerpoint/2010/main" val="1709005438"/>
       </p:ext>
     </p:extLst>
   </p:cSld>
@@ -29699,109 +29518,6 @@
     <p:extLst>
       <p:ext uri="{BB962C8B-B14F-4D97-AF65-F5344CB8AC3E}">
         <p14:creationId xmlns:p14="http://schemas.microsoft.com/office/powerpoint/2010/main" val="3749620830"/>
-      </p:ext>
-    </p:extLst>
-  </p:cSld>
-  <p:clrMapOvr>
-    <a:masterClrMapping/>
-  </p:clrMapOvr>
-</p:notes>
-</file>
-
-<file path=ppt/notesSlides/notesSlide20.xml><?xml version="1.0" encoding="utf-8"?>
-<p:notes xmlns:a="http://schemas.openxmlformats.org/drawingml/2006/main" xmlns:r="http://schemas.openxmlformats.org/officeDocument/2006/relationships" xmlns:p="http://schemas.openxmlformats.org/presentationml/2006/main">
-  <p:cSld>
-    <p:spTree>
-      <p:nvGrpSpPr>
-        <p:cNvPr id="1" name=""/>
-        <p:cNvGrpSpPr/>
-        <p:nvPr/>
-      </p:nvGrpSpPr>
-      <p:grpSpPr>
-        <a:xfrm>
-          <a:off x="0" y="0"/>
-          <a:ext cx="0" cy="0"/>
-          <a:chOff x="0" y="0"/>
-          <a:chExt cx="0" cy="0"/>
-        </a:xfrm>
-      </p:grpSpPr>
-      <p:sp>
-        <p:nvSpPr>
-          <p:cNvPr id="2" name="Diakép helye 1"/>
-          <p:cNvSpPr>
-            <a:spLocks noGrp="1" noRot="1" noChangeAspect="1"/>
-          </p:cNvSpPr>
-          <p:nvPr>
-            <p:ph type="sldImg"/>
-          </p:nvPr>
-        </p:nvSpPr>
-        <p:spPr/>
-      </p:sp>
-      <p:sp>
-        <p:nvSpPr>
-          <p:cNvPr id="3" name="Jegyzetek helye 2"/>
-          <p:cNvSpPr>
-            <a:spLocks noGrp="1"/>
-          </p:cNvSpPr>
-          <p:nvPr>
-            <p:ph type="body" idx="1"/>
-          </p:nvPr>
-        </p:nvSpPr>
-        <p:spPr/>
-        <p:txBody>
-          <a:bodyPr/>
-          <a:lstStyle/>
-          <a:p>
-            <a:r>
-              <a:rPr lang="hu-HU" dirty="0"/>
-              <a:t>Összességében a </a:t>
-            </a:r>
-            <a:r>
-              <a:rPr lang="hu-HU" dirty="0" err="1"/>
-              <a:t>MakettMester</a:t>
-            </a:r>
-            <a:r>
-              <a:rPr lang="hu-HU" dirty="0"/>
-              <a:t> egy teljes </a:t>
-            </a:r>
-            <a:r>
-              <a:rPr lang="hu-HU" dirty="0" err="1"/>
-              <a:t>full-stack</a:t>
-            </a:r>
-            <a:r>
-              <a:rPr lang="hu-HU" dirty="0"/>
-              <a:t> alkalmazás lett, amely valós közösségi funkciókat valósít meg. A projekt során külön figyeltünk a moduláris felépítésre, a biztonságra, a bővíthetőségre és a felhasználói élményre. A rendszer jelenlegi állapotában is jól használható, de továbbfejleszthető például fejlettebb kereséssel, statisztikákkal, még jobb mobilélménnyel vagy összetettebb AI segítséggel.</a:t>
-            </a:r>
-          </a:p>
-        </p:txBody>
-      </p:sp>
-      <p:sp>
-        <p:nvSpPr>
-          <p:cNvPr id="4" name="Dia számának helye 3"/>
-          <p:cNvSpPr>
-            <a:spLocks noGrp="1"/>
-          </p:cNvSpPr>
-          <p:nvPr>
-            <p:ph type="sldNum" sz="quarter" idx="5"/>
-          </p:nvPr>
-        </p:nvSpPr>
-        <p:spPr/>
-        <p:txBody>
-          <a:bodyPr/>
-          <a:lstStyle/>
-          <a:p>
-            <a:fld id="{C4B2AB52-DE3E-44E0-AFFD-20264D143888}" type="slidenum">
-              <a:rPr lang="hu-HU" smtClean="0"/>
-              <a:t>20</a:t>
-            </a:fld>
-            <a:endParaRPr lang="hu-HU"/>
-          </a:p>
-        </p:txBody>
-      </p:sp>
-    </p:spTree>
-    <p:extLst>
-      <p:ext uri="{BB962C8B-B14F-4D97-AF65-F5344CB8AC3E}">
-        <p14:creationId xmlns:p14="http://schemas.microsoft.com/office/powerpoint/2010/main" val="1709005438"/>
       </p:ext>
     </p:extLst>
   </p:cSld>
@@ -30503,9 +30219,10 @@
           <a:lstStyle/>
           <a:p>
             <a:r>
-              <a:rPr lang="hu-HU" dirty="0"/>
-              <a:t>Most bemutatom az oldalunk két legfontosabb oldalát. Ez a Makettek oldal, ahol az összes feltöltött makett megjelenik. A felhasználók többféle szűrőt és keresési lehetőséget is használhatnak a gyorsabb és kényelmesebb böngészés érdekében. Szűrhetnek például típus, értékelés vagy más kategóriák alapján, illetve közvetlenül is rákereshetnek egy adott makettre.</a:t>
+              <a:rPr lang="en-GB" dirty="0"/>
+              <a:t>First, I would like to present one of the most important pages of our website, the Models page. Here, all uploaded models are displayed in a clear and organized way. Users can use various filters and search options to make browsing faster and more convenient. For example, they can filter models by type, rating, or other categories, and they can also search directly for a specific model. This helps users quickly find the models they are interested in.</a:t>
             </a:r>
+            <a:endParaRPr lang="hu-HU" dirty="0"/>
           </a:p>
         </p:txBody>
       </p:sp>
@@ -34918,529 +34635,6 @@
       </p:grpSpPr>
       <p:sp useBgFill="1">
         <p:nvSpPr>
-          <p:cNvPr id="58" name="Rectangle 57">
-            <a:extLst>
-              <a:ext uri="{FF2B5EF4-FFF2-40B4-BE49-F238E27FC236}">
-                <a16:creationId xmlns:a16="http://schemas.microsoft.com/office/drawing/2014/main" id="{A8384FB5-9ADC-4DDC-881B-597D56F5B15D}"/>
-              </a:ext>
-              <a:ext uri="{C183D7F6-B498-43B3-948B-1728B52AA6E4}">
-                <adec:decorative xmlns:adec="http://schemas.microsoft.com/office/drawing/2017/decorative" val="1"/>
-              </a:ext>
-            </a:extLst>
-          </p:cNvPr>
-          <p:cNvSpPr>
-            <a:spLocks noGrp="1" noRot="1" noChangeAspect="1" noMove="1" noResize="1" noEditPoints="1" noAdjustHandles="1" noChangeArrowheads="1" noChangeShapeType="1" noTextEdit="1"/>
-          </p:cNvSpPr>
-          <p:nvPr>
-            <p:extLst>
-              <p:ext uri="{386F3935-93C4-4BCD-93E2-E3B085C9AB24}">
-                <p16:designElem xmlns:p16="http://schemas.microsoft.com/office/powerpoint/2015/main" val="1"/>
-              </p:ext>
-            </p:extLst>
-          </p:nvPr>
-        </p:nvSpPr>
-        <p:spPr>
-          <a:xfrm>
-            <a:off x="0" y="0"/>
-            <a:ext cx="12192000" cy="6858000"/>
-          </a:xfrm>
-          <a:prstGeom prst="rect">
-            <a:avLst/>
-          </a:prstGeom>
-          <a:ln w="12700" cap="flat" cmpd="sng" algn="ctr">
-            <a:noFill/>
-            <a:prstDash val="solid"/>
-            <a:miter lim="800000"/>
-          </a:ln>
-          <a:effectLst/>
-          <a:extLst>
-            <a:ext uri="{91240B29-F687-4F45-9708-019B960494DF}">
-              <a14:hiddenLine xmlns:a14="http://schemas.microsoft.com/office/drawing/2010/main" w="12700" cap="flat" cmpd="sng" algn="ctr">
-                <a:solidFill>
-                  <a:schemeClr val="accent1">
-                    <a:shade val="50000"/>
-                  </a:schemeClr>
-                </a:solidFill>
-                <a:prstDash val="solid"/>
-                <a:miter lim="800000"/>
-              </a14:hiddenLine>
-            </a:ext>
-          </a:extLst>
-        </p:spPr>
-        <p:style>
-          <a:lnRef idx="2">
-            <a:schemeClr val="accent1">
-              <a:shade val="50000"/>
-            </a:schemeClr>
-          </a:lnRef>
-          <a:fillRef idx="1">
-            <a:schemeClr val="accent1"/>
-          </a:fillRef>
-          <a:effectRef idx="0">
-            <a:schemeClr val="accent1"/>
-          </a:effectRef>
-          <a:fontRef idx="minor">
-            <a:schemeClr val="lt1"/>
-          </a:fontRef>
-        </p:style>
-        <p:txBody>
-          <a:bodyPr rtlCol="0" anchor="ctr"/>
-          <a:lstStyle/>
-          <a:p>
-            <a:pPr algn="ctr"/>
-            <a:endParaRPr lang="en-US"/>
-          </a:p>
-        </p:txBody>
-      </p:sp>
-      <p:sp>
-        <p:nvSpPr>
-          <p:cNvPr id="60" name="Rectangle 59">
-            <a:extLst>
-              <a:ext uri="{FF2B5EF4-FFF2-40B4-BE49-F238E27FC236}">
-                <a16:creationId xmlns:a16="http://schemas.microsoft.com/office/drawing/2014/main" id="{1199E1B1-A8C0-4FE8-A5A8-1CB41D69F857}"/>
-              </a:ext>
-              <a:ext uri="{C183D7F6-B498-43B3-948B-1728B52AA6E4}">
-                <adec:decorative xmlns:adec="http://schemas.microsoft.com/office/drawing/2017/decorative" val="1"/>
-              </a:ext>
-            </a:extLst>
-          </p:cNvPr>
-          <p:cNvSpPr>
-            <a:spLocks noGrp="1" noRot="1" noChangeAspect="1" noMove="1" noResize="1" noEditPoints="1" noAdjustHandles="1" noChangeArrowheads="1" noChangeShapeType="1" noTextEdit="1"/>
-          </p:cNvSpPr>
-          <p:nvPr>
-            <p:extLst>
-              <p:ext uri="{386F3935-93C4-4BCD-93E2-E3B085C9AB24}">
-                <p16:designElem xmlns:p16="http://schemas.microsoft.com/office/powerpoint/2015/main" val="1"/>
-              </p:ext>
-            </p:extLst>
-          </p:nvPr>
-        </p:nvSpPr>
-        <p:spPr>
-          <a:xfrm rot="10800000" flipH="1">
-            <a:off x="2" y="0"/>
-            <a:ext cx="12191998" cy="1575955"/>
-          </a:xfrm>
-          <a:prstGeom prst="rect">
-            <a:avLst/>
-          </a:prstGeom>
-          <a:gradFill>
-            <a:gsLst>
-              <a:gs pos="0">
-                <a:srgbClr val="000000">
-                  <a:alpha val="96000"/>
-                </a:srgbClr>
-              </a:gs>
-              <a:gs pos="100000">
-                <a:schemeClr val="accent1">
-                  <a:lumMod val="75000"/>
-                </a:schemeClr>
-              </a:gs>
-            </a:gsLst>
-            <a:lin ang="6000000" scaled="0"/>
-          </a:gradFill>
-          <a:ln>
-            <a:noFill/>
-          </a:ln>
-        </p:spPr>
-        <p:style>
-          <a:lnRef idx="2">
-            <a:schemeClr val="accent1">
-              <a:shade val="50000"/>
-            </a:schemeClr>
-          </a:lnRef>
-          <a:fillRef idx="1">
-            <a:schemeClr val="accent1"/>
-          </a:fillRef>
-          <a:effectRef idx="0">
-            <a:schemeClr val="accent1"/>
-          </a:effectRef>
-          <a:fontRef idx="minor">
-            <a:schemeClr val="lt1"/>
-          </a:fontRef>
-        </p:style>
-        <p:txBody>
-          <a:bodyPr rtlCol="0" anchor="ctr"/>
-          <a:lstStyle/>
-          <a:p>
-            <a:pPr algn="ctr"/>
-            <a:endParaRPr lang="en-US"/>
-          </a:p>
-        </p:txBody>
-      </p:sp>
-      <p:sp>
-        <p:nvSpPr>
-          <p:cNvPr id="62" name="Rectangle 61">
-            <a:extLst>
-              <a:ext uri="{FF2B5EF4-FFF2-40B4-BE49-F238E27FC236}">
-                <a16:creationId xmlns:a16="http://schemas.microsoft.com/office/drawing/2014/main" id="{84A8DE83-DE75-4B41-9DB4-A7EC0B0DEC0B}"/>
-              </a:ext>
-              <a:ext uri="{C183D7F6-B498-43B3-948B-1728B52AA6E4}">
-                <adec:decorative xmlns:adec="http://schemas.microsoft.com/office/drawing/2017/decorative" val="1"/>
-              </a:ext>
-            </a:extLst>
-          </p:cNvPr>
-          <p:cNvSpPr>
-            <a:spLocks noGrp="1" noRot="1" noChangeAspect="1" noMove="1" noResize="1" noEditPoints="1" noAdjustHandles="1" noChangeArrowheads="1" noChangeShapeType="1" noTextEdit="1"/>
-          </p:cNvSpPr>
-          <p:nvPr>
-            <p:extLst>
-              <p:ext uri="{386F3935-93C4-4BCD-93E2-E3B085C9AB24}">
-                <p16:designElem xmlns:p16="http://schemas.microsoft.com/office/powerpoint/2015/main" val="1"/>
-              </p:ext>
-            </p:extLst>
-          </p:nvPr>
-        </p:nvSpPr>
-        <p:spPr>
-          <a:xfrm>
-            <a:off x="0" y="0"/>
-            <a:ext cx="8128856" cy="1575461"/>
-          </a:xfrm>
-          <a:prstGeom prst="rect">
-            <a:avLst/>
-          </a:prstGeom>
-          <a:gradFill>
-            <a:gsLst>
-              <a:gs pos="0">
-                <a:schemeClr val="accent1">
-                  <a:alpha val="41000"/>
-                </a:schemeClr>
-              </a:gs>
-              <a:gs pos="74000">
-                <a:schemeClr val="accent1">
-                  <a:lumMod val="60000"/>
-                  <a:lumOff val="40000"/>
-                  <a:alpha val="0"/>
-                </a:schemeClr>
-              </a:gs>
-            </a:gsLst>
-            <a:lin ang="8400000" scaled="0"/>
-          </a:gradFill>
-          <a:ln>
-            <a:noFill/>
-          </a:ln>
-        </p:spPr>
-        <p:style>
-          <a:lnRef idx="2">
-            <a:schemeClr val="accent1">
-              <a:shade val="50000"/>
-            </a:schemeClr>
-          </a:lnRef>
-          <a:fillRef idx="1">
-            <a:schemeClr val="accent1"/>
-          </a:fillRef>
-          <a:effectRef idx="0">
-            <a:schemeClr val="accent1"/>
-          </a:effectRef>
-          <a:fontRef idx="minor">
-            <a:schemeClr val="lt1"/>
-          </a:fontRef>
-        </p:style>
-        <p:txBody>
-          <a:bodyPr rtlCol="0" anchor="ctr"/>
-          <a:lstStyle/>
-          <a:p>
-            <a:pPr algn="ctr"/>
-            <a:endParaRPr lang="en-US"/>
-          </a:p>
-        </p:txBody>
-      </p:sp>
-      <p:sp>
-        <p:nvSpPr>
-          <p:cNvPr id="64" name="Rectangle 63">
-            <a:extLst>
-              <a:ext uri="{FF2B5EF4-FFF2-40B4-BE49-F238E27FC236}">
-                <a16:creationId xmlns:a16="http://schemas.microsoft.com/office/drawing/2014/main" id="{A7009A0A-BEF5-4EAC-AF15-E4F9F002E239}"/>
-              </a:ext>
-              <a:ext uri="{C183D7F6-B498-43B3-948B-1728B52AA6E4}">
-                <adec:decorative xmlns:adec="http://schemas.microsoft.com/office/drawing/2017/decorative" val="1"/>
-              </a:ext>
-            </a:extLst>
-          </p:cNvPr>
-          <p:cNvSpPr>
-            <a:spLocks noGrp="1" noRot="1" noChangeAspect="1" noMove="1" noResize="1" noEditPoints="1" noAdjustHandles="1" noChangeArrowheads="1" noChangeShapeType="1" noTextEdit="1"/>
-          </p:cNvSpPr>
-          <p:nvPr>
-            <p:extLst>
-              <p:ext uri="{386F3935-93C4-4BCD-93E2-E3B085C9AB24}">
-                <p16:designElem xmlns:p16="http://schemas.microsoft.com/office/powerpoint/2015/main" val="1"/>
-              </p:ext>
-            </p:extLst>
-          </p:nvPr>
-        </p:nvSpPr>
-        <p:spPr>
-          <a:xfrm flipH="1">
-            <a:off x="-3" y="-1"/>
-            <a:ext cx="12192002" cy="1574311"/>
-          </a:xfrm>
-          <a:prstGeom prst="rect">
-            <a:avLst/>
-          </a:prstGeom>
-          <a:gradFill>
-            <a:gsLst>
-              <a:gs pos="0">
-                <a:srgbClr val="000000">
-                  <a:alpha val="63000"/>
-                </a:srgbClr>
-              </a:gs>
-              <a:gs pos="78000">
-                <a:schemeClr val="accent1">
-                  <a:alpha val="15000"/>
-                </a:schemeClr>
-              </a:gs>
-            </a:gsLst>
-            <a:lin ang="15600000" scaled="0"/>
-          </a:gradFill>
-          <a:ln>
-            <a:noFill/>
-          </a:ln>
-        </p:spPr>
-        <p:style>
-          <a:lnRef idx="2">
-            <a:schemeClr val="accent1">
-              <a:shade val="50000"/>
-            </a:schemeClr>
-          </a:lnRef>
-          <a:fillRef idx="1">
-            <a:schemeClr val="accent1"/>
-          </a:fillRef>
-          <a:effectRef idx="0">
-            <a:schemeClr val="accent1"/>
-          </a:effectRef>
-          <a:fontRef idx="minor">
-            <a:schemeClr val="lt1"/>
-          </a:fontRef>
-        </p:style>
-        <p:txBody>
-          <a:bodyPr rtlCol="0" anchor="ctr"/>
-          <a:lstStyle/>
-          <a:p>
-            <a:pPr algn="ctr"/>
-            <a:endParaRPr lang="en-US"/>
-          </a:p>
-        </p:txBody>
-      </p:sp>
-      <p:sp>
-        <p:nvSpPr>
-          <p:cNvPr id="2" name="Cím 1">
-            <a:extLst>
-              <a:ext uri="{FF2B5EF4-FFF2-40B4-BE49-F238E27FC236}">
-                <a16:creationId xmlns:a16="http://schemas.microsoft.com/office/drawing/2014/main" id="{8B2B2B67-28F0-37FE-2057-D1840D3F047B}"/>
-              </a:ext>
-            </a:extLst>
-          </p:cNvPr>
-          <p:cNvSpPr>
-            <a:spLocks noGrp="1"/>
-          </p:cNvSpPr>
-          <p:nvPr>
-            <p:ph type="title"/>
-          </p:nvPr>
-        </p:nvSpPr>
-        <p:spPr>
-          <a:xfrm>
-            <a:off x="699713" y="248038"/>
-            <a:ext cx="7063721" cy="1159200"/>
-          </a:xfrm>
-        </p:spPr>
-        <p:txBody>
-          <a:bodyPr vert="horz" lIns="91440" tIns="45720" rIns="91440" bIns="45720" rtlCol="0" anchor="ctr">
-            <a:normAutofit/>
-          </a:bodyPr>
-          <a:lstStyle/>
-          <a:p>
-            <a:r>
-              <a:rPr lang="en-US" sz="4000" kern="1200" dirty="0">
-                <a:solidFill>
-                  <a:srgbClr val="FFFFFF"/>
-                </a:solidFill>
-                <a:latin typeface="+mj-lt"/>
-                <a:ea typeface="+mj-ea"/>
-                <a:cs typeface="+mj-cs"/>
-              </a:rPr>
-              <a:t>Forum </a:t>
-            </a:r>
-            <a:r>
-              <a:rPr lang="en-US" sz="4000" kern="1200" dirty="0" err="1">
-                <a:solidFill>
-                  <a:srgbClr val="FFFFFF"/>
-                </a:solidFill>
-                <a:latin typeface="+mj-lt"/>
-                <a:ea typeface="+mj-ea"/>
-                <a:cs typeface="+mj-cs"/>
-              </a:rPr>
-              <a:t>oldal</a:t>
-            </a:r>
-            <a:endParaRPr lang="en-US" sz="4000" kern="1200" dirty="0">
-              <a:solidFill>
-                <a:srgbClr val="FFFFFF"/>
-              </a:solidFill>
-              <a:latin typeface="+mj-lt"/>
-              <a:ea typeface="+mj-ea"/>
-              <a:cs typeface="+mj-cs"/>
-            </a:endParaRPr>
-          </a:p>
-        </p:txBody>
-      </p:sp>
-      <p:pic>
-        <p:nvPicPr>
-          <p:cNvPr id="5" name="Tartalom helye 4">
-            <a:extLst>
-              <a:ext uri="{FF2B5EF4-FFF2-40B4-BE49-F238E27FC236}">
-                <a16:creationId xmlns:a16="http://schemas.microsoft.com/office/drawing/2014/main" id="{54793E8E-6F5A-58AA-4569-DF3915B256B3}"/>
-              </a:ext>
-            </a:extLst>
-          </p:cNvPr>
-          <p:cNvPicPr>
-            <a:picLocks noGrp="1" noChangeAspect="1"/>
-          </p:cNvPicPr>
-          <p:nvPr>
-            <p:ph idx="1"/>
-          </p:nvPr>
-        </p:nvPicPr>
-        <p:blipFill>
-          <a:blip r:embed="rId3">
-            <a:extLst>
-              <a:ext uri="{28A0092B-C50C-407E-A947-70E740481C1C}">
-                <a14:useLocalDpi xmlns:a14="http://schemas.microsoft.com/office/drawing/2010/main" val="0"/>
-              </a:ext>
-            </a:extLst>
-          </a:blip>
-          <a:stretch>
-            <a:fillRect/>
-          </a:stretch>
-        </p:blipFill>
-        <p:spPr>
-          <a:xfrm>
-            <a:off x="1562115" y="1655276"/>
-            <a:ext cx="8905752" cy="4274760"/>
-          </a:xfrm>
-          <a:prstGeom prst="rect">
-            <a:avLst/>
-          </a:prstGeom>
-        </p:spPr>
-      </p:pic>
-      <p:pic>
-        <p:nvPicPr>
-          <p:cNvPr id="6" name="Picture 2" descr="Budapesti Gazdasági Szakképzési Centrum Pestszentlőrinci Technikum | EDIR">
-            <a:extLst>
-              <a:ext uri="{FF2B5EF4-FFF2-40B4-BE49-F238E27FC236}">
-                <a16:creationId xmlns:a16="http://schemas.microsoft.com/office/drawing/2014/main" id="{4B163A24-18C7-F6AE-48E6-668EDB9E345C}"/>
-              </a:ext>
-            </a:extLst>
-          </p:cNvPr>
-          <p:cNvPicPr>
-            <a:picLocks noChangeAspect="1" noChangeArrowheads="1"/>
-          </p:cNvPicPr>
-          <p:nvPr/>
-        </p:nvPicPr>
-        <p:blipFill>
-          <a:blip r:embed="rId4">
-            <a:extLst>
-              <a:ext uri="{28A0092B-C50C-407E-A947-70E740481C1C}">
-                <a14:useLocalDpi xmlns:a14="http://schemas.microsoft.com/office/drawing/2010/main" val="0"/>
-              </a:ext>
-            </a:extLst>
-          </a:blip>
-          <a:srcRect/>
-          <a:stretch>
-            <a:fillRect/>
-          </a:stretch>
-        </p:blipFill>
-        <p:spPr bwMode="auto">
-          <a:xfrm>
-            <a:off x="10390790" y="5633545"/>
-            <a:ext cx="1721166" cy="1129863"/>
-          </a:xfrm>
-          <a:prstGeom prst="rect">
-            <a:avLst/>
-          </a:prstGeom>
-          <a:noFill/>
-          <a:extLst>
-            <a:ext uri="{909E8E84-426E-40DD-AFC4-6F175D3DCCD1}">
-              <a14:hiddenFill xmlns:a14="http://schemas.microsoft.com/office/drawing/2010/main">
-                <a:solidFill>
-                  <a:srgbClr val="FFFFFF"/>
-                </a:solidFill>
-              </a14:hiddenFill>
-            </a:ext>
-          </a:extLst>
-        </p:spPr>
-      </p:pic>
-      <p:pic>
-        <p:nvPicPr>
-          <p:cNvPr id="7" name="Kép 6">
-            <a:extLst>
-              <a:ext uri="{FF2B5EF4-FFF2-40B4-BE49-F238E27FC236}">
-                <a16:creationId xmlns:a16="http://schemas.microsoft.com/office/drawing/2014/main" id="{91F867D3-CD47-B126-C41E-A3F4E8F76678}"/>
-              </a:ext>
-            </a:extLst>
-          </p:cNvPr>
-          <p:cNvPicPr>
-            <a:picLocks noChangeAspect="1"/>
-          </p:cNvPicPr>
-          <p:nvPr/>
-        </p:nvPicPr>
-        <p:blipFill>
-          <a:blip r:embed="rId5">
-            <a:extLst>
-              <a:ext uri="{28A0092B-C50C-407E-A947-70E740481C1C}">
-                <a14:useLocalDpi xmlns:a14="http://schemas.microsoft.com/office/drawing/2010/main" val="0"/>
-              </a:ext>
-            </a:extLst>
-          </a:blip>
-          <a:stretch>
-            <a:fillRect/>
-          </a:stretch>
-        </p:blipFill>
-        <p:spPr>
-          <a:xfrm>
-            <a:off x="-30202" y="5265255"/>
-            <a:ext cx="1592317" cy="1592317"/>
-          </a:xfrm>
-          <a:prstGeom prst="rect">
-            <a:avLst/>
-          </a:prstGeom>
-        </p:spPr>
-      </p:pic>
-    </p:spTree>
-    <p:extLst>
-      <p:ext uri="{BB962C8B-B14F-4D97-AF65-F5344CB8AC3E}">
-        <p14:creationId xmlns:p14="http://schemas.microsoft.com/office/powerpoint/2010/main" val="2622115139"/>
-      </p:ext>
-    </p:extLst>
-  </p:cSld>
-  <p:clrMapOvr>
-    <a:masterClrMapping/>
-  </p:clrMapOvr>
-</p:sld>
-</file>
-
-<file path=ppt/slides/slide12.xml><?xml version="1.0" encoding="utf-8"?>
-<p:sld xmlns:a="http://schemas.openxmlformats.org/drawingml/2006/main" xmlns:r="http://schemas.openxmlformats.org/officeDocument/2006/relationships" xmlns:p="http://schemas.openxmlformats.org/presentationml/2006/main">
-  <p:cSld>
-    <p:bg>
-      <p:bgPr>
-        <a:solidFill>
-          <a:schemeClr val="bg1"/>
-        </a:solidFill>
-        <a:effectLst/>
-      </p:bgPr>
-    </p:bg>
-    <p:spTree>
-      <p:nvGrpSpPr>
-        <p:cNvPr id="1" name=""/>
-        <p:cNvGrpSpPr/>
-        <p:nvPr/>
-      </p:nvGrpSpPr>
-      <p:grpSpPr>
-        <a:xfrm>
-          <a:off x="0" y="0"/>
-          <a:ext cx="0" cy="0"/>
-          <a:chOff x="0" y="0"/>
-          <a:chExt cx="0" cy="0"/>
-        </a:xfrm>
-      </p:grpSpPr>
-      <p:sp useBgFill="1">
-        <p:nvSpPr>
           <p:cNvPr id="8" name="Rectangle 7">
             <a:extLst>
               <a:ext uri="{FF2B5EF4-FFF2-40B4-BE49-F238E27FC236}">
@@ -36136,7 +35330,7 @@
 </p:sld>
 </file>
 
-<file path=ppt/slides/slide13.xml><?xml version="1.0" encoding="utf-8"?>
+<file path=ppt/slides/slide12.xml><?xml version="1.0" encoding="utf-8"?>
 <p:sld xmlns:a="http://schemas.openxmlformats.org/drawingml/2006/main" xmlns:r="http://schemas.openxmlformats.org/officeDocument/2006/relationships" xmlns:p="http://schemas.openxmlformats.org/presentationml/2006/main">
   <p:cSld>
     <p:bg>
@@ -36782,7 +35976,7 @@
 </p:sld>
 </file>
 
-<file path=ppt/slides/slide14.xml><?xml version="1.0" encoding="utf-8"?>
+<file path=ppt/slides/slide13.xml><?xml version="1.0" encoding="utf-8"?>
 <p:sld xmlns:a="http://schemas.openxmlformats.org/drawingml/2006/main" xmlns:r="http://schemas.openxmlformats.org/officeDocument/2006/relationships" xmlns:p="http://schemas.openxmlformats.org/presentationml/2006/main">
   <p:cSld>
     <p:bg>
@@ -37520,7 +36714,7 @@
 </p:sld>
 </file>
 
-<file path=ppt/slides/slide15.xml><?xml version="1.0" encoding="utf-8"?>
+<file path=ppt/slides/slide14.xml><?xml version="1.0" encoding="utf-8"?>
 <p:sld xmlns:a="http://schemas.openxmlformats.org/drawingml/2006/main" xmlns:r="http://schemas.openxmlformats.org/officeDocument/2006/relationships" xmlns:p="http://schemas.openxmlformats.org/presentationml/2006/main">
   <p:cSld>
     <p:bg>
@@ -38092,7 +37286,7 @@
 </p:sld>
 </file>
 
-<file path=ppt/slides/slide16.xml><?xml version="1.0" encoding="utf-8"?>
+<file path=ppt/slides/slide15.xml><?xml version="1.0" encoding="utf-8"?>
 <p:sld xmlns:a="http://schemas.openxmlformats.org/drawingml/2006/main" xmlns:r="http://schemas.openxmlformats.org/officeDocument/2006/relationships" xmlns:p="http://schemas.openxmlformats.org/presentationml/2006/main">
   <p:cSld>
     <p:bg>
@@ -38855,7 +38049,7 @@
 </p:sld>
 </file>
 
-<file path=ppt/slides/slide17.xml><?xml version="1.0" encoding="utf-8"?>
+<file path=ppt/slides/slide16.xml><?xml version="1.0" encoding="utf-8"?>
 <p:sld xmlns:a="http://schemas.openxmlformats.org/drawingml/2006/main" xmlns:r="http://schemas.openxmlformats.org/officeDocument/2006/relationships" xmlns:p="http://schemas.openxmlformats.org/presentationml/2006/main">
   <p:cSld>
     <p:bg>
@@ -39669,7 +38863,7 @@
 </p:sld>
 </file>
 
-<file path=ppt/slides/slide18.xml><?xml version="1.0" encoding="utf-8"?>
+<file path=ppt/slides/slide17.xml><?xml version="1.0" encoding="utf-8"?>
 <p:sld xmlns:a="http://schemas.openxmlformats.org/drawingml/2006/main" xmlns:r="http://schemas.openxmlformats.org/officeDocument/2006/relationships" xmlns:p="http://schemas.openxmlformats.org/presentationml/2006/main">
   <p:cSld>
     <p:bg>
@@ -40335,7 +39529,7 @@
 </p:sld>
 </file>
 
-<file path=ppt/slides/slide19.xml><?xml version="1.0" encoding="utf-8"?>
+<file path=ppt/slides/slide18.xml><?xml version="1.0" encoding="utf-8"?>
 <p:sld xmlns:a="http://schemas.openxmlformats.org/drawingml/2006/main" xmlns:r="http://schemas.openxmlformats.org/officeDocument/2006/relationships" xmlns:p="http://schemas.openxmlformats.org/presentationml/2006/main">
   <p:cSld>
     <p:bg>
@@ -40994,6 +40188,309 @@
     <p:extLst>
       <p:ext uri="{BB962C8B-B14F-4D97-AF65-F5344CB8AC3E}">
         <p14:creationId xmlns:p14="http://schemas.microsoft.com/office/powerpoint/2010/main" val="3630747796"/>
+      </p:ext>
+    </p:extLst>
+  </p:cSld>
+  <p:clrMapOvr>
+    <a:masterClrMapping/>
+  </p:clrMapOvr>
+</p:sld>
+</file>
+
+<file path=ppt/slides/slide19.xml><?xml version="1.0" encoding="utf-8"?>
+<p:sld xmlns:a="http://schemas.openxmlformats.org/drawingml/2006/main" xmlns:r="http://schemas.openxmlformats.org/officeDocument/2006/relationships" xmlns:p="http://schemas.openxmlformats.org/presentationml/2006/main">
+  <p:cSld>
+    <p:bg>
+      <p:bgPr>
+        <a:solidFill>
+          <a:schemeClr val="bg1"/>
+        </a:solidFill>
+        <a:effectLst/>
+      </p:bgPr>
+    </p:bg>
+    <p:spTree>
+      <p:nvGrpSpPr>
+        <p:cNvPr id="1" name=""/>
+        <p:cNvGrpSpPr/>
+        <p:nvPr/>
+      </p:nvGrpSpPr>
+      <p:grpSpPr>
+        <a:xfrm>
+          <a:off x="0" y="0"/>
+          <a:ext cx="0" cy="0"/>
+          <a:chOff x="0" y="0"/>
+          <a:chExt cx="0" cy="0"/>
+        </a:xfrm>
+      </p:grpSpPr>
+      <p:pic>
+        <p:nvPicPr>
+          <p:cNvPr id="7" name="Picture 6">
+            <a:extLst>
+              <a:ext uri="{FF2B5EF4-FFF2-40B4-BE49-F238E27FC236}">
+                <a16:creationId xmlns:a16="http://schemas.microsoft.com/office/drawing/2014/main" id="{A53DE34D-54B9-0F0E-CFF6-62AB7BA0F1F9}"/>
+              </a:ext>
+            </a:extLst>
+          </p:cNvPr>
+          <p:cNvPicPr>
+            <a:picLocks noChangeAspect="1"/>
+          </p:cNvPicPr>
+          <p:nvPr/>
+        </p:nvPicPr>
+        <p:blipFill>
+          <a:blip r:embed="rId3">
+            <a:duotone>
+              <a:schemeClr val="bg2">
+                <a:shade val="45000"/>
+                <a:satMod val="135000"/>
+              </a:schemeClr>
+              <a:prstClr val="white"/>
+            </a:duotone>
+          </a:blip>
+          <a:srcRect t="5055" b="10675"/>
+          <a:stretch>
+            <a:fillRect/>
+          </a:stretch>
+        </p:blipFill>
+        <p:spPr>
+          <a:xfrm>
+            <a:off x="20" y="10"/>
+            <a:ext cx="12191980" cy="6857990"/>
+          </a:xfrm>
+          <a:prstGeom prst="rect">
+            <a:avLst/>
+          </a:prstGeom>
+        </p:spPr>
+      </p:pic>
+      <p:sp>
+        <p:nvSpPr>
+          <p:cNvPr id="11" name="Rectangle 10">
+            <a:extLst>
+              <a:ext uri="{FF2B5EF4-FFF2-40B4-BE49-F238E27FC236}">
+                <a16:creationId xmlns:a16="http://schemas.microsoft.com/office/drawing/2014/main" id="{B50AB553-2A96-4A92-96F2-93548E096954}"/>
+              </a:ext>
+              <a:ext uri="{C183D7F6-B498-43B3-948B-1728B52AA6E4}">
+                <adec:decorative xmlns:adec="http://schemas.microsoft.com/office/drawing/2017/decorative" val="1"/>
+              </a:ext>
+            </a:extLst>
+          </p:cNvPr>
+          <p:cNvSpPr>
+            <a:spLocks noGrp="1" noRot="1" noChangeAspect="1" noMove="1" noResize="1" noEditPoints="1" noAdjustHandles="1" noChangeArrowheads="1" noChangeShapeType="1" noTextEdit="1"/>
+          </p:cNvSpPr>
+          <p:nvPr>
+            <p:extLst>
+              <p:ext uri="{386F3935-93C4-4BCD-93E2-E3B085C9AB24}">
+                <p16:designElem xmlns:p16="http://schemas.microsoft.com/office/powerpoint/2015/main" val="1"/>
+              </p:ext>
+            </p:extLst>
+          </p:nvPr>
+        </p:nvSpPr>
+        <p:spPr>
+          <a:xfrm>
+            <a:off x="0" y="0"/>
+            <a:ext cx="12192000" cy="6858000"/>
+          </a:xfrm>
+          <a:prstGeom prst="rect">
+            <a:avLst/>
+          </a:prstGeom>
+          <a:gradFill>
+            <a:gsLst>
+              <a:gs pos="10000">
+                <a:schemeClr val="bg2">
+                  <a:alpha val="68000"/>
+                </a:schemeClr>
+              </a:gs>
+              <a:gs pos="85000">
+                <a:schemeClr val="bg2">
+                  <a:alpha val="97000"/>
+                </a:schemeClr>
+              </a:gs>
+            </a:gsLst>
+            <a:path path="circle">
+              <a:fillToRect l="50000" t="50000" r="50000" b="50000"/>
+            </a:path>
+          </a:gradFill>
+          <a:ln>
+            <a:noFill/>
+          </a:ln>
+        </p:spPr>
+        <p:style>
+          <a:lnRef idx="2">
+            <a:schemeClr val="accent1">
+              <a:shade val="50000"/>
+            </a:schemeClr>
+          </a:lnRef>
+          <a:fillRef idx="1">
+            <a:schemeClr val="accent1"/>
+          </a:fillRef>
+          <a:effectRef idx="0">
+            <a:schemeClr val="accent1"/>
+          </a:effectRef>
+          <a:fontRef idx="minor">
+            <a:schemeClr val="lt1"/>
+          </a:fontRef>
+        </p:style>
+        <p:txBody>
+          <a:bodyPr rtlCol="0" anchor="ctr"/>
+          <a:lstStyle/>
+          <a:p>
+            <a:pPr algn="ctr"/>
+            <a:endParaRPr lang="en-US"/>
+          </a:p>
+        </p:txBody>
+      </p:sp>
+      <p:sp>
+        <p:nvSpPr>
+          <p:cNvPr id="2" name="Cím 1">
+            <a:extLst>
+              <a:ext uri="{FF2B5EF4-FFF2-40B4-BE49-F238E27FC236}">
+                <a16:creationId xmlns:a16="http://schemas.microsoft.com/office/drawing/2014/main" id="{BF82E039-7C8F-44F2-97A1-7B28A8959866}"/>
+              </a:ext>
+            </a:extLst>
+          </p:cNvPr>
+          <p:cNvSpPr>
+            <a:spLocks noGrp="1"/>
+          </p:cNvSpPr>
+          <p:nvPr>
+            <p:ph type="title"/>
+          </p:nvPr>
+        </p:nvSpPr>
+        <p:spPr>
+          <a:xfrm>
+            <a:off x="838200" y="365125"/>
+            <a:ext cx="10515600" cy="1325563"/>
+          </a:xfrm>
+        </p:spPr>
+        <p:txBody>
+          <a:bodyPr>
+            <a:normAutofit/>
+          </a:bodyPr>
+          <a:lstStyle/>
+          <a:p>
+            <a:r>
+              <a:rPr lang="hu-HU" dirty="0"/>
+              <a:t>Összegzés és továbbfejlesztés</a:t>
+            </a:r>
+          </a:p>
+        </p:txBody>
+      </p:sp>
+      <p:graphicFrame>
+        <p:nvGraphicFramePr>
+          <p:cNvPr id="6" name="Rectangle 1">
+            <a:extLst>
+              <a:ext uri="{FF2B5EF4-FFF2-40B4-BE49-F238E27FC236}">
+                <a16:creationId xmlns:a16="http://schemas.microsoft.com/office/drawing/2014/main" id="{ED3C2EA8-9573-C5BD-2AFD-B2307349EF2A}"/>
+              </a:ext>
+            </a:extLst>
+          </p:cNvPr>
+          <p:cNvGraphicFramePr>
+            <a:graphicFrameLocks noGrp="1"/>
+          </p:cNvGraphicFramePr>
+          <p:nvPr>
+            <p:ph idx="1"/>
+            <p:extLst>
+              <p:ext uri="{D42A27DB-BD31-4B8C-83A1-F6EECF244321}">
+                <p14:modId xmlns:p14="http://schemas.microsoft.com/office/powerpoint/2010/main" val="4113088503"/>
+              </p:ext>
+            </p:extLst>
+          </p:nvPr>
+        </p:nvGraphicFramePr>
+        <p:xfrm>
+          <a:off x="838200" y="1825625"/>
+          <a:ext cx="10515600" cy="4351338"/>
+        </p:xfrm>
+        <a:graphic>
+          <a:graphicData uri="http://schemas.openxmlformats.org/drawingml/2006/diagram">
+            <dgm:relIds xmlns:dgm="http://schemas.openxmlformats.org/drawingml/2006/diagram" xmlns:r="http://schemas.openxmlformats.org/officeDocument/2006/relationships" r:dm="rId4" r:lo="rId5" r:qs="rId6" r:cs="rId7"/>
+          </a:graphicData>
+        </a:graphic>
+      </p:graphicFrame>
+      <p:pic>
+        <p:nvPicPr>
+          <p:cNvPr id="3" name="Picture 2" descr="Budapesti Gazdasági Szakképzési Centrum Pestszentlőrinci Technikum | EDIR">
+            <a:extLst>
+              <a:ext uri="{FF2B5EF4-FFF2-40B4-BE49-F238E27FC236}">
+                <a16:creationId xmlns:a16="http://schemas.microsoft.com/office/drawing/2014/main" id="{73C18238-D6FF-5E43-C49B-2C199BDA05C1}"/>
+              </a:ext>
+            </a:extLst>
+          </p:cNvPr>
+          <p:cNvPicPr>
+            <a:picLocks noChangeAspect="1" noChangeArrowheads="1"/>
+          </p:cNvPicPr>
+          <p:nvPr/>
+        </p:nvPicPr>
+        <p:blipFill>
+          <a:blip r:embed="rId9">
+            <a:extLst>
+              <a:ext uri="{28A0092B-C50C-407E-A947-70E740481C1C}">
+                <a14:useLocalDpi xmlns:a14="http://schemas.microsoft.com/office/drawing/2010/main" val="0"/>
+              </a:ext>
+            </a:extLst>
+          </a:blip>
+          <a:srcRect/>
+          <a:stretch>
+            <a:fillRect/>
+          </a:stretch>
+        </p:blipFill>
+        <p:spPr bwMode="auto">
+          <a:xfrm>
+            <a:off x="10395000" y="5587146"/>
+            <a:ext cx="1796980" cy="1179631"/>
+          </a:xfrm>
+          <a:prstGeom prst="rect">
+            <a:avLst/>
+          </a:prstGeom>
+          <a:noFill/>
+          <a:extLst>
+            <a:ext uri="{909E8E84-426E-40DD-AFC4-6F175D3DCCD1}">
+              <a14:hiddenFill xmlns:a14="http://schemas.microsoft.com/office/drawing/2010/main">
+                <a:solidFill>
+                  <a:srgbClr val="FFFFFF"/>
+                </a:solidFill>
+              </a14:hiddenFill>
+            </a:ext>
+          </a:extLst>
+        </p:spPr>
+      </p:pic>
+      <p:pic>
+        <p:nvPicPr>
+          <p:cNvPr id="8" name="Kép 7">
+            <a:extLst>
+              <a:ext uri="{FF2B5EF4-FFF2-40B4-BE49-F238E27FC236}">
+                <a16:creationId xmlns:a16="http://schemas.microsoft.com/office/drawing/2014/main" id="{6099188D-A973-3E9C-B6F4-3CC452C642B0}"/>
+              </a:ext>
+            </a:extLst>
+          </p:cNvPr>
+          <p:cNvPicPr>
+            <a:picLocks noChangeAspect="1"/>
+          </p:cNvPicPr>
+          <p:nvPr/>
+        </p:nvPicPr>
+        <p:blipFill>
+          <a:blip r:embed="rId10">
+            <a:extLst>
+              <a:ext uri="{28A0092B-C50C-407E-A947-70E740481C1C}">
+                <a14:useLocalDpi xmlns:a14="http://schemas.microsoft.com/office/drawing/2010/main" val="0"/>
+              </a:ext>
+            </a:extLst>
+          </a:blip>
+          <a:stretch>
+            <a:fillRect/>
+          </a:stretch>
+        </p:blipFill>
+        <p:spPr>
+          <a:xfrm>
+            <a:off x="-36796" y="5301976"/>
+            <a:ext cx="1749972" cy="1749972"/>
+          </a:xfrm>
+          <a:prstGeom prst="rect">
+            <a:avLst/>
+          </a:prstGeom>
+        </p:spPr>
+      </p:pic>
+    </p:spTree>
+    <p:extLst>
+      <p:ext uri="{BB962C8B-B14F-4D97-AF65-F5344CB8AC3E}">
+        <p14:creationId xmlns:p14="http://schemas.microsoft.com/office/powerpoint/2010/main" val="2063393909"/>
       </p:ext>
     </p:extLst>
   </p:cSld>
@@ -41900,309 +41397,6 @@
     <p:extLst>
       <p:ext uri="{BB962C8B-B14F-4D97-AF65-F5344CB8AC3E}">
         <p14:creationId xmlns:p14="http://schemas.microsoft.com/office/powerpoint/2010/main" val="1018540325"/>
-      </p:ext>
-    </p:extLst>
-  </p:cSld>
-  <p:clrMapOvr>
-    <a:masterClrMapping/>
-  </p:clrMapOvr>
-</p:sld>
-</file>
-
-<file path=ppt/slides/slide20.xml><?xml version="1.0" encoding="utf-8"?>
-<p:sld xmlns:a="http://schemas.openxmlformats.org/drawingml/2006/main" xmlns:r="http://schemas.openxmlformats.org/officeDocument/2006/relationships" xmlns:p="http://schemas.openxmlformats.org/presentationml/2006/main">
-  <p:cSld>
-    <p:bg>
-      <p:bgPr>
-        <a:solidFill>
-          <a:schemeClr val="bg1"/>
-        </a:solidFill>
-        <a:effectLst/>
-      </p:bgPr>
-    </p:bg>
-    <p:spTree>
-      <p:nvGrpSpPr>
-        <p:cNvPr id="1" name=""/>
-        <p:cNvGrpSpPr/>
-        <p:nvPr/>
-      </p:nvGrpSpPr>
-      <p:grpSpPr>
-        <a:xfrm>
-          <a:off x="0" y="0"/>
-          <a:ext cx="0" cy="0"/>
-          <a:chOff x="0" y="0"/>
-          <a:chExt cx="0" cy="0"/>
-        </a:xfrm>
-      </p:grpSpPr>
-      <p:pic>
-        <p:nvPicPr>
-          <p:cNvPr id="7" name="Picture 6">
-            <a:extLst>
-              <a:ext uri="{FF2B5EF4-FFF2-40B4-BE49-F238E27FC236}">
-                <a16:creationId xmlns:a16="http://schemas.microsoft.com/office/drawing/2014/main" id="{A53DE34D-54B9-0F0E-CFF6-62AB7BA0F1F9}"/>
-              </a:ext>
-            </a:extLst>
-          </p:cNvPr>
-          <p:cNvPicPr>
-            <a:picLocks noChangeAspect="1"/>
-          </p:cNvPicPr>
-          <p:nvPr/>
-        </p:nvPicPr>
-        <p:blipFill>
-          <a:blip r:embed="rId3">
-            <a:duotone>
-              <a:schemeClr val="bg2">
-                <a:shade val="45000"/>
-                <a:satMod val="135000"/>
-              </a:schemeClr>
-              <a:prstClr val="white"/>
-            </a:duotone>
-          </a:blip>
-          <a:srcRect t="5055" b="10675"/>
-          <a:stretch>
-            <a:fillRect/>
-          </a:stretch>
-        </p:blipFill>
-        <p:spPr>
-          <a:xfrm>
-            <a:off x="20" y="10"/>
-            <a:ext cx="12191980" cy="6857990"/>
-          </a:xfrm>
-          <a:prstGeom prst="rect">
-            <a:avLst/>
-          </a:prstGeom>
-        </p:spPr>
-      </p:pic>
-      <p:sp>
-        <p:nvSpPr>
-          <p:cNvPr id="11" name="Rectangle 10">
-            <a:extLst>
-              <a:ext uri="{FF2B5EF4-FFF2-40B4-BE49-F238E27FC236}">
-                <a16:creationId xmlns:a16="http://schemas.microsoft.com/office/drawing/2014/main" id="{B50AB553-2A96-4A92-96F2-93548E096954}"/>
-              </a:ext>
-              <a:ext uri="{C183D7F6-B498-43B3-948B-1728B52AA6E4}">
-                <adec:decorative xmlns:adec="http://schemas.microsoft.com/office/drawing/2017/decorative" val="1"/>
-              </a:ext>
-            </a:extLst>
-          </p:cNvPr>
-          <p:cNvSpPr>
-            <a:spLocks noGrp="1" noRot="1" noChangeAspect="1" noMove="1" noResize="1" noEditPoints="1" noAdjustHandles="1" noChangeArrowheads="1" noChangeShapeType="1" noTextEdit="1"/>
-          </p:cNvSpPr>
-          <p:nvPr>
-            <p:extLst>
-              <p:ext uri="{386F3935-93C4-4BCD-93E2-E3B085C9AB24}">
-                <p16:designElem xmlns:p16="http://schemas.microsoft.com/office/powerpoint/2015/main" val="1"/>
-              </p:ext>
-            </p:extLst>
-          </p:nvPr>
-        </p:nvSpPr>
-        <p:spPr>
-          <a:xfrm>
-            <a:off x="0" y="0"/>
-            <a:ext cx="12192000" cy="6858000"/>
-          </a:xfrm>
-          <a:prstGeom prst="rect">
-            <a:avLst/>
-          </a:prstGeom>
-          <a:gradFill>
-            <a:gsLst>
-              <a:gs pos="10000">
-                <a:schemeClr val="bg2">
-                  <a:alpha val="68000"/>
-                </a:schemeClr>
-              </a:gs>
-              <a:gs pos="85000">
-                <a:schemeClr val="bg2">
-                  <a:alpha val="97000"/>
-                </a:schemeClr>
-              </a:gs>
-            </a:gsLst>
-            <a:path path="circle">
-              <a:fillToRect l="50000" t="50000" r="50000" b="50000"/>
-            </a:path>
-          </a:gradFill>
-          <a:ln>
-            <a:noFill/>
-          </a:ln>
-        </p:spPr>
-        <p:style>
-          <a:lnRef idx="2">
-            <a:schemeClr val="accent1">
-              <a:shade val="50000"/>
-            </a:schemeClr>
-          </a:lnRef>
-          <a:fillRef idx="1">
-            <a:schemeClr val="accent1"/>
-          </a:fillRef>
-          <a:effectRef idx="0">
-            <a:schemeClr val="accent1"/>
-          </a:effectRef>
-          <a:fontRef idx="minor">
-            <a:schemeClr val="lt1"/>
-          </a:fontRef>
-        </p:style>
-        <p:txBody>
-          <a:bodyPr rtlCol="0" anchor="ctr"/>
-          <a:lstStyle/>
-          <a:p>
-            <a:pPr algn="ctr"/>
-            <a:endParaRPr lang="en-US"/>
-          </a:p>
-        </p:txBody>
-      </p:sp>
-      <p:sp>
-        <p:nvSpPr>
-          <p:cNvPr id="2" name="Cím 1">
-            <a:extLst>
-              <a:ext uri="{FF2B5EF4-FFF2-40B4-BE49-F238E27FC236}">
-                <a16:creationId xmlns:a16="http://schemas.microsoft.com/office/drawing/2014/main" id="{BF82E039-7C8F-44F2-97A1-7B28A8959866}"/>
-              </a:ext>
-            </a:extLst>
-          </p:cNvPr>
-          <p:cNvSpPr>
-            <a:spLocks noGrp="1"/>
-          </p:cNvSpPr>
-          <p:nvPr>
-            <p:ph type="title"/>
-          </p:nvPr>
-        </p:nvSpPr>
-        <p:spPr>
-          <a:xfrm>
-            <a:off x="838200" y="365125"/>
-            <a:ext cx="10515600" cy="1325563"/>
-          </a:xfrm>
-        </p:spPr>
-        <p:txBody>
-          <a:bodyPr>
-            <a:normAutofit/>
-          </a:bodyPr>
-          <a:lstStyle/>
-          <a:p>
-            <a:r>
-              <a:rPr lang="hu-HU" dirty="0"/>
-              <a:t>Összegzés és továbbfejlesztés</a:t>
-            </a:r>
-          </a:p>
-        </p:txBody>
-      </p:sp>
-      <p:graphicFrame>
-        <p:nvGraphicFramePr>
-          <p:cNvPr id="6" name="Rectangle 1">
-            <a:extLst>
-              <a:ext uri="{FF2B5EF4-FFF2-40B4-BE49-F238E27FC236}">
-                <a16:creationId xmlns:a16="http://schemas.microsoft.com/office/drawing/2014/main" id="{ED3C2EA8-9573-C5BD-2AFD-B2307349EF2A}"/>
-              </a:ext>
-            </a:extLst>
-          </p:cNvPr>
-          <p:cNvGraphicFramePr>
-            <a:graphicFrameLocks noGrp="1"/>
-          </p:cNvGraphicFramePr>
-          <p:nvPr>
-            <p:ph idx="1"/>
-            <p:extLst>
-              <p:ext uri="{D42A27DB-BD31-4B8C-83A1-F6EECF244321}">
-                <p14:modId xmlns:p14="http://schemas.microsoft.com/office/powerpoint/2010/main" val="4113088503"/>
-              </p:ext>
-            </p:extLst>
-          </p:nvPr>
-        </p:nvGraphicFramePr>
-        <p:xfrm>
-          <a:off x="838200" y="1825625"/>
-          <a:ext cx="10515600" cy="4351338"/>
-        </p:xfrm>
-        <a:graphic>
-          <a:graphicData uri="http://schemas.openxmlformats.org/drawingml/2006/diagram">
-            <dgm:relIds xmlns:dgm="http://schemas.openxmlformats.org/drawingml/2006/diagram" xmlns:r="http://schemas.openxmlformats.org/officeDocument/2006/relationships" r:dm="rId4" r:lo="rId5" r:qs="rId6" r:cs="rId7"/>
-          </a:graphicData>
-        </a:graphic>
-      </p:graphicFrame>
-      <p:pic>
-        <p:nvPicPr>
-          <p:cNvPr id="3" name="Picture 2" descr="Budapesti Gazdasági Szakképzési Centrum Pestszentlőrinci Technikum | EDIR">
-            <a:extLst>
-              <a:ext uri="{FF2B5EF4-FFF2-40B4-BE49-F238E27FC236}">
-                <a16:creationId xmlns:a16="http://schemas.microsoft.com/office/drawing/2014/main" id="{73C18238-D6FF-5E43-C49B-2C199BDA05C1}"/>
-              </a:ext>
-            </a:extLst>
-          </p:cNvPr>
-          <p:cNvPicPr>
-            <a:picLocks noChangeAspect="1" noChangeArrowheads="1"/>
-          </p:cNvPicPr>
-          <p:nvPr/>
-        </p:nvPicPr>
-        <p:blipFill>
-          <a:blip r:embed="rId9">
-            <a:extLst>
-              <a:ext uri="{28A0092B-C50C-407E-A947-70E740481C1C}">
-                <a14:useLocalDpi xmlns:a14="http://schemas.microsoft.com/office/drawing/2010/main" val="0"/>
-              </a:ext>
-            </a:extLst>
-          </a:blip>
-          <a:srcRect/>
-          <a:stretch>
-            <a:fillRect/>
-          </a:stretch>
-        </p:blipFill>
-        <p:spPr bwMode="auto">
-          <a:xfrm>
-            <a:off x="10395000" y="5587146"/>
-            <a:ext cx="1796980" cy="1179631"/>
-          </a:xfrm>
-          <a:prstGeom prst="rect">
-            <a:avLst/>
-          </a:prstGeom>
-          <a:noFill/>
-          <a:extLst>
-            <a:ext uri="{909E8E84-426E-40DD-AFC4-6F175D3DCCD1}">
-              <a14:hiddenFill xmlns:a14="http://schemas.microsoft.com/office/drawing/2010/main">
-                <a:solidFill>
-                  <a:srgbClr val="FFFFFF"/>
-                </a:solidFill>
-              </a14:hiddenFill>
-            </a:ext>
-          </a:extLst>
-        </p:spPr>
-      </p:pic>
-      <p:pic>
-        <p:nvPicPr>
-          <p:cNvPr id="8" name="Kép 7">
-            <a:extLst>
-              <a:ext uri="{FF2B5EF4-FFF2-40B4-BE49-F238E27FC236}">
-                <a16:creationId xmlns:a16="http://schemas.microsoft.com/office/drawing/2014/main" id="{6099188D-A973-3E9C-B6F4-3CC452C642B0}"/>
-              </a:ext>
-            </a:extLst>
-          </p:cNvPr>
-          <p:cNvPicPr>
-            <a:picLocks noChangeAspect="1"/>
-          </p:cNvPicPr>
-          <p:nvPr/>
-        </p:nvPicPr>
-        <p:blipFill>
-          <a:blip r:embed="rId10">
-            <a:extLst>
-              <a:ext uri="{28A0092B-C50C-407E-A947-70E740481C1C}">
-                <a14:useLocalDpi xmlns:a14="http://schemas.microsoft.com/office/drawing/2010/main" val="0"/>
-              </a:ext>
-            </a:extLst>
-          </a:blip>
-          <a:stretch>
-            <a:fillRect/>
-          </a:stretch>
-        </p:blipFill>
-        <p:spPr>
-          <a:xfrm>
-            <a:off x="-36796" y="5301976"/>
-            <a:ext cx="1749972" cy="1749972"/>
-          </a:xfrm>
-          <a:prstGeom prst="rect">
-            <a:avLst/>
-          </a:prstGeom>
-        </p:spPr>
-      </p:pic>
-    </p:spTree>
-    <p:extLst>
-      <p:ext uri="{BB962C8B-B14F-4D97-AF65-F5344CB8AC3E}">
-        <p14:creationId xmlns:p14="http://schemas.microsoft.com/office/powerpoint/2010/main" val="2063393909"/>
       </p:ext>
     </p:extLst>
   </p:cSld>

--- a/MakettMester.pptx
+++ b/MakettMester.pptx
@@ -5,7 +5,7 @@
     <p:sldMasterId id="2147483648" r:id="rId1"/>
   </p:sldMasterIdLst>
   <p:notesMasterIdLst>
-    <p:notesMasterId r:id="rId21"/>
+    <p:notesMasterId r:id="rId22"/>
   </p:notesMasterIdLst>
   <p:sldIdLst>
     <p:sldId id="256" r:id="rId2"/>
@@ -25,8 +25,9 @@
     <p:sldId id="283" r:id="rId16"/>
     <p:sldId id="260" r:id="rId17"/>
     <p:sldId id="261" r:id="rId18"/>
-    <p:sldId id="263" r:id="rId19"/>
-    <p:sldId id="273" r:id="rId20"/>
+    <p:sldId id="285" r:id="rId19"/>
+    <p:sldId id="263" r:id="rId20"/>
+    <p:sldId id="273" r:id="rId21"/>
   </p:sldIdLst>
   <p:sldSz cx="12192000" cy="6858000"/>
   <p:notesSz cx="6858000" cy="9144000"/>
@@ -27843,7 +27844,7 @@
           <a:p>
             <a:fld id="{3F4F195F-7F2C-40F3-B247-AEA4312FB65B}" type="datetimeFigureOut">
               <a:rPr lang="hu-HU" smtClean="0"/>
-              <a:t>2026. 05. 29.</a:t>
+              <a:t>2026. 05. 30.</a:t>
             </a:fld>
             <a:endParaRPr lang="hu-HU"/>
           </a:p>
@@ -29174,17 +29175,283 @@
           <a:bodyPr/>
           <a:lstStyle/>
           <a:p>
+            <a:pPr marL="0" marR="0" lvl="0" indent="0" algn="l" defTabSz="914400" rtl="0" eaLnBrk="1" fontAlgn="auto" latinLnBrk="0" hangingPunct="1">
+              <a:lnSpc>
+                <a:spcPct val="100000"/>
+              </a:lnSpc>
+              <a:spcBef>
+                <a:spcPts val="0"/>
+              </a:spcBef>
+              <a:spcAft>
+                <a:spcPts val="0"/>
+              </a:spcAft>
+              <a:buClrTx/>
+              <a:buSzTx/>
+              <a:buFontTx/>
+              <a:buNone/>
+              <a:tabLst/>
+              <a:defRPr/>
+            </a:pPr>
             <a:r>
               <a:rPr lang="hu-HU" dirty="0"/>
-              <a:t>A legfontosabb táblák a felhasználók, a makettek és a vélemények táblái. Emellett külön táblát kapott a kedvencek funkció, a fórum témái és hozzászólásai, az építési napló, valamint az építési tippek naplója és annak blokkjai. Van külön üzenetek tábla a kapcsolatfelvételhez, illetve aktivitásnapló is, amely az </a:t>
+              <a:t>Fontosabb táblák:</a:t>
             </a:r>
-            <a:r>
-              <a:rPr lang="hu-HU" dirty="0" err="1"/>
-              <a:t>admin</a:t>
-            </a:r>
+          </a:p>
+          <a:p>
+            <a:pPr marL="0" marR="0" lvl="0" indent="0" algn="l" defTabSz="914400" rtl="0" eaLnBrk="1" fontAlgn="auto" latinLnBrk="0" hangingPunct="1">
+              <a:lnSpc>
+                <a:spcPct val="100000"/>
+              </a:lnSpc>
+              <a:spcBef>
+                <a:spcPts val="0"/>
+              </a:spcBef>
+              <a:spcAft>
+                <a:spcPts val="0"/>
+              </a:spcAft>
+              <a:buClrTx/>
+              <a:buSzTx/>
+              <a:buFontTx/>
+              <a:buNone/>
+              <a:tabLst/>
+              <a:defRPr/>
+            </a:pPr>
             <a:r>
               <a:rPr lang="hu-HU" dirty="0"/>
-              <a:t> műveletek és más események követését segíti.</a:t>
+              <a:t>-felhasználók</a:t>
+            </a:r>
+          </a:p>
+          <a:p>
+            <a:pPr marL="0" marR="0" lvl="0" indent="0" algn="l" defTabSz="914400" rtl="0" eaLnBrk="1" fontAlgn="auto" latinLnBrk="0" hangingPunct="1">
+              <a:lnSpc>
+                <a:spcPct val="100000"/>
+              </a:lnSpc>
+              <a:spcBef>
+                <a:spcPts val="0"/>
+              </a:spcBef>
+              <a:spcAft>
+                <a:spcPts val="0"/>
+              </a:spcAft>
+              <a:buClrTx/>
+              <a:buSzTx/>
+              <a:buFontTx/>
+              <a:buNone/>
+              <a:tabLst/>
+              <a:defRPr/>
+            </a:pPr>
+            <a:r>
+              <a:rPr lang="hu-HU" dirty="0"/>
+              <a:t>-makettek</a:t>
+            </a:r>
+          </a:p>
+          <a:p>
+            <a:pPr marL="0" marR="0" lvl="0" indent="0" algn="l" defTabSz="914400" rtl="0" eaLnBrk="1" fontAlgn="auto" latinLnBrk="0" hangingPunct="1">
+              <a:lnSpc>
+                <a:spcPct val="100000"/>
+              </a:lnSpc>
+              <a:spcBef>
+                <a:spcPts val="0"/>
+              </a:spcBef>
+              <a:spcAft>
+                <a:spcPts val="0"/>
+              </a:spcAft>
+              <a:buClrTx/>
+              <a:buSzTx/>
+              <a:buFontTx/>
+              <a:buNone/>
+              <a:tabLst/>
+              <a:defRPr/>
+            </a:pPr>
+            <a:r>
+              <a:rPr lang="hu-HU" dirty="0"/>
+              <a:t>-vélemények</a:t>
+            </a:r>
+            <a:br>
+              <a:rPr lang="hu-HU" dirty="0"/>
+            </a:br>
+            <a:endParaRPr lang="hu-HU" dirty="0"/>
+          </a:p>
+          <a:p>
+            <a:pPr marL="0" marR="0" lvl="0" indent="0" algn="l" defTabSz="914400" rtl="0" eaLnBrk="1" fontAlgn="auto" latinLnBrk="0" hangingPunct="1">
+              <a:lnSpc>
+                <a:spcPct val="100000"/>
+              </a:lnSpc>
+              <a:spcBef>
+                <a:spcPts val="0"/>
+              </a:spcBef>
+              <a:spcAft>
+                <a:spcPts val="0"/>
+              </a:spcAft>
+              <a:buClrTx/>
+              <a:buSzTx/>
+              <a:buFontTx/>
+              <a:buNone/>
+              <a:tabLst/>
+              <a:defRPr/>
+            </a:pPr>
+            <a:r>
+              <a:rPr lang="hu-HU" dirty="0"/>
+              <a:t>Más fontoságu táblák:</a:t>
+            </a:r>
+          </a:p>
+          <a:p>
+            <a:pPr marL="0" marR="0" lvl="0" indent="0" algn="l" defTabSz="914400" rtl="0" eaLnBrk="1" fontAlgn="auto" latinLnBrk="0" hangingPunct="1">
+              <a:lnSpc>
+                <a:spcPct val="100000"/>
+              </a:lnSpc>
+              <a:spcBef>
+                <a:spcPts val="0"/>
+              </a:spcBef>
+              <a:spcAft>
+                <a:spcPts val="0"/>
+              </a:spcAft>
+              <a:buClrTx/>
+              <a:buSzTx/>
+              <a:buFontTx/>
+              <a:buNone/>
+              <a:tabLst/>
+              <a:defRPr/>
+            </a:pPr>
+            <a:r>
+              <a:rPr lang="hu-HU" dirty="0"/>
+              <a:t>-kedvencek </a:t>
+            </a:r>
+          </a:p>
+          <a:p>
+            <a:pPr marL="0" marR="0" lvl="0" indent="0" algn="l" defTabSz="914400" rtl="0" eaLnBrk="1" fontAlgn="auto" latinLnBrk="0" hangingPunct="1">
+              <a:lnSpc>
+                <a:spcPct val="100000"/>
+              </a:lnSpc>
+              <a:spcBef>
+                <a:spcPts val="0"/>
+              </a:spcBef>
+              <a:spcAft>
+                <a:spcPts val="0"/>
+              </a:spcAft>
+              <a:buClrTx/>
+              <a:buSzTx/>
+              <a:buFontTx/>
+              <a:buNone/>
+              <a:tabLst/>
+              <a:defRPr/>
+            </a:pPr>
+            <a:r>
+              <a:rPr lang="hu-HU" dirty="0"/>
+              <a:t>-fórum és hozzászólás táblák</a:t>
+            </a:r>
+          </a:p>
+          <a:p>
+            <a:pPr marL="0" marR="0" lvl="0" indent="0" algn="l" defTabSz="914400" rtl="0" eaLnBrk="1" fontAlgn="auto" latinLnBrk="0" hangingPunct="1">
+              <a:lnSpc>
+                <a:spcPct val="100000"/>
+              </a:lnSpc>
+              <a:spcBef>
+                <a:spcPts val="0"/>
+              </a:spcBef>
+              <a:spcAft>
+                <a:spcPts val="0"/>
+              </a:spcAft>
+              <a:buClrTx/>
+              <a:buSzTx/>
+              <a:buFontTx/>
+              <a:buNone/>
+              <a:tabLst/>
+              <a:defRPr/>
+            </a:pPr>
+            <a:r>
+              <a:rPr lang="hu-HU" dirty="0"/>
+              <a:t>-ai</a:t>
+            </a:r>
+          </a:p>
+          <a:p>
+            <a:pPr marL="0" marR="0" lvl="0" indent="0" algn="l" defTabSz="914400" rtl="0" eaLnBrk="1" fontAlgn="auto" latinLnBrk="0" hangingPunct="1">
+              <a:lnSpc>
+                <a:spcPct val="100000"/>
+              </a:lnSpc>
+              <a:spcBef>
+                <a:spcPts val="0"/>
+              </a:spcBef>
+              <a:spcAft>
+                <a:spcPts val="0"/>
+              </a:spcAft>
+              <a:buClrTx/>
+              <a:buSzTx/>
+              <a:buFontTx/>
+              <a:buNone/>
+              <a:tabLst/>
+              <a:defRPr/>
+            </a:pPr>
+            <a:r>
+              <a:rPr lang="hu-HU" dirty="0"/>
+              <a:t>-építési napló</a:t>
+            </a:r>
+          </a:p>
+          <a:p>
+            <a:pPr marL="0" marR="0" lvl="0" indent="0" algn="l" defTabSz="914400" rtl="0" eaLnBrk="1" fontAlgn="auto" latinLnBrk="0" hangingPunct="1">
+              <a:lnSpc>
+                <a:spcPct val="100000"/>
+              </a:lnSpc>
+              <a:spcBef>
+                <a:spcPts val="0"/>
+              </a:spcBef>
+              <a:spcAft>
+                <a:spcPts val="0"/>
+              </a:spcAft>
+              <a:buClrTx/>
+              <a:buSzTx/>
+              <a:buFontTx/>
+              <a:buNone/>
+              <a:tabLst/>
+              <a:defRPr/>
+            </a:pPr>
+            <a:r>
+              <a:rPr lang="hu-HU" dirty="0"/>
+              <a:t>-építési tippek naplója és annak blokkjai.</a:t>
+            </a:r>
+          </a:p>
+          <a:p>
+            <a:pPr marL="0" marR="0" lvl="0" indent="0" algn="l" defTabSz="914400" rtl="0" eaLnBrk="1" fontAlgn="auto" latinLnBrk="0" hangingPunct="1">
+              <a:lnSpc>
+                <a:spcPct val="100000"/>
+              </a:lnSpc>
+              <a:spcBef>
+                <a:spcPts val="0"/>
+              </a:spcBef>
+              <a:spcAft>
+                <a:spcPts val="0"/>
+              </a:spcAft>
+              <a:buClrTx/>
+              <a:buSzTx/>
+              <a:buFontTx/>
+              <a:buNone/>
+              <a:tabLst/>
+              <a:defRPr/>
+            </a:pPr>
+            <a:r>
+              <a:rPr lang="hu-HU" dirty="0"/>
+              <a:t>-külön üzenetek tábla a kapcsolatfelvételhez,</a:t>
+            </a:r>
+          </a:p>
+          <a:p>
+            <a:pPr marL="0" marR="0" lvl="0" indent="0" algn="l" defTabSz="914400" rtl="0" eaLnBrk="1" fontAlgn="auto" latinLnBrk="0" hangingPunct="1">
+              <a:lnSpc>
+                <a:spcPct val="100000"/>
+              </a:lnSpc>
+              <a:spcBef>
+                <a:spcPts val="0"/>
+              </a:spcBef>
+              <a:spcAft>
+                <a:spcPts val="0"/>
+              </a:spcAft>
+              <a:buClrTx/>
+              <a:buSzTx/>
+              <a:buFontTx/>
+              <a:buNone/>
+              <a:tabLst/>
+              <a:defRPr/>
+            </a:pPr>
+            <a:r>
+              <a:rPr lang="hu-HU" dirty="0"/>
+              <a:t>-aktivitásnapló</a:t>
             </a:r>
           </a:p>
         </p:txBody>
@@ -29226,6 +29493,197 @@
 </file>
 
 <file path=ppt/notesSlides/notesSlide18.xml><?xml version="1.0" encoding="utf-8"?>
+<p:notes xmlns:a="http://schemas.openxmlformats.org/drawingml/2006/main" xmlns:r="http://schemas.openxmlformats.org/officeDocument/2006/relationships" xmlns:p="http://schemas.openxmlformats.org/presentationml/2006/main">
+  <p:cSld>
+    <p:spTree>
+      <p:nvGrpSpPr>
+        <p:cNvPr id="1" name="">
+          <a:extLst>
+            <a:ext uri="{FF2B5EF4-FFF2-40B4-BE49-F238E27FC236}">
+              <a16:creationId xmlns:a16="http://schemas.microsoft.com/office/drawing/2014/main" id="{7C6F0255-68E0-AA93-0C86-6D216608E8A9}"/>
+            </a:ext>
+          </a:extLst>
+        </p:cNvPr>
+        <p:cNvGrpSpPr/>
+        <p:nvPr/>
+      </p:nvGrpSpPr>
+      <p:grpSpPr>
+        <a:xfrm>
+          <a:off x="0" y="0"/>
+          <a:ext cx="0" cy="0"/>
+          <a:chOff x="0" y="0"/>
+          <a:chExt cx="0" cy="0"/>
+        </a:xfrm>
+      </p:grpSpPr>
+      <p:sp>
+        <p:nvSpPr>
+          <p:cNvPr id="2" name="Diakép helye 1">
+            <a:extLst>
+              <a:ext uri="{FF2B5EF4-FFF2-40B4-BE49-F238E27FC236}">
+                <a16:creationId xmlns:a16="http://schemas.microsoft.com/office/drawing/2014/main" id="{4F6825DA-E512-99D7-963F-2472224E3E2D}"/>
+              </a:ext>
+            </a:extLst>
+          </p:cNvPr>
+          <p:cNvSpPr>
+            <a:spLocks noGrp="1" noRot="1" noChangeAspect="1"/>
+          </p:cNvSpPr>
+          <p:nvPr>
+            <p:ph type="sldImg"/>
+          </p:nvPr>
+        </p:nvSpPr>
+        <p:spPr/>
+      </p:sp>
+      <p:sp>
+        <p:nvSpPr>
+          <p:cNvPr id="3" name="Jegyzetek helye 2">
+            <a:extLst>
+              <a:ext uri="{FF2B5EF4-FFF2-40B4-BE49-F238E27FC236}">
+                <a16:creationId xmlns:a16="http://schemas.microsoft.com/office/drawing/2014/main" id="{D8EBC9D3-CD4E-6AB1-2C3C-E6B8BA641597}"/>
+              </a:ext>
+            </a:extLst>
+          </p:cNvPr>
+          <p:cNvSpPr>
+            <a:spLocks noGrp="1"/>
+          </p:cNvSpPr>
+          <p:nvPr>
+            <p:ph type="body" idx="1"/>
+          </p:nvPr>
+        </p:nvSpPr>
+        <p:spPr/>
+        <p:txBody>
+          <a:bodyPr/>
+          <a:lstStyle/>
+          <a:p>
+            <a:pPr marL="0" marR="0" lvl="0" indent="0" algn="l" defTabSz="914400" rtl="0" eaLnBrk="1" fontAlgn="auto" latinLnBrk="0" hangingPunct="1">
+              <a:lnSpc>
+                <a:spcPct val="100000"/>
+              </a:lnSpc>
+              <a:spcBef>
+                <a:spcPts val="0"/>
+              </a:spcBef>
+              <a:spcAft>
+                <a:spcPts val="0"/>
+              </a:spcAft>
+              <a:buClrTx/>
+              <a:buSzTx/>
+              <a:buFontTx/>
+              <a:buNone/>
+              <a:tabLst/>
+              <a:defRPr/>
+            </a:pPr>
+            <a:r>
+              <a:rPr lang="hu-HU" dirty="0"/>
+              <a:t>Táblák kötettése, miértjei.</a:t>
+            </a:r>
+          </a:p>
+          <a:p>
+            <a:endParaRPr lang="hu-HU" dirty="0"/>
+          </a:p>
+        </p:txBody>
+      </p:sp>
+      <p:sp>
+        <p:nvSpPr>
+          <p:cNvPr id="4" name="Dia számának helye 3">
+            <a:extLst>
+              <a:ext uri="{FF2B5EF4-FFF2-40B4-BE49-F238E27FC236}">
+                <a16:creationId xmlns:a16="http://schemas.microsoft.com/office/drawing/2014/main" id="{F89104F3-F3D8-95A9-44FA-41035BD6A70F}"/>
+              </a:ext>
+            </a:extLst>
+          </p:cNvPr>
+          <p:cNvSpPr>
+            <a:spLocks noGrp="1"/>
+          </p:cNvSpPr>
+          <p:nvPr>
+            <p:ph type="sldNum" sz="quarter" idx="5"/>
+          </p:nvPr>
+        </p:nvSpPr>
+        <p:spPr/>
+        <p:txBody>
+          <a:bodyPr/>
+          <a:lstStyle/>
+          <a:p>
+            <a:pPr marL="0" marR="0" lvl="0" indent="0" algn="r" defTabSz="914400" rtl="0" eaLnBrk="1" fontAlgn="auto" latinLnBrk="0" hangingPunct="1">
+              <a:lnSpc>
+                <a:spcPct val="100000"/>
+              </a:lnSpc>
+              <a:spcBef>
+                <a:spcPts val="0"/>
+              </a:spcBef>
+              <a:spcAft>
+                <a:spcPts val="0"/>
+              </a:spcAft>
+              <a:buClrTx/>
+              <a:buSzTx/>
+              <a:buFontTx/>
+              <a:buNone/>
+              <a:tabLst/>
+              <a:defRPr/>
+            </a:pPr>
+            <a:fld id="{C4B2AB52-DE3E-44E0-AFFD-20264D143888}" type="slidenum">
+              <a:rPr kumimoji="0" lang="hu-HU" sz="1200" b="0" i="0" u="none" strike="noStrike" kern="1200" cap="none" spc="0" normalizeH="0" baseline="0" noProof="0" smtClean="0">
+                <a:ln>
+                  <a:noFill/>
+                </a:ln>
+                <a:solidFill>
+                  <a:prstClr val="black"/>
+                </a:solidFill>
+                <a:effectLst/>
+                <a:uLnTx/>
+                <a:uFillTx/>
+                <a:latin typeface="Calibri" panose="020F0502020204030204"/>
+                <a:ea typeface="+mn-ea"/>
+                <a:cs typeface="+mn-cs"/>
+              </a:rPr>
+              <a:pPr marL="0" marR="0" lvl="0" indent="0" algn="r" defTabSz="914400" rtl="0" eaLnBrk="1" fontAlgn="auto" latinLnBrk="0" hangingPunct="1">
+                <a:lnSpc>
+                  <a:spcPct val="100000"/>
+                </a:lnSpc>
+                <a:spcBef>
+                  <a:spcPts val="0"/>
+                </a:spcBef>
+                <a:spcAft>
+                  <a:spcPts val="0"/>
+                </a:spcAft>
+                <a:buClrTx/>
+                <a:buSzTx/>
+                <a:buFontTx/>
+                <a:buNone/>
+                <a:tabLst/>
+                <a:defRPr/>
+              </a:pPr>
+              <a:t>18</a:t>
+            </a:fld>
+            <a:endParaRPr kumimoji="0" lang="hu-HU" sz="1200" b="0" i="0" u="none" strike="noStrike" kern="1200" cap="none" spc="0" normalizeH="0" baseline="0" noProof="0">
+              <a:ln>
+                <a:noFill/>
+              </a:ln>
+              <a:solidFill>
+                <a:prstClr val="black"/>
+              </a:solidFill>
+              <a:effectLst/>
+              <a:uLnTx/>
+              <a:uFillTx/>
+              <a:latin typeface="Calibri" panose="020F0502020204030204"/>
+              <a:ea typeface="+mn-ea"/>
+              <a:cs typeface="+mn-cs"/>
+            </a:endParaRPr>
+          </a:p>
+        </p:txBody>
+      </p:sp>
+    </p:spTree>
+    <p:extLst>
+      <p:ext uri="{BB962C8B-B14F-4D97-AF65-F5344CB8AC3E}">
+        <p14:creationId xmlns:p14="http://schemas.microsoft.com/office/powerpoint/2010/main" val="3047583938"/>
+      </p:ext>
+    </p:extLst>
+  </p:cSld>
+  <p:clrMapOvr>
+    <a:masterClrMapping/>
+  </p:clrMapOvr>
+</p:notes>
+</file>
+
+<file path=ppt/notesSlides/notesSlide19.xml><?xml version="1.0" encoding="utf-8"?>
 <p:notes xmlns:a="http://schemas.openxmlformats.org/drawingml/2006/main" xmlns:r="http://schemas.openxmlformats.org/officeDocument/2006/relationships" xmlns:p="http://schemas.openxmlformats.org/presentationml/2006/main">
   <p:cSld>
     <p:spTree>
@@ -29293,7 +29751,7 @@
           <a:p>
             <a:fld id="{C4B2AB52-DE3E-44E0-AFFD-20264D143888}" type="slidenum">
               <a:rPr lang="hu-HU" smtClean="0"/>
-              <a:t>18</a:t>
+              <a:t>19</a:t>
             </a:fld>
             <a:endParaRPr lang="hu-HU"/>
           </a:p>
@@ -29303,109 +29761,6 @@
     <p:extLst>
       <p:ext uri="{BB962C8B-B14F-4D97-AF65-F5344CB8AC3E}">
         <p14:creationId xmlns:p14="http://schemas.microsoft.com/office/powerpoint/2010/main" val="4053797243"/>
-      </p:ext>
-    </p:extLst>
-  </p:cSld>
-  <p:clrMapOvr>
-    <a:masterClrMapping/>
-  </p:clrMapOvr>
-</p:notes>
-</file>
-
-<file path=ppt/notesSlides/notesSlide19.xml><?xml version="1.0" encoding="utf-8"?>
-<p:notes xmlns:a="http://schemas.openxmlformats.org/drawingml/2006/main" xmlns:r="http://schemas.openxmlformats.org/officeDocument/2006/relationships" xmlns:p="http://schemas.openxmlformats.org/presentationml/2006/main">
-  <p:cSld>
-    <p:spTree>
-      <p:nvGrpSpPr>
-        <p:cNvPr id="1" name=""/>
-        <p:cNvGrpSpPr/>
-        <p:nvPr/>
-      </p:nvGrpSpPr>
-      <p:grpSpPr>
-        <a:xfrm>
-          <a:off x="0" y="0"/>
-          <a:ext cx="0" cy="0"/>
-          <a:chOff x="0" y="0"/>
-          <a:chExt cx="0" cy="0"/>
-        </a:xfrm>
-      </p:grpSpPr>
-      <p:sp>
-        <p:nvSpPr>
-          <p:cNvPr id="2" name="Diakép helye 1"/>
-          <p:cNvSpPr>
-            <a:spLocks noGrp="1" noRot="1" noChangeAspect="1"/>
-          </p:cNvSpPr>
-          <p:nvPr>
-            <p:ph type="sldImg"/>
-          </p:nvPr>
-        </p:nvSpPr>
-        <p:spPr/>
-      </p:sp>
-      <p:sp>
-        <p:nvSpPr>
-          <p:cNvPr id="3" name="Jegyzetek helye 2"/>
-          <p:cNvSpPr>
-            <a:spLocks noGrp="1"/>
-          </p:cNvSpPr>
-          <p:nvPr>
-            <p:ph type="body" idx="1"/>
-          </p:nvPr>
-        </p:nvSpPr>
-        <p:spPr/>
-        <p:txBody>
-          <a:bodyPr/>
-          <a:lstStyle/>
-          <a:p>
-            <a:r>
-              <a:rPr lang="hu-HU" dirty="0"/>
-              <a:t>Összességében a </a:t>
-            </a:r>
-            <a:r>
-              <a:rPr lang="hu-HU" dirty="0" err="1"/>
-              <a:t>MakettMester</a:t>
-            </a:r>
-            <a:r>
-              <a:rPr lang="hu-HU" dirty="0"/>
-              <a:t> egy teljes </a:t>
-            </a:r>
-            <a:r>
-              <a:rPr lang="hu-HU" dirty="0" err="1"/>
-              <a:t>full-stack</a:t>
-            </a:r>
-            <a:r>
-              <a:rPr lang="hu-HU" dirty="0"/>
-              <a:t> alkalmazás lett, amely valós közösségi funkciókat valósít meg. A projekt során külön figyeltünk a moduláris felépítésre, a biztonságra, a bővíthetőségre és a felhasználói élményre. A rendszer jelenlegi állapotában is jól használható, de továbbfejleszthető például fejlettebb kereséssel, statisztikákkal, még jobb mobilélménnyel vagy összetettebb AI segítséggel.</a:t>
-            </a:r>
-          </a:p>
-        </p:txBody>
-      </p:sp>
-      <p:sp>
-        <p:nvSpPr>
-          <p:cNvPr id="4" name="Dia számának helye 3"/>
-          <p:cNvSpPr>
-            <a:spLocks noGrp="1"/>
-          </p:cNvSpPr>
-          <p:nvPr>
-            <p:ph type="sldNum" sz="quarter" idx="5"/>
-          </p:nvPr>
-        </p:nvSpPr>
-        <p:spPr/>
-        <p:txBody>
-          <a:bodyPr/>
-          <a:lstStyle/>
-          <a:p>
-            <a:fld id="{C4B2AB52-DE3E-44E0-AFFD-20264D143888}" type="slidenum">
-              <a:rPr lang="hu-HU" smtClean="0"/>
-              <a:t>19</a:t>
-            </a:fld>
-            <a:endParaRPr lang="hu-HU"/>
-          </a:p>
-        </p:txBody>
-      </p:sp>
-    </p:spTree>
-    <p:extLst>
-      <p:ext uri="{BB962C8B-B14F-4D97-AF65-F5344CB8AC3E}">
-        <p14:creationId xmlns:p14="http://schemas.microsoft.com/office/powerpoint/2010/main" val="1709005438"/>
       </p:ext>
     </p:extLst>
   </p:cSld>
@@ -29518,6 +29873,109 @@
     <p:extLst>
       <p:ext uri="{BB962C8B-B14F-4D97-AF65-F5344CB8AC3E}">
         <p14:creationId xmlns:p14="http://schemas.microsoft.com/office/powerpoint/2010/main" val="3749620830"/>
+      </p:ext>
+    </p:extLst>
+  </p:cSld>
+  <p:clrMapOvr>
+    <a:masterClrMapping/>
+  </p:clrMapOvr>
+</p:notes>
+</file>
+
+<file path=ppt/notesSlides/notesSlide20.xml><?xml version="1.0" encoding="utf-8"?>
+<p:notes xmlns:a="http://schemas.openxmlformats.org/drawingml/2006/main" xmlns:r="http://schemas.openxmlformats.org/officeDocument/2006/relationships" xmlns:p="http://schemas.openxmlformats.org/presentationml/2006/main">
+  <p:cSld>
+    <p:spTree>
+      <p:nvGrpSpPr>
+        <p:cNvPr id="1" name=""/>
+        <p:cNvGrpSpPr/>
+        <p:nvPr/>
+      </p:nvGrpSpPr>
+      <p:grpSpPr>
+        <a:xfrm>
+          <a:off x="0" y="0"/>
+          <a:ext cx="0" cy="0"/>
+          <a:chOff x="0" y="0"/>
+          <a:chExt cx="0" cy="0"/>
+        </a:xfrm>
+      </p:grpSpPr>
+      <p:sp>
+        <p:nvSpPr>
+          <p:cNvPr id="2" name="Diakép helye 1"/>
+          <p:cNvSpPr>
+            <a:spLocks noGrp="1" noRot="1" noChangeAspect="1"/>
+          </p:cNvSpPr>
+          <p:nvPr>
+            <p:ph type="sldImg"/>
+          </p:nvPr>
+        </p:nvSpPr>
+        <p:spPr/>
+      </p:sp>
+      <p:sp>
+        <p:nvSpPr>
+          <p:cNvPr id="3" name="Jegyzetek helye 2"/>
+          <p:cNvSpPr>
+            <a:spLocks noGrp="1"/>
+          </p:cNvSpPr>
+          <p:nvPr>
+            <p:ph type="body" idx="1"/>
+          </p:nvPr>
+        </p:nvSpPr>
+        <p:spPr/>
+        <p:txBody>
+          <a:bodyPr/>
+          <a:lstStyle/>
+          <a:p>
+            <a:r>
+              <a:rPr lang="hu-HU" dirty="0"/>
+              <a:t>Összességében a </a:t>
+            </a:r>
+            <a:r>
+              <a:rPr lang="hu-HU" dirty="0" err="1"/>
+              <a:t>MakettMester</a:t>
+            </a:r>
+            <a:r>
+              <a:rPr lang="hu-HU" dirty="0"/>
+              <a:t> egy teljes </a:t>
+            </a:r>
+            <a:r>
+              <a:rPr lang="hu-HU" dirty="0" err="1"/>
+              <a:t>full-stack</a:t>
+            </a:r>
+            <a:r>
+              <a:rPr lang="hu-HU" dirty="0"/>
+              <a:t> alkalmazás lett, amely valós közösségi funkciókat valósít meg. A projekt során külön figyeltünk a moduláris felépítésre, a biztonságra, a bővíthetőségre és a felhasználói élményre. A rendszer jelenlegi állapotában is jól használható, de továbbfejleszthető például fejlettebb kereséssel, statisztikákkal, még jobb mobilélménnyel vagy összetettebb AI segítséggel.</a:t>
+            </a:r>
+          </a:p>
+        </p:txBody>
+      </p:sp>
+      <p:sp>
+        <p:nvSpPr>
+          <p:cNvPr id="4" name="Dia számának helye 3"/>
+          <p:cNvSpPr>
+            <a:spLocks noGrp="1"/>
+          </p:cNvSpPr>
+          <p:nvPr>
+            <p:ph type="sldNum" sz="quarter" idx="5"/>
+          </p:nvPr>
+        </p:nvSpPr>
+        <p:spPr/>
+        <p:txBody>
+          <a:bodyPr/>
+          <a:lstStyle/>
+          <a:p>
+            <a:fld id="{C4B2AB52-DE3E-44E0-AFFD-20264D143888}" type="slidenum">
+              <a:rPr lang="hu-HU" smtClean="0"/>
+              <a:t>20</a:t>
+            </a:fld>
+            <a:endParaRPr lang="hu-HU"/>
+          </a:p>
+        </p:txBody>
+      </p:sp>
+    </p:spTree>
+    <p:extLst>
+      <p:ext uri="{BB962C8B-B14F-4D97-AF65-F5344CB8AC3E}">
+        <p14:creationId xmlns:p14="http://schemas.microsoft.com/office/powerpoint/2010/main" val="1709005438"/>
       </p:ext>
     </p:extLst>
   </p:cSld>
@@ -30409,7 +30867,7 @@
           <a:p>
             <a:fld id="{F6C265F0-9B0B-43BF-8579-E8996E214BEE}" type="datetimeFigureOut">
               <a:rPr lang="hu-HU" smtClean="0"/>
-              <a:t>2026. 05. 29.</a:t>
+              <a:t>2026. 05. 30.</a:t>
             </a:fld>
             <a:endParaRPr lang="hu-HU"/>
           </a:p>
@@ -30607,7 +31065,7 @@
           <a:p>
             <a:fld id="{F6C265F0-9B0B-43BF-8579-E8996E214BEE}" type="datetimeFigureOut">
               <a:rPr lang="hu-HU" smtClean="0"/>
-              <a:t>2026. 05. 29.</a:t>
+              <a:t>2026. 05. 30.</a:t>
             </a:fld>
             <a:endParaRPr lang="hu-HU"/>
           </a:p>
@@ -30815,7 +31273,7 @@
           <a:p>
             <a:fld id="{F6C265F0-9B0B-43BF-8579-E8996E214BEE}" type="datetimeFigureOut">
               <a:rPr lang="hu-HU" smtClean="0"/>
-              <a:t>2026. 05. 29.</a:t>
+              <a:t>2026. 05. 30.</a:t>
             </a:fld>
             <a:endParaRPr lang="hu-HU"/>
           </a:p>
@@ -31013,7 +31471,7 @@
           <a:p>
             <a:fld id="{F6C265F0-9B0B-43BF-8579-E8996E214BEE}" type="datetimeFigureOut">
               <a:rPr lang="hu-HU" smtClean="0"/>
-              <a:t>2026. 05. 29.</a:t>
+              <a:t>2026. 05. 30.</a:t>
             </a:fld>
             <a:endParaRPr lang="hu-HU"/>
           </a:p>
@@ -31288,7 +31746,7 @@
           <a:p>
             <a:fld id="{F6C265F0-9B0B-43BF-8579-E8996E214BEE}" type="datetimeFigureOut">
               <a:rPr lang="hu-HU" smtClean="0"/>
-              <a:t>2026. 05. 29.</a:t>
+              <a:t>2026. 05. 30.</a:t>
             </a:fld>
             <a:endParaRPr lang="hu-HU"/>
           </a:p>
@@ -31553,7 +32011,7 @@
           <a:p>
             <a:fld id="{F6C265F0-9B0B-43BF-8579-E8996E214BEE}" type="datetimeFigureOut">
               <a:rPr lang="hu-HU" smtClean="0"/>
-              <a:t>2026. 05. 29.</a:t>
+              <a:t>2026. 05. 30.</a:t>
             </a:fld>
             <a:endParaRPr lang="hu-HU"/>
           </a:p>
@@ -31965,7 +32423,7 @@
           <a:p>
             <a:fld id="{F6C265F0-9B0B-43BF-8579-E8996E214BEE}" type="datetimeFigureOut">
               <a:rPr lang="hu-HU" smtClean="0"/>
-              <a:t>2026. 05. 29.</a:t>
+              <a:t>2026. 05. 30.</a:t>
             </a:fld>
             <a:endParaRPr lang="hu-HU"/>
           </a:p>
@@ -32106,7 +32564,7 @@
           <a:p>
             <a:fld id="{F6C265F0-9B0B-43BF-8579-E8996E214BEE}" type="datetimeFigureOut">
               <a:rPr lang="hu-HU" smtClean="0"/>
-              <a:t>2026. 05. 29.</a:t>
+              <a:t>2026. 05. 30.</a:t>
             </a:fld>
             <a:endParaRPr lang="hu-HU"/>
           </a:p>
@@ -32219,7 +32677,7 @@
           <a:p>
             <a:fld id="{F6C265F0-9B0B-43BF-8579-E8996E214BEE}" type="datetimeFigureOut">
               <a:rPr lang="hu-HU" smtClean="0"/>
-              <a:t>2026. 05. 29.</a:t>
+              <a:t>2026. 05. 30.</a:t>
             </a:fld>
             <a:endParaRPr lang="hu-HU"/>
           </a:p>
@@ -32530,7 +32988,7 @@
           <a:p>
             <a:fld id="{F6C265F0-9B0B-43BF-8579-E8996E214BEE}" type="datetimeFigureOut">
               <a:rPr lang="hu-HU" smtClean="0"/>
-              <a:t>2026. 05. 29.</a:t>
+              <a:t>2026. 05. 30.</a:t>
             </a:fld>
             <a:endParaRPr lang="hu-HU"/>
           </a:p>
@@ -32818,7 +33276,7 @@
           <a:p>
             <a:fld id="{F6C265F0-9B0B-43BF-8579-E8996E214BEE}" type="datetimeFigureOut">
               <a:rPr lang="hu-HU" smtClean="0"/>
-              <a:t>2026. 05. 29.</a:t>
+              <a:t>2026. 05. 30.</a:t>
             </a:fld>
             <a:endParaRPr lang="hu-HU"/>
           </a:p>
@@ -33059,7 +33517,7 @@
           <a:p>
             <a:fld id="{F6C265F0-9B0B-43BF-8579-E8996E214BEE}" type="datetimeFigureOut">
               <a:rPr lang="hu-HU" smtClean="0"/>
-              <a:t>2026. 05. 29.</a:t>
+              <a:t>2026. 05. 30.</a:t>
             </a:fld>
             <a:endParaRPr lang="hu-HU"/>
           </a:p>
@@ -39542,6 +40000,828 @@
     </p:bg>
     <p:spTree>
       <p:nvGrpSpPr>
+        <p:cNvPr id="1" name="">
+          <a:extLst>
+            <a:ext uri="{FF2B5EF4-FFF2-40B4-BE49-F238E27FC236}">
+              <a16:creationId xmlns:a16="http://schemas.microsoft.com/office/drawing/2014/main" id="{5A3A62B7-1D4A-02F0-864F-3CB36E24CCCD}"/>
+            </a:ext>
+          </a:extLst>
+        </p:cNvPr>
+        <p:cNvGrpSpPr/>
+        <p:nvPr/>
+      </p:nvGrpSpPr>
+      <p:grpSpPr>
+        <a:xfrm>
+          <a:off x="0" y="0"/>
+          <a:ext cx="0" cy="0"/>
+          <a:chOff x="0" y="0"/>
+          <a:chExt cx="0" cy="0"/>
+        </a:xfrm>
+      </p:grpSpPr>
+      <p:sp useBgFill="1">
+        <p:nvSpPr>
+          <p:cNvPr id="11" name="Rectangle 10">
+            <a:extLst>
+              <a:ext uri="{FF2B5EF4-FFF2-40B4-BE49-F238E27FC236}">
+                <a16:creationId xmlns:a16="http://schemas.microsoft.com/office/drawing/2014/main" id="{C1870B73-64DD-A05B-DF90-A511C630E0A0}"/>
+              </a:ext>
+              <a:ext uri="{C183D7F6-B498-43B3-948B-1728B52AA6E4}">
+                <adec:decorative xmlns:adec="http://schemas.microsoft.com/office/drawing/2017/decorative" val="1"/>
+              </a:ext>
+            </a:extLst>
+          </p:cNvPr>
+          <p:cNvSpPr>
+            <a:spLocks noGrp="1" noRot="1" noChangeAspect="1" noMove="1" noResize="1" noEditPoints="1" noAdjustHandles="1" noChangeArrowheads="1" noChangeShapeType="1" noTextEdit="1"/>
+          </p:cNvSpPr>
+          <p:nvPr>
+            <p:extLst>
+              <p:ext uri="{386F3935-93C4-4BCD-93E2-E3B085C9AB24}">
+                <p16:designElem xmlns:p16="http://schemas.microsoft.com/office/powerpoint/2015/main" val="1"/>
+              </p:ext>
+            </p:extLst>
+          </p:nvPr>
+        </p:nvSpPr>
+        <p:spPr>
+          <a:xfrm>
+            <a:off x="0" y="0"/>
+            <a:ext cx="12192000" cy="6858000"/>
+          </a:xfrm>
+          <a:prstGeom prst="rect">
+            <a:avLst/>
+          </a:prstGeom>
+          <a:ln w="12700" cap="flat" cmpd="sng" algn="ctr">
+            <a:noFill/>
+            <a:prstDash val="solid"/>
+            <a:miter lim="800000"/>
+          </a:ln>
+          <a:effectLst/>
+          <a:extLst>
+            <a:ext uri="{91240B29-F687-4F45-9708-019B960494DF}">
+              <a14:hiddenLine xmlns:a14="http://schemas.microsoft.com/office/drawing/2010/main" w="12700" cap="flat" cmpd="sng" algn="ctr">
+                <a:solidFill>
+                  <a:schemeClr val="accent1">
+                    <a:shade val="50000"/>
+                  </a:schemeClr>
+                </a:solidFill>
+                <a:prstDash val="solid"/>
+                <a:miter lim="800000"/>
+              </a14:hiddenLine>
+            </a:ext>
+          </a:extLst>
+        </p:spPr>
+        <p:style>
+          <a:lnRef idx="2">
+            <a:schemeClr val="accent1">
+              <a:shade val="50000"/>
+            </a:schemeClr>
+          </a:lnRef>
+          <a:fillRef idx="1">
+            <a:schemeClr val="accent1"/>
+          </a:fillRef>
+          <a:effectRef idx="0">
+            <a:schemeClr val="accent1"/>
+          </a:effectRef>
+          <a:fontRef idx="minor">
+            <a:schemeClr val="lt1"/>
+          </a:fontRef>
+        </p:style>
+        <p:txBody>
+          <a:bodyPr rtlCol="0" anchor="ctr"/>
+          <a:lstStyle/>
+          <a:p>
+            <a:pPr marL="0" marR="0" lvl="0" indent="0" algn="ctr" defTabSz="914400" rtl="0" eaLnBrk="1" fontAlgn="auto" latinLnBrk="0" hangingPunct="1">
+              <a:lnSpc>
+                <a:spcPct val="100000"/>
+              </a:lnSpc>
+              <a:spcBef>
+                <a:spcPts val="0"/>
+              </a:spcBef>
+              <a:spcAft>
+                <a:spcPts val="0"/>
+              </a:spcAft>
+              <a:buClrTx/>
+              <a:buSzTx/>
+              <a:buFontTx/>
+              <a:buNone/>
+              <a:tabLst/>
+              <a:defRPr/>
+            </a:pPr>
+            <a:endParaRPr kumimoji="0" lang="en-US" sz="1800" b="0" i="0" u="none" strike="noStrike" kern="1200" cap="none" spc="0" normalizeH="0" baseline="0" noProof="0">
+              <a:ln>
+                <a:noFill/>
+              </a:ln>
+              <a:solidFill>
+                <a:prstClr val="white"/>
+              </a:solidFill>
+              <a:effectLst/>
+              <a:uLnTx/>
+              <a:uFillTx/>
+              <a:latin typeface="Calibri" panose="020F0502020204030204"/>
+              <a:ea typeface="+mn-ea"/>
+              <a:cs typeface="+mn-cs"/>
+            </a:endParaRPr>
+          </a:p>
+        </p:txBody>
+      </p:sp>
+      <p:sp>
+        <p:nvSpPr>
+          <p:cNvPr id="23" name="Rectangle 12">
+            <a:extLst>
+              <a:ext uri="{FF2B5EF4-FFF2-40B4-BE49-F238E27FC236}">
+                <a16:creationId xmlns:a16="http://schemas.microsoft.com/office/drawing/2014/main" id="{952F82B4-D1EC-B64A-B5C8-7036EC5FAFFE}"/>
+              </a:ext>
+              <a:ext uri="{C183D7F6-B498-43B3-948B-1728B52AA6E4}">
+                <adec:decorative xmlns:adec="http://schemas.microsoft.com/office/drawing/2017/decorative" val="1"/>
+              </a:ext>
+            </a:extLst>
+          </p:cNvPr>
+          <p:cNvSpPr>
+            <a:spLocks noGrp="1" noRot="1" noChangeAspect="1" noMove="1" noResize="1" noEditPoints="1" noAdjustHandles="1" noChangeArrowheads="1" noChangeShapeType="1" noTextEdit="1"/>
+          </p:cNvSpPr>
+          <p:nvPr>
+            <p:extLst>
+              <p:ext uri="{386F3935-93C4-4BCD-93E2-E3B085C9AB24}">
+                <p16:designElem xmlns:p16="http://schemas.microsoft.com/office/powerpoint/2015/main" val="1"/>
+              </p:ext>
+            </p:extLst>
+          </p:nvPr>
+        </p:nvSpPr>
+        <p:spPr>
+          <a:xfrm rot="5400000" flipH="1">
+            <a:off x="-1417539" y="1417538"/>
+            <a:ext cx="6875818" cy="4040744"/>
+          </a:xfrm>
+          <a:prstGeom prst="rect">
+            <a:avLst/>
+          </a:prstGeom>
+          <a:gradFill>
+            <a:gsLst>
+              <a:gs pos="0">
+                <a:srgbClr val="000000"/>
+              </a:gs>
+              <a:gs pos="100000">
+                <a:schemeClr val="accent1">
+                  <a:lumMod val="75000"/>
+                </a:schemeClr>
+              </a:gs>
+            </a:gsLst>
+            <a:lin ang="18600000" scaled="0"/>
+          </a:gradFill>
+          <a:ln>
+            <a:noFill/>
+          </a:ln>
+        </p:spPr>
+        <p:style>
+          <a:lnRef idx="2">
+            <a:schemeClr val="accent1">
+              <a:shade val="50000"/>
+            </a:schemeClr>
+          </a:lnRef>
+          <a:fillRef idx="1">
+            <a:schemeClr val="accent1"/>
+          </a:fillRef>
+          <a:effectRef idx="0">
+            <a:schemeClr val="accent1"/>
+          </a:effectRef>
+          <a:fontRef idx="minor">
+            <a:schemeClr val="lt1"/>
+          </a:fontRef>
+        </p:style>
+        <p:txBody>
+          <a:bodyPr rtlCol="0" anchor="ctr"/>
+          <a:lstStyle/>
+          <a:p>
+            <a:pPr marL="0" marR="0" lvl="0" indent="0" algn="ctr" defTabSz="914400" rtl="0" eaLnBrk="1" fontAlgn="auto" latinLnBrk="0" hangingPunct="1">
+              <a:lnSpc>
+                <a:spcPct val="100000"/>
+              </a:lnSpc>
+              <a:spcBef>
+                <a:spcPts val="0"/>
+              </a:spcBef>
+              <a:spcAft>
+                <a:spcPts val="0"/>
+              </a:spcAft>
+              <a:buClrTx/>
+              <a:buSzTx/>
+              <a:buFontTx/>
+              <a:buNone/>
+              <a:tabLst/>
+              <a:defRPr/>
+            </a:pPr>
+            <a:endParaRPr kumimoji="0" lang="en-US" sz="1800" b="0" i="0" u="none" strike="noStrike" kern="1200" cap="none" spc="0" normalizeH="0" baseline="0" noProof="0" dirty="0">
+              <a:ln>
+                <a:noFill/>
+              </a:ln>
+              <a:solidFill>
+                <a:prstClr val="white"/>
+              </a:solidFill>
+              <a:effectLst/>
+              <a:uLnTx/>
+              <a:uFillTx/>
+              <a:latin typeface="Calibri" panose="020F0502020204030204"/>
+              <a:ea typeface="+mn-ea"/>
+              <a:cs typeface="+mn-cs"/>
+            </a:endParaRPr>
+          </a:p>
+        </p:txBody>
+      </p:sp>
+      <p:sp>
+        <p:nvSpPr>
+          <p:cNvPr id="24" name="Rectangle 14">
+            <a:extLst>
+              <a:ext uri="{FF2B5EF4-FFF2-40B4-BE49-F238E27FC236}">
+                <a16:creationId xmlns:a16="http://schemas.microsoft.com/office/drawing/2014/main" id="{21596415-A67A-DB4C-6786-1C3B92F5B27F}"/>
+              </a:ext>
+              <a:ext uri="{C183D7F6-B498-43B3-948B-1728B52AA6E4}">
+                <adec:decorative xmlns:adec="http://schemas.microsoft.com/office/drawing/2017/decorative" val="1"/>
+              </a:ext>
+            </a:extLst>
+          </p:cNvPr>
+          <p:cNvSpPr>
+            <a:spLocks noGrp="1" noRot="1" noChangeAspect="1" noMove="1" noResize="1" noEditPoints="1" noAdjustHandles="1" noChangeArrowheads="1" noChangeShapeType="1" noTextEdit="1"/>
+          </p:cNvSpPr>
+          <p:nvPr>
+            <p:extLst>
+              <p:ext uri="{386F3935-93C4-4BCD-93E2-E3B085C9AB24}">
+                <p16:designElem xmlns:p16="http://schemas.microsoft.com/office/powerpoint/2015/main" val="1"/>
+              </p:ext>
+            </p:extLst>
+          </p:nvPr>
+        </p:nvSpPr>
+        <p:spPr>
+          <a:xfrm rot="16200000">
+            <a:off x="-158495" y="2660473"/>
+            <a:ext cx="4355594" cy="4038603"/>
+          </a:xfrm>
+          <a:prstGeom prst="rect">
+            <a:avLst/>
+          </a:prstGeom>
+          <a:gradFill>
+            <a:gsLst>
+              <a:gs pos="0">
+                <a:schemeClr val="accent1">
+                  <a:alpha val="50000"/>
+                </a:schemeClr>
+              </a:gs>
+              <a:gs pos="100000">
+                <a:schemeClr val="accent1">
+                  <a:lumMod val="50000"/>
+                  <a:alpha val="0"/>
+                </a:schemeClr>
+              </a:gs>
+            </a:gsLst>
+            <a:lin ang="11400000" scaled="0"/>
+          </a:gradFill>
+          <a:ln>
+            <a:noFill/>
+          </a:ln>
+        </p:spPr>
+        <p:style>
+          <a:lnRef idx="2">
+            <a:schemeClr val="accent1">
+              <a:shade val="50000"/>
+            </a:schemeClr>
+          </a:lnRef>
+          <a:fillRef idx="1">
+            <a:schemeClr val="accent1"/>
+          </a:fillRef>
+          <a:effectRef idx="0">
+            <a:schemeClr val="accent1"/>
+          </a:effectRef>
+          <a:fontRef idx="minor">
+            <a:schemeClr val="lt1"/>
+          </a:fontRef>
+        </p:style>
+        <p:txBody>
+          <a:bodyPr rtlCol="0" anchor="ctr"/>
+          <a:lstStyle/>
+          <a:p>
+            <a:pPr marL="0" marR="0" lvl="0" indent="0" algn="ctr" defTabSz="914400" rtl="0" eaLnBrk="1" fontAlgn="auto" latinLnBrk="0" hangingPunct="1">
+              <a:lnSpc>
+                <a:spcPct val="100000"/>
+              </a:lnSpc>
+              <a:spcBef>
+                <a:spcPts val="0"/>
+              </a:spcBef>
+              <a:spcAft>
+                <a:spcPts val="0"/>
+              </a:spcAft>
+              <a:buClrTx/>
+              <a:buSzTx/>
+              <a:buFontTx/>
+              <a:buNone/>
+              <a:tabLst/>
+              <a:defRPr/>
+            </a:pPr>
+            <a:endParaRPr kumimoji="0" lang="en-US" sz="1800" b="0" i="0" u="none" strike="noStrike" kern="1200" cap="none" spc="0" normalizeH="0" baseline="0" noProof="0">
+              <a:ln>
+                <a:noFill/>
+              </a:ln>
+              <a:solidFill>
+                <a:prstClr val="white"/>
+              </a:solidFill>
+              <a:effectLst/>
+              <a:uLnTx/>
+              <a:uFillTx/>
+              <a:latin typeface="Calibri" panose="020F0502020204030204"/>
+              <a:ea typeface="+mn-ea"/>
+              <a:cs typeface="+mn-cs"/>
+            </a:endParaRPr>
+          </a:p>
+        </p:txBody>
+      </p:sp>
+      <p:sp>
+        <p:nvSpPr>
+          <p:cNvPr id="25" name="Rectangle 16">
+            <a:extLst>
+              <a:ext uri="{FF2B5EF4-FFF2-40B4-BE49-F238E27FC236}">
+                <a16:creationId xmlns:a16="http://schemas.microsoft.com/office/drawing/2014/main" id="{88CAF37C-7F97-424F-AE4D-3C4A799ED72B}"/>
+              </a:ext>
+              <a:ext uri="{C183D7F6-B498-43B3-948B-1728B52AA6E4}">
+                <adec:decorative xmlns:adec="http://schemas.microsoft.com/office/drawing/2017/decorative" val="1"/>
+              </a:ext>
+            </a:extLst>
+          </p:cNvPr>
+          <p:cNvSpPr>
+            <a:spLocks noGrp="1" noRot="1" noChangeAspect="1" noMove="1" noResize="1" noEditPoints="1" noAdjustHandles="1" noChangeArrowheads="1" noChangeShapeType="1" noTextEdit="1"/>
+          </p:cNvSpPr>
+          <p:nvPr>
+            <p:extLst>
+              <p:ext uri="{386F3935-93C4-4BCD-93E2-E3B085C9AB24}">
+                <p16:designElem xmlns:p16="http://schemas.microsoft.com/office/powerpoint/2015/main" val="1"/>
+              </p:ext>
+            </p:extLst>
+          </p:nvPr>
+        </p:nvSpPr>
+        <p:spPr>
+          <a:xfrm rot="16200000" flipH="1">
+            <a:off x="-1180882" y="1638085"/>
+            <a:ext cx="6857572" cy="3581401"/>
+          </a:xfrm>
+          <a:prstGeom prst="rect">
+            <a:avLst/>
+          </a:prstGeom>
+          <a:gradFill>
+            <a:gsLst>
+              <a:gs pos="0">
+                <a:srgbClr val="000000">
+                  <a:alpha val="59000"/>
+                </a:srgbClr>
+              </a:gs>
+              <a:gs pos="69000">
+                <a:schemeClr val="accent1">
+                  <a:alpha val="0"/>
+                </a:schemeClr>
+              </a:gs>
+            </a:gsLst>
+            <a:lin ang="13200000" scaled="0"/>
+          </a:gradFill>
+          <a:ln>
+            <a:noFill/>
+          </a:ln>
+        </p:spPr>
+        <p:style>
+          <a:lnRef idx="2">
+            <a:schemeClr val="accent1">
+              <a:shade val="50000"/>
+            </a:schemeClr>
+          </a:lnRef>
+          <a:fillRef idx="1">
+            <a:schemeClr val="accent1"/>
+          </a:fillRef>
+          <a:effectRef idx="0">
+            <a:schemeClr val="accent1"/>
+          </a:effectRef>
+          <a:fontRef idx="minor">
+            <a:schemeClr val="lt1"/>
+          </a:fontRef>
+        </p:style>
+        <p:txBody>
+          <a:bodyPr rtlCol="0" anchor="ctr"/>
+          <a:lstStyle/>
+          <a:p>
+            <a:pPr marL="0" marR="0" lvl="0" indent="0" algn="ctr" defTabSz="914400" rtl="0" eaLnBrk="1" fontAlgn="auto" latinLnBrk="0" hangingPunct="1">
+              <a:lnSpc>
+                <a:spcPct val="100000"/>
+              </a:lnSpc>
+              <a:spcBef>
+                <a:spcPts val="0"/>
+              </a:spcBef>
+              <a:spcAft>
+                <a:spcPts val="0"/>
+              </a:spcAft>
+              <a:buClrTx/>
+              <a:buSzTx/>
+              <a:buFontTx/>
+              <a:buNone/>
+              <a:tabLst/>
+              <a:defRPr/>
+            </a:pPr>
+            <a:endParaRPr kumimoji="0" lang="en-US" sz="1800" b="0" i="0" u="none" strike="noStrike" kern="1200" cap="none" spc="0" normalizeH="0" baseline="0" noProof="0" dirty="0">
+              <a:ln>
+                <a:noFill/>
+              </a:ln>
+              <a:solidFill>
+                <a:prstClr val="white"/>
+              </a:solidFill>
+              <a:effectLst/>
+              <a:uLnTx/>
+              <a:uFillTx/>
+              <a:latin typeface="Calibri" panose="020F0502020204030204"/>
+              <a:ea typeface="+mn-ea"/>
+              <a:cs typeface="+mn-cs"/>
+            </a:endParaRPr>
+          </a:p>
+        </p:txBody>
+      </p:sp>
+      <p:sp>
+        <p:nvSpPr>
+          <p:cNvPr id="26" name="Freeform: Shape 18">
+            <a:extLst>
+              <a:ext uri="{FF2B5EF4-FFF2-40B4-BE49-F238E27FC236}">
+                <a16:creationId xmlns:a16="http://schemas.microsoft.com/office/drawing/2014/main" id="{83AE743B-7CE3-CE0F-54D7-2ED89C6B790E}"/>
+              </a:ext>
+              <a:ext uri="{C183D7F6-B498-43B3-948B-1728B52AA6E4}">
+                <adec:decorative xmlns:adec="http://schemas.microsoft.com/office/drawing/2017/decorative" val="1"/>
+              </a:ext>
+            </a:extLst>
+          </p:cNvPr>
+          <p:cNvSpPr>
+            <a:spLocks noGrp="1" noRot="1" noChangeAspect="1" noMove="1" noResize="1" noEditPoints="1" noAdjustHandles="1" noChangeArrowheads="1" noChangeShapeType="1" noTextEdit="1"/>
+          </p:cNvSpPr>
+          <p:nvPr>
+            <p:extLst>
+              <p:ext uri="{386F3935-93C4-4BCD-93E2-E3B085C9AB24}">
+                <p16:designElem xmlns:p16="http://schemas.microsoft.com/office/powerpoint/2015/main" val="1"/>
+              </p:ext>
+            </p:extLst>
+          </p:nvPr>
+        </p:nvSpPr>
+        <p:spPr>
+          <a:xfrm rot="6097846">
+            <a:off x="-747355" y="1201312"/>
+            <a:ext cx="4808302" cy="4088666"/>
+          </a:xfrm>
+          <a:custGeom>
+            <a:avLst/>
+            <a:gdLst>
+              <a:gd name="connsiteX0" fmla="*/ 48844 w 4808302"/>
+              <a:gd name="connsiteY0" fmla="*/ 2888671 h 4088666"/>
+              <a:gd name="connsiteX1" fmla="*/ 0 w 4808302"/>
+              <a:gd name="connsiteY1" fmla="*/ 2404151 h 4088666"/>
+              <a:gd name="connsiteX2" fmla="*/ 2404151 w 4808302"/>
+              <a:gd name="connsiteY2" fmla="*/ 0 h 4088666"/>
+              <a:gd name="connsiteX3" fmla="*/ 4808302 w 4808302"/>
+              <a:gd name="connsiteY3" fmla="*/ 2404151 h 4088666"/>
+              <a:gd name="connsiteX4" fmla="*/ 4700216 w 4808302"/>
+              <a:gd name="connsiteY4" fmla="*/ 3119072 h 4088666"/>
+              <a:gd name="connsiteX5" fmla="*/ 4643143 w 4808302"/>
+              <a:gd name="connsiteY5" fmla="*/ 3275009 h 4088666"/>
+              <a:gd name="connsiteX6" fmla="*/ 690093 w 4808302"/>
+              <a:gd name="connsiteY6" fmla="*/ 4088666 h 4088666"/>
+              <a:gd name="connsiteX7" fmla="*/ 548991 w 4808302"/>
+              <a:gd name="connsiteY7" fmla="*/ 3933414 h 4088666"/>
+              <a:gd name="connsiteX8" fmla="*/ 48844 w 4808302"/>
+              <a:gd name="connsiteY8" fmla="*/ 2888671 h 4088666"/>
+            </a:gdLst>
+            <a:ahLst/>
+            <a:cxnLst>
+              <a:cxn ang="0">
+                <a:pos x="connsiteX0" y="connsiteY0"/>
+              </a:cxn>
+              <a:cxn ang="0">
+                <a:pos x="connsiteX1" y="connsiteY1"/>
+              </a:cxn>
+              <a:cxn ang="0">
+                <a:pos x="connsiteX2" y="connsiteY2"/>
+              </a:cxn>
+              <a:cxn ang="0">
+                <a:pos x="connsiteX3" y="connsiteY3"/>
+              </a:cxn>
+              <a:cxn ang="0">
+                <a:pos x="connsiteX4" y="connsiteY4"/>
+              </a:cxn>
+              <a:cxn ang="0">
+                <a:pos x="connsiteX5" y="connsiteY5"/>
+              </a:cxn>
+              <a:cxn ang="0">
+                <a:pos x="connsiteX6" y="connsiteY6"/>
+              </a:cxn>
+              <a:cxn ang="0">
+                <a:pos x="connsiteX7" y="connsiteY7"/>
+              </a:cxn>
+              <a:cxn ang="0">
+                <a:pos x="connsiteX8" y="connsiteY8"/>
+              </a:cxn>
+            </a:cxnLst>
+            <a:rect l="l" t="t" r="r" b="b"/>
+            <a:pathLst>
+              <a:path w="4808302" h="4088666">
+                <a:moveTo>
+                  <a:pt x="48844" y="2888671"/>
+                </a:moveTo>
+                <a:cubicBezTo>
+                  <a:pt x="16818" y="2732167"/>
+                  <a:pt x="0" y="2570123"/>
+                  <a:pt x="0" y="2404151"/>
+                </a:cubicBezTo>
+                <a:cubicBezTo>
+                  <a:pt x="0" y="1076375"/>
+                  <a:pt x="1076375" y="0"/>
+                  <a:pt x="2404151" y="0"/>
+                </a:cubicBezTo>
+                <a:cubicBezTo>
+                  <a:pt x="3731927" y="0"/>
+                  <a:pt x="4808302" y="1076375"/>
+                  <a:pt x="4808302" y="2404151"/>
+                </a:cubicBezTo>
+                <a:cubicBezTo>
+                  <a:pt x="4808302" y="2653109"/>
+                  <a:pt x="4770461" y="2893229"/>
+                  <a:pt x="4700216" y="3119072"/>
+                </a:cubicBezTo>
+                <a:lnTo>
+                  <a:pt x="4643143" y="3275009"/>
+                </a:lnTo>
+                <a:lnTo>
+                  <a:pt x="690093" y="4088666"/>
+                </a:lnTo>
+                <a:lnTo>
+                  <a:pt x="548991" y="3933414"/>
+                </a:lnTo>
+                <a:cubicBezTo>
+                  <a:pt x="304015" y="3636572"/>
+                  <a:pt x="128908" y="3279932"/>
+                  <a:pt x="48844" y="2888671"/>
+                </a:cubicBezTo>
+                <a:close/>
+              </a:path>
+            </a:pathLst>
+          </a:custGeom>
+          <a:gradFill>
+            <a:gsLst>
+              <a:gs pos="39000">
+                <a:schemeClr val="accent1">
+                  <a:lumMod val="60000"/>
+                  <a:lumOff val="40000"/>
+                  <a:alpha val="0"/>
+                </a:schemeClr>
+              </a:gs>
+              <a:gs pos="100000">
+                <a:schemeClr val="accent1">
+                  <a:lumMod val="75000"/>
+                  <a:alpha val="26000"/>
+                </a:schemeClr>
+              </a:gs>
+            </a:gsLst>
+            <a:lin ang="18600000" scaled="0"/>
+          </a:gradFill>
+          <a:ln>
+            <a:noFill/>
+          </a:ln>
+        </p:spPr>
+        <p:style>
+          <a:lnRef idx="2">
+            <a:schemeClr val="accent1">
+              <a:shade val="50000"/>
+            </a:schemeClr>
+          </a:lnRef>
+          <a:fillRef idx="1">
+            <a:schemeClr val="accent1"/>
+          </a:fillRef>
+          <a:effectRef idx="0">
+            <a:schemeClr val="accent1"/>
+          </a:effectRef>
+          <a:fontRef idx="minor">
+            <a:schemeClr val="lt1"/>
+          </a:fontRef>
+        </p:style>
+        <p:txBody>
+          <a:bodyPr wrap="square" rtlCol="0" anchor="ctr">
+            <a:noAutofit/>
+          </a:bodyPr>
+          <a:lstStyle/>
+          <a:p>
+            <a:pPr marL="0" marR="0" lvl="0" indent="0" algn="ctr" defTabSz="914400" rtl="0" eaLnBrk="1" fontAlgn="auto" latinLnBrk="0" hangingPunct="1">
+              <a:lnSpc>
+                <a:spcPct val="100000"/>
+              </a:lnSpc>
+              <a:spcBef>
+                <a:spcPts val="0"/>
+              </a:spcBef>
+              <a:spcAft>
+                <a:spcPts val="0"/>
+              </a:spcAft>
+              <a:buClrTx/>
+              <a:buSzTx/>
+              <a:buFontTx/>
+              <a:buNone/>
+              <a:tabLst/>
+              <a:defRPr/>
+            </a:pPr>
+            <a:endParaRPr kumimoji="0" lang="en-US" sz="1800" b="0" i="0" u="none" strike="noStrike" kern="1200" cap="none" spc="0" normalizeH="0" baseline="0" noProof="0" dirty="0">
+              <a:ln>
+                <a:noFill/>
+              </a:ln>
+              <a:solidFill>
+                <a:prstClr val="white"/>
+              </a:solidFill>
+              <a:effectLst/>
+              <a:uLnTx/>
+              <a:uFillTx/>
+              <a:latin typeface="Calibri" panose="020F0502020204030204"/>
+              <a:ea typeface="+mn-ea"/>
+              <a:cs typeface="+mn-cs"/>
+            </a:endParaRPr>
+          </a:p>
+        </p:txBody>
+      </p:sp>
+      <p:sp>
+        <p:nvSpPr>
+          <p:cNvPr id="2" name="Cím 1">
+            <a:extLst>
+              <a:ext uri="{FF2B5EF4-FFF2-40B4-BE49-F238E27FC236}">
+                <a16:creationId xmlns:a16="http://schemas.microsoft.com/office/drawing/2014/main" id="{F996EA23-DAB3-F1F3-0ADD-2B0AD762FF8B}"/>
+              </a:ext>
+            </a:extLst>
+          </p:cNvPr>
+          <p:cNvSpPr>
+            <a:spLocks noGrp="1"/>
+          </p:cNvSpPr>
+          <p:nvPr>
+            <p:ph type="title"/>
+          </p:nvPr>
+        </p:nvSpPr>
+        <p:spPr>
+          <a:xfrm>
+            <a:off x="660041" y="2767106"/>
+            <a:ext cx="2880828" cy="3071906"/>
+          </a:xfrm>
+        </p:spPr>
+        <p:txBody>
+          <a:bodyPr vert="horz" lIns="91440" tIns="45720" rIns="91440" bIns="45720" rtlCol="0" anchor="t">
+            <a:normAutofit/>
+          </a:bodyPr>
+          <a:lstStyle/>
+          <a:p>
+            <a:r>
+              <a:rPr lang="en-US" sz="4000" kern="1200">
+                <a:solidFill>
+                  <a:srgbClr val="FFFFFF"/>
+                </a:solidFill>
+                <a:latin typeface="+mj-lt"/>
+                <a:ea typeface="+mj-ea"/>
+                <a:cs typeface="+mj-cs"/>
+              </a:rPr>
+              <a:t>Fő táblák</a:t>
+            </a:r>
+          </a:p>
+        </p:txBody>
+      </p:sp>
+      <p:pic>
+        <p:nvPicPr>
+          <p:cNvPr id="6" name="Kép 5">
+            <a:extLst>
+              <a:ext uri="{FF2B5EF4-FFF2-40B4-BE49-F238E27FC236}">
+                <a16:creationId xmlns:a16="http://schemas.microsoft.com/office/drawing/2014/main" id="{4294424D-A235-6129-1E29-03952565C5C4}"/>
+              </a:ext>
+            </a:extLst>
+          </p:cNvPr>
+          <p:cNvPicPr>
+            <a:picLocks noChangeAspect="1"/>
+          </p:cNvPicPr>
+          <p:nvPr/>
+        </p:nvPicPr>
+        <p:blipFill>
+          <a:blip r:embed="rId3">
+            <a:extLst>
+              <a:ext uri="{28A0092B-C50C-407E-A947-70E740481C1C}">
+                <a14:useLocalDpi xmlns:a14="http://schemas.microsoft.com/office/drawing/2010/main" val="0"/>
+              </a:ext>
+            </a:extLst>
+          </a:blip>
+          <a:srcRect/>
+          <a:stretch/>
+        </p:blipFill>
+        <p:spPr>
+          <a:xfrm>
+            <a:off x="4886809" y="764506"/>
+            <a:ext cx="6456985" cy="5328988"/>
+          </a:xfrm>
+          <a:prstGeom prst="rect">
+            <a:avLst/>
+          </a:prstGeom>
+        </p:spPr>
+      </p:pic>
+      <p:pic>
+        <p:nvPicPr>
+          <p:cNvPr id="5" name="Picture 2" descr="Budapesti Gazdasági Szakképzési Centrum Pestszentlőrinci Technikum | EDIR">
+            <a:extLst>
+              <a:ext uri="{FF2B5EF4-FFF2-40B4-BE49-F238E27FC236}">
+                <a16:creationId xmlns:a16="http://schemas.microsoft.com/office/drawing/2014/main" id="{390FEDBD-F055-42EA-38DF-9BFBA46DCD0C}"/>
+              </a:ext>
+            </a:extLst>
+          </p:cNvPr>
+          <p:cNvPicPr>
+            <a:picLocks noChangeAspect="1" noChangeArrowheads="1"/>
+          </p:cNvPicPr>
+          <p:nvPr/>
+        </p:nvPicPr>
+        <p:blipFill>
+          <a:blip r:embed="rId4">
+            <a:extLst>
+              <a:ext uri="{28A0092B-C50C-407E-A947-70E740481C1C}">
+                <a14:useLocalDpi xmlns:a14="http://schemas.microsoft.com/office/drawing/2010/main" val="0"/>
+              </a:ext>
+            </a:extLst>
+          </a:blip>
+          <a:srcRect/>
+          <a:stretch>
+            <a:fillRect/>
+          </a:stretch>
+        </p:blipFill>
+        <p:spPr bwMode="auto">
+          <a:xfrm>
+            <a:off x="10392882" y="5677941"/>
+            <a:ext cx="1796980" cy="1179631"/>
+          </a:xfrm>
+          <a:prstGeom prst="rect">
+            <a:avLst/>
+          </a:prstGeom>
+          <a:noFill/>
+          <a:extLst>
+            <a:ext uri="{909E8E84-426E-40DD-AFC4-6F175D3DCCD1}">
+              <a14:hiddenFill xmlns:a14="http://schemas.microsoft.com/office/drawing/2010/main">
+                <a:solidFill>
+                  <a:srgbClr val="FFFFFF"/>
+                </a:solidFill>
+              </a14:hiddenFill>
+            </a:ext>
+          </a:extLst>
+        </p:spPr>
+      </p:pic>
+      <p:pic>
+        <p:nvPicPr>
+          <p:cNvPr id="7" name="Kép 6">
+            <a:extLst>
+              <a:ext uri="{FF2B5EF4-FFF2-40B4-BE49-F238E27FC236}">
+                <a16:creationId xmlns:a16="http://schemas.microsoft.com/office/drawing/2014/main" id="{8E45150B-E0CF-E292-6952-84EEF8190303}"/>
+              </a:ext>
+            </a:extLst>
+          </p:cNvPr>
+          <p:cNvPicPr>
+            <a:picLocks noChangeAspect="1"/>
+          </p:cNvPicPr>
+          <p:nvPr/>
+        </p:nvPicPr>
+        <p:blipFill>
+          <a:blip r:embed="rId5">
+            <a:extLst>
+              <a:ext uri="{28A0092B-C50C-407E-A947-70E740481C1C}">
+                <a14:useLocalDpi xmlns:a14="http://schemas.microsoft.com/office/drawing/2010/main" val="0"/>
+              </a:ext>
+            </a:extLst>
+          </a:blip>
+          <a:stretch>
+            <a:fillRect/>
+          </a:stretch>
+        </p:blipFill>
+        <p:spPr>
+          <a:xfrm>
+            <a:off x="0" y="5496252"/>
+            <a:ext cx="1445169" cy="1445169"/>
+          </a:xfrm>
+          <a:prstGeom prst="rect">
+            <a:avLst/>
+          </a:prstGeom>
+        </p:spPr>
+      </p:pic>
+    </p:spTree>
+    <p:extLst>
+      <p:ext uri="{BB962C8B-B14F-4D97-AF65-F5344CB8AC3E}">
+        <p14:creationId xmlns:p14="http://schemas.microsoft.com/office/powerpoint/2010/main" val="2361505382"/>
+      </p:ext>
+    </p:extLst>
+  </p:cSld>
+  <p:clrMapOvr>
+    <a:masterClrMapping/>
+  </p:clrMapOvr>
+</p:sld>
+</file>
+
+<file path=ppt/slides/slide19.xml><?xml version="1.0" encoding="utf-8"?>
+<p:sld xmlns:a="http://schemas.openxmlformats.org/drawingml/2006/main" xmlns:r="http://schemas.openxmlformats.org/officeDocument/2006/relationships" xmlns:p="http://schemas.openxmlformats.org/presentationml/2006/main">
+  <p:cSld>
+    <p:bg>
+      <p:bgPr>
+        <a:solidFill>
+          <a:schemeClr val="bg1"/>
+        </a:solidFill>
+        <a:effectLst/>
+      </p:bgPr>
+    </p:bg>
+    <p:spTree>
+      <p:nvGrpSpPr>
         <p:cNvPr id="1" name=""/>
         <p:cNvGrpSpPr/>
         <p:nvPr/>
@@ -40188,309 +41468,6 @@
     <p:extLst>
       <p:ext uri="{BB962C8B-B14F-4D97-AF65-F5344CB8AC3E}">
         <p14:creationId xmlns:p14="http://schemas.microsoft.com/office/powerpoint/2010/main" val="3630747796"/>
-      </p:ext>
-    </p:extLst>
-  </p:cSld>
-  <p:clrMapOvr>
-    <a:masterClrMapping/>
-  </p:clrMapOvr>
-</p:sld>
-</file>
-
-<file path=ppt/slides/slide19.xml><?xml version="1.0" encoding="utf-8"?>
-<p:sld xmlns:a="http://schemas.openxmlformats.org/drawingml/2006/main" xmlns:r="http://schemas.openxmlformats.org/officeDocument/2006/relationships" xmlns:p="http://schemas.openxmlformats.org/presentationml/2006/main">
-  <p:cSld>
-    <p:bg>
-      <p:bgPr>
-        <a:solidFill>
-          <a:schemeClr val="bg1"/>
-        </a:solidFill>
-        <a:effectLst/>
-      </p:bgPr>
-    </p:bg>
-    <p:spTree>
-      <p:nvGrpSpPr>
-        <p:cNvPr id="1" name=""/>
-        <p:cNvGrpSpPr/>
-        <p:nvPr/>
-      </p:nvGrpSpPr>
-      <p:grpSpPr>
-        <a:xfrm>
-          <a:off x="0" y="0"/>
-          <a:ext cx="0" cy="0"/>
-          <a:chOff x="0" y="0"/>
-          <a:chExt cx="0" cy="0"/>
-        </a:xfrm>
-      </p:grpSpPr>
-      <p:pic>
-        <p:nvPicPr>
-          <p:cNvPr id="7" name="Picture 6">
-            <a:extLst>
-              <a:ext uri="{FF2B5EF4-FFF2-40B4-BE49-F238E27FC236}">
-                <a16:creationId xmlns:a16="http://schemas.microsoft.com/office/drawing/2014/main" id="{A53DE34D-54B9-0F0E-CFF6-62AB7BA0F1F9}"/>
-              </a:ext>
-            </a:extLst>
-          </p:cNvPr>
-          <p:cNvPicPr>
-            <a:picLocks noChangeAspect="1"/>
-          </p:cNvPicPr>
-          <p:nvPr/>
-        </p:nvPicPr>
-        <p:blipFill>
-          <a:blip r:embed="rId3">
-            <a:duotone>
-              <a:schemeClr val="bg2">
-                <a:shade val="45000"/>
-                <a:satMod val="135000"/>
-              </a:schemeClr>
-              <a:prstClr val="white"/>
-            </a:duotone>
-          </a:blip>
-          <a:srcRect t="5055" b="10675"/>
-          <a:stretch>
-            <a:fillRect/>
-          </a:stretch>
-        </p:blipFill>
-        <p:spPr>
-          <a:xfrm>
-            <a:off x="20" y="10"/>
-            <a:ext cx="12191980" cy="6857990"/>
-          </a:xfrm>
-          <a:prstGeom prst="rect">
-            <a:avLst/>
-          </a:prstGeom>
-        </p:spPr>
-      </p:pic>
-      <p:sp>
-        <p:nvSpPr>
-          <p:cNvPr id="11" name="Rectangle 10">
-            <a:extLst>
-              <a:ext uri="{FF2B5EF4-FFF2-40B4-BE49-F238E27FC236}">
-                <a16:creationId xmlns:a16="http://schemas.microsoft.com/office/drawing/2014/main" id="{B50AB553-2A96-4A92-96F2-93548E096954}"/>
-              </a:ext>
-              <a:ext uri="{C183D7F6-B498-43B3-948B-1728B52AA6E4}">
-                <adec:decorative xmlns:adec="http://schemas.microsoft.com/office/drawing/2017/decorative" val="1"/>
-              </a:ext>
-            </a:extLst>
-          </p:cNvPr>
-          <p:cNvSpPr>
-            <a:spLocks noGrp="1" noRot="1" noChangeAspect="1" noMove="1" noResize="1" noEditPoints="1" noAdjustHandles="1" noChangeArrowheads="1" noChangeShapeType="1" noTextEdit="1"/>
-          </p:cNvSpPr>
-          <p:nvPr>
-            <p:extLst>
-              <p:ext uri="{386F3935-93C4-4BCD-93E2-E3B085C9AB24}">
-                <p16:designElem xmlns:p16="http://schemas.microsoft.com/office/powerpoint/2015/main" val="1"/>
-              </p:ext>
-            </p:extLst>
-          </p:nvPr>
-        </p:nvSpPr>
-        <p:spPr>
-          <a:xfrm>
-            <a:off x="0" y="0"/>
-            <a:ext cx="12192000" cy="6858000"/>
-          </a:xfrm>
-          <a:prstGeom prst="rect">
-            <a:avLst/>
-          </a:prstGeom>
-          <a:gradFill>
-            <a:gsLst>
-              <a:gs pos="10000">
-                <a:schemeClr val="bg2">
-                  <a:alpha val="68000"/>
-                </a:schemeClr>
-              </a:gs>
-              <a:gs pos="85000">
-                <a:schemeClr val="bg2">
-                  <a:alpha val="97000"/>
-                </a:schemeClr>
-              </a:gs>
-            </a:gsLst>
-            <a:path path="circle">
-              <a:fillToRect l="50000" t="50000" r="50000" b="50000"/>
-            </a:path>
-          </a:gradFill>
-          <a:ln>
-            <a:noFill/>
-          </a:ln>
-        </p:spPr>
-        <p:style>
-          <a:lnRef idx="2">
-            <a:schemeClr val="accent1">
-              <a:shade val="50000"/>
-            </a:schemeClr>
-          </a:lnRef>
-          <a:fillRef idx="1">
-            <a:schemeClr val="accent1"/>
-          </a:fillRef>
-          <a:effectRef idx="0">
-            <a:schemeClr val="accent1"/>
-          </a:effectRef>
-          <a:fontRef idx="minor">
-            <a:schemeClr val="lt1"/>
-          </a:fontRef>
-        </p:style>
-        <p:txBody>
-          <a:bodyPr rtlCol="0" anchor="ctr"/>
-          <a:lstStyle/>
-          <a:p>
-            <a:pPr algn="ctr"/>
-            <a:endParaRPr lang="en-US"/>
-          </a:p>
-        </p:txBody>
-      </p:sp>
-      <p:sp>
-        <p:nvSpPr>
-          <p:cNvPr id="2" name="Cím 1">
-            <a:extLst>
-              <a:ext uri="{FF2B5EF4-FFF2-40B4-BE49-F238E27FC236}">
-                <a16:creationId xmlns:a16="http://schemas.microsoft.com/office/drawing/2014/main" id="{BF82E039-7C8F-44F2-97A1-7B28A8959866}"/>
-              </a:ext>
-            </a:extLst>
-          </p:cNvPr>
-          <p:cNvSpPr>
-            <a:spLocks noGrp="1"/>
-          </p:cNvSpPr>
-          <p:nvPr>
-            <p:ph type="title"/>
-          </p:nvPr>
-        </p:nvSpPr>
-        <p:spPr>
-          <a:xfrm>
-            <a:off x="838200" y="365125"/>
-            <a:ext cx="10515600" cy="1325563"/>
-          </a:xfrm>
-        </p:spPr>
-        <p:txBody>
-          <a:bodyPr>
-            <a:normAutofit/>
-          </a:bodyPr>
-          <a:lstStyle/>
-          <a:p>
-            <a:r>
-              <a:rPr lang="hu-HU" dirty="0"/>
-              <a:t>Összegzés és továbbfejlesztés</a:t>
-            </a:r>
-          </a:p>
-        </p:txBody>
-      </p:sp>
-      <p:graphicFrame>
-        <p:nvGraphicFramePr>
-          <p:cNvPr id="6" name="Rectangle 1">
-            <a:extLst>
-              <a:ext uri="{FF2B5EF4-FFF2-40B4-BE49-F238E27FC236}">
-                <a16:creationId xmlns:a16="http://schemas.microsoft.com/office/drawing/2014/main" id="{ED3C2EA8-9573-C5BD-2AFD-B2307349EF2A}"/>
-              </a:ext>
-            </a:extLst>
-          </p:cNvPr>
-          <p:cNvGraphicFramePr>
-            <a:graphicFrameLocks noGrp="1"/>
-          </p:cNvGraphicFramePr>
-          <p:nvPr>
-            <p:ph idx="1"/>
-            <p:extLst>
-              <p:ext uri="{D42A27DB-BD31-4B8C-83A1-F6EECF244321}">
-                <p14:modId xmlns:p14="http://schemas.microsoft.com/office/powerpoint/2010/main" val="4113088503"/>
-              </p:ext>
-            </p:extLst>
-          </p:nvPr>
-        </p:nvGraphicFramePr>
-        <p:xfrm>
-          <a:off x="838200" y="1825625"/>
-          <a:ext cx="10515600" cy="4351338"/>
-        </p:xfrm>
-        <a:graphic>
-          <a:graphicData uri="http://schemas.openxmlformats.org/drawingml/2006/diagram">
-            <dgm:relIds xmlns:dgm="http://schemas.openxmlformats.org/drawingml/2006/diagram" xmlns:r="http://schemas.openxmlformats.org/officeDocument/2006/relationships" r:dm="rId4" r:lo="rId5" r:qs="rId6" r:cs="rId7"/>
-          </a:graphicData>
-        </a:graphic>
-      </p:graphicFrame>
-      <p:pic>
-        <p:nvPicPr>
-          <p:cNvPr id="3" name="Picture 2" descr="Budapesti Gazdasági Szakképzési Centrum Pestszentlőrinci Technikum | EDIR">
-            <a:extLst>
-              <a:ext uri="{FF2B5EF4-FFF2-40B4-BE49-F238E27FC236}">
-                <a16:creationId xmlns:a16="http://schemas.microsoft.com/office/drawing/2014/main" id="{73C18238-D6FF-5E43-C49B-2C199BDA05C1}"/>
-              </a:ext>
-            </a:extLst>
-          </p:cNvPr>
-          <p:cNvPicPr>
-            <a:picLocks noChangeAspect="1" noChangeArrowheads="1"/>
-          </p:cNvPicPr>
-          <p:nvPr/>
-        </p:nvPicPr>
-        <p:blipFill>
-          <a:blip r:embed="rId9">
-            <a:extLst>
-              <a:ext uri="{28A0092B-C50C-407E-A947-70E740481C1C}">
-                <a14:useLocalDpi xmlns:a14="http://schemas.microsoft.com/office/drawing/2010/main" val="0"/>
-              </a:ext>
-            </a:extLst>
-          </a:blip>
-          <a:srcRect/>
-          <a:stretch>
-            <a:fillRect/>
-          </a:stretch>
-        </p:blipFill>
-        <p:spPr bwMode="auto">
-          <a:xfrm>
-            <a:off x="10395000" y="5587146"/>
-            <a:ext cx="1796980" cy="1179631"/>
-          </a:xfrm>
-          <a:prstGeom prst="rect">
-            <a:avLst/>
-          </a:prstGeom>
-          <a:noFill/>
-          <a:extLst>
-            <a:ext uri="{909E8E84-426E-40DD-AFC4-6F175D3DCCD1}">
-              <a14:hiddenFill xmlns:a14="http://schemas.microsoft.com/office/drawing/2010/main">
-                <a:solidFill>
-                  <a:srgbClr val="FFFFFF"/>
-                </a:solidFill>
-              </a14:hiddenFill>
-            </a:ext>
-          </a:extLst>
-        </p:spPr>
-      </p:pic>
-      <p:pic>
-        <p:nvPicPr>
-          <p:cNvPr id="8" name="Kép 7">
-            <a:extLst>
-              <a:ext uri="{FF2B5EF4-FFF2-40B4-BE49-F238E27FC236}">
-                <a16:creationId xmlns:a16="http://schemas.microsoft.com/office/drawing/2014/main" id="{6099188D-A973-3E9C-B6F4-3CC452C642B0}"/>
-              </a:ext>
-            </a:extLst>
-          </p:cNvPr>
-          <p:cNvPicPr>
-            <a:picLocks noChangeAspect="1"/>
-          </p:cNvPicPr>
-          <p:nvPr/>
-        </p:nvPicPr>
-        <p:blipFill>
-          <a:blip r:embed="rId10">
-            <a:extLst>
-              <a:ext uri="{28A0092B-C50C-407E-A947-70E740481C1C}">
-                <a14:useLocalDpi xmlns:a14="http://schemas.microsoft.com/office/drawing/2010/main" val="0"/>
-              </a:ext>
-            </a:extLst>
-          </a:blip>
-          <a:stretch>
-            <a:fillRect/>
-          </a:stretch>
-        </p:blipFill>
-        <p:spPr>
-          <a:xfrm>
-            <a:off x="-36796" y="5301976"/>
-            <a:ext cx="1749972" cy="1749972"/>
-          </a:xfrm>
-          <a:prstGeom prst="rect">
-            <a:avLst/>
-          </a:prstGeom>
-        </p:spPr>
-      </p:pic>
-    </p:spTree>
-    <p:extLst>
-      <p:ext uri="{BB962C8B-B14F-4D97-AF65-F5344CB8AC3E}">
-        <p14:creationId xmlns:p14="http://schemas.microsoft.com/office/powerpoint/2010/main" val="2063393909"/>
       </p:ext>
     </p:extLst>
   </p:cSld>
@@ -41397,6 +42374,309 @@
     <p:extLst>
       <p:ext uri="{BB962C8B-B14F-4D97-AF65-F5344CB8AC3E}">
         <p14:creationId xmlns:p14="http://schemas.microsoft.com/office/powerpoint/2010/main" val="1018540325"/>
+      </p:ext>
+    </p:extLst>
+  </p:cSld>
+  <p:clrMapOvr>
+    <a:masterClrMapping/>
+  </p:clrMapOvr>
+</p:sld>
+</file>
+
+<file path=ppt/slides/slide20.xml><?xml version="1.0" encoding="utf-8"?>
+<p:sld xmlns:a="http://schemas.openxmlformats.org/drawingml/2006/main" xmlns:r="http://schemas.openxmlformats.org/officeDocument/2006/relationships" xmlns:p="http://schemas.openxmlformats.org/presentationml/2006/main">
+  <p:cSld>
+    <p:bg>
+      <p:bgPr>
+        <a:solidFill>
+          <a:schemeClr val="bg1"/>
+        </a:solidFill>
+        <a:effectLst/>
+      </p:bgPr>
+    </p:bg>
+    <p:spTree>
+      <p:nvGrpSpPr>
+        <p:cNvPr id="1" name=""/>
+        <p:cNvGrpSpPr/>
+        <p:nvPr/>
+      </p:nvGrpSpPr>
+      <p:grpSpPr>
+        <a:xfrm>
+          <a:off x="0" y="0"/>
+          <a:ext cx="0" cy="0"/>
+          <a:chOff x="0" y="0"/>
+          <a:chExt cx="0" cy="0"/>
+        </a:xfrm>
+      </p:grpSpPr>
+      <p:pic>
+        <p:nvPicPr>
+          <p:cNvPr id="7" name="Picture 6">
+            <a:extLst>
+              <a:ext uri="{FF2B5EF4-FFF2-40B4-BE49-F238E27FC236}">
+                <a16:creationId xmlns:a16="http://schemas.microsoft.com/office/drawing/2014/main" id="{A53DE34D-54B9-0F0E-CFF6-62AB7BA0F1F9}"/>
+              </a:ext>
+            </a:extLst>
+          </p:cNvPr>
+          <p:cNvPicPr>
+            <a:picLocks noChangeAspect="1"/>
+          </p:cNvPicPr>
+          <p:nvPr/>
+        </p:nvPicPr>
+        <p:blipFill>
+          <a:blip r:embed="rId3">
+            <a:duotone>
+              <a:schemeClr val="bg2">
+                <a:shade val="45000"/>
+                <a:satMod val="135000"/>
+              </a:schemeClr>
+              <a:prstClr val="white"/>
+            </a:duotone>
+          </a:blip>
+          <a:srcRect t="5055" b="10675"/>
+          <a:stretch>
+            <a:fillRect/>
+          </a:stretch>
+        </p:blipFill>
+        <p:spPr>
+          <a:xfrm>
+            <a:off x="20" y="10"/>
+            <a:ext cx="12191980" cy="6857990"/>
+          </a:xfrm>
+          <a:prstGeom prst="rect">
+            <a:avLst/>
+          </a:prstGeom>
+        </p:spPr>
+      </p:pic>
+      <p:sp>
+        <p:nvSpPr>
+          <p:cNvPr id="11" name="Rectangle 10">
+            <a:extLst>
+              <a:ext uri="{FF2B5EF4-FFF2-40B4-BE49-F238E27FC236}">
+                <a16:creationId xmlns:a16="http://schemas.microsoft.com/office/drawing/2014/main" id="{B50AB553-2A96-4A92-96F2-93548E096954}"/>
+              </a:ext>
+              <a:ext uri="{C183D7F6-B498-43B3-948B-1728B52AA6E4}">
+                <adec:decorative xmlns:adec="http://schemas.microsoft.com/office/drawing/2017/decorative" val="1"/>
+              </a:ext>
+            </a:extLst>
+          </p:cNvPr>
+          <p:cNvSpPr>
+            <a:spLocks noGrp="1" noRot="1" noChangeAspect="1" noMove="1" noResize="1" noEditPoints="1" noAdjustHandles="1" noChangeArrowheads="1" noChangeShapeType="1" noTextEdit="1"/>
+          </p:cNvSpPr>
+          <p:nvPr>
+            <p:extLst>
+              <p:ext uri="{386F3935-93C4-4BCD-93E2-E3B085C9AB24}">
+                <p16:designElem xmlns:p16="http://schemas.microsoft.com/office/powerpoint/2015/main" val="1"/>
+              </p:ext>
+            </p:extLst>
+          </p:nvPr>
+        </p:nvSpPr>
+        <p:spPr>
+          <a:xfrm>
+            <a:off x="0" y="0"/>
+            <a:ext cx="12192000" cy="6858000"/>
+          </a:xfrm>
+          <a:prstGeom prst="rect">
+            <a:avLst/>
+          </a:prstGeom>
+          <a:gradFill>
+            <a:gsLst>
+              <a:gs pos="10000">
+                <a:schemeClr val="bg2">
+                  <a:alpha val="68000"/>
+                </a:schemeClr>
+              </a:gs>
+              <a:gs pos="85000">
+                <a:schemeClr val="bg2">
+                  <a:alpha val="97000"/>
+                </a:schemeClr>
+              </a:gs>
+            </a:gsLst>
+            <a:path path="circle">
+              <a:fillToRect l="50000" t="50000" r="50000" b="50000"/>
+            </a:path>
+          </a:gradFill>
+          <a:ln>
+            <a:noFill/>
+          </a:ln>
+        </p:spPr>
+        <p:style>
+          <a:lnRef idx="2">
+            <a:schemeClr val="accent1">
+              <a:shade val="50000"/>
+            </a:schemeClr>
+          </a:lnRef>
+          <a:fillRef idx="1">
+            <a:schemeClr val="accent1"/>
+          </a:fillRef>
+          <a:effectRef idx="0">
+            <a:schemeClr val="accent1"/>
+          </a:effectRef>
+          <a:fontRef idx="minor">
+            <a:schemeClr val="lt1"/>
+          </a:fontRef>
+        </p:style>
+        <p:txBody>
+          <a:bodyPr rtlCol="0" anchor="ctr"/>
+          <a:lstStyle/>
+          <a:p>
+            <a:pPr algn="ctr"/>
+            <a:endParaRPr lang="en-US"/>
+          </a:p>
+        </p:txBody>
+      </p:sp>
+      <p:sp>
+        <p:nvSpPr>
+          <p:cNvPr id="2" name="Cím 1">
+            <a:extLst>
+              <a:ext uri="{FF2B5EF4-FFF2-40B4-BE49-F238E27FC236}">
+                <a16:creationId xmlns:a16="http://schemas.microsoft.com/office/drawing/2014/main" id="{BF82E039-7C8F-44F2-97A1-7B28A8959866}"/>
+              </a:ext>
+            </a:extLst>
+          </p:cNvPr>
+          <p:cNvSpPr>
+            <a:spLocks noGrp="1"/>
+          </p:cNvSpPr>
+          <p:nvPr>
+            <p:ph type="title"/>
+          </p:nvPr>
+        </p:nvSpPr>
+        <p:spPr>
+          <a:xfrm>
+            <a:off x="838200" y="365125"/>
+            <a:ext cx="10515600" cy="1325563"/>
+          </a:xfrm>
+        </p:spPr>
+        <p:txBody>
+          <a:bodyPr>
+            <a:normAutofit/>
+          </a:bodyPr>
+          <a:lstStyle/>
+          <a:p>
+            <a:r>
+              <a:rPr lang="hu-HU" dirty="0"/>
+              <a:t>Összegzés és továbbfejlesztés</a:t>
+            </a:r>
+          </a:p>
+        </p:txBody>
+      </p:sp>
+      <p:graphicFrame>
+        <p:nvGraphicFramePr>
+          <p:cNvPr id="6" name="Rectangle 1">
+            <a:extLst>
+              <a:ext uri="{FF2B5EF4-FFF2-40B4-BE49-F238E27FC236}">
+                <a16:creationId xmlns:a16="http://schemas.microsoft.com/office/drawing/2014/main" id="{ED3C2EA8-9573-C5BD-2AFD-B2307349EF2A}"/>
+              </a:ext>
+            </a:extLst>
+          </p:cNvPr>
+          <p:cNvGraphicFramePr>
+            <a:graphicFrameLocks noGrp="1"/>
+          </p:cNvGraphicFramePr>
+          <p:nvPr>
+            <p:ph idx="1"/>
+            <p:extLst>
+              <p:ext uri="{D42A27DB-BD31-4B8C-83A1-F6EECF244321}">
+                <p14:modId xmlns:p14="http://schemas.microsoft.com/office/powerpoint/2010/main" val="4113088503"/>
+              </p:ext>
+            </p:extLst>
+          </p:nvPr>
+        </p:nvGraphicFramePr>
+        <p:xfrm>
+          <a:off x="838200" y="1825625"/>
+          <a:ext cx="10515600" cy="4351338"/>
+        </p:xfrm>
+        <a:graphic>
+          <a:graphicData uri="http://schemas.openxmlformats.org/drawingml/2006/diagram">
+            <dgm:relIds xmlns:dgm="http://schemas.openxmlformats.org/drawingml/2006/diagram" xmlns:r="http://schemas.openxmlformats.org/officeDocument/2006/relationships" r:dm="rId4" r:lo="rId5" r:qs="rId6" r:cs="rId7"/>
+          </a:graphicData>
+        </a:graphic>
+      </p:graphicFrame>
+      <p:pic>
+        <p:nvPicPr>
+          <p:cNvPr id="3" name="Picture 2" descr="Budapesti Gazdasági Szakképzési Centrum Pestszentlőrinci Technikum | EDIR">
+            <a:extLst>
+              <a:ext uri="{FF2B5EF4-FFF2-40B4-BE49-F238E27FC236}">
+                <a16:creationId xmlns:a16="http://schemas.microsoft.com/office/drawing/2014/main" id="{73C18238-D6FF-5E43-C49B-2C199BDA05C1}"/>
+              </a:ext>
+            </a:extLst>
+          </p:cNvPr>
+          <p:cNvPicPr>
+            <a:picLocks noChangeAspect="1" noChangeArrowheads="1"/>
+          </p:cNvPicPr>
+          <p:nvPr/>
+        </p:nvPicPr>
+        <p:blipFill>
+          <a:blip r:embed="rId9">
+            <a:extLst>
+              <a:ext uri="{28A0092B-C50C-407E-A947-70E740481C1C}">
+                <a14:useLocalDpi xmlns:a14="http://schemas.microsoft.com/office/drawing/2010/main" val="0"/>
+              </a:ext>
+            </a:extLst>
+          </a:blip>
+          <a:srcRect/>
+          <a:stretch>
+            <a:fillRect/>
+          </a:stretch>
+        </p:blipFill>
+        <p:spPr bwMode="auto">
+          <a:xfrm>
+            <a:off x="10395000" y="5587146"/>
+            <a:ext cx="1796980" cy="1179631"/>
+          </a:xfrm>
+          <a:prstGeom prst="rect">
+            <a:avLst/>
+          </a:prstGeom>
+          <a:noFill/>
+          <a:extLst>
+            <a:ext uri="{909E8E84-426E-40DD-AFC4-6F175D3DCCD1}">
+              <a14:hiddenFill xmlns:a14="http://schemas.microsoft.com/office/drawing/2010/main">
+                <a:solidFill>
+                  <a:srgbClr val="FFFFFF"/>
+                </a:solidFill>
+              </a14:hiddenFill>
+            </a:ext>
+          </a:extLst>
+        </p:spPr>
+      </p:pic>
+      <p:pic>
+        <p:nvPicPr>
+          <p:cNvPr id="8" name="Kép 7">
+            <a:extLst>
+              <a:ext uri="{FF2B5EF4-FFF2-40B4-BE49-F238E27FC236}">
+                <a16:creationId xmlns:a16="http://schemas.microsoft.com/office/drawing/2014/main" id="{6099188D-A973-3E9C-B6F4-3CC452C642B0}"/>
+              </a:ext>
+            </a:extLst>
+          </p:cNvPr>
+          <p:cNvPicPr>
+            <a:picLocks noChangeAspect="1"/>
+          </p:cNvPicPr>
+          <p:nvPr/>
+        </p:nvPicPr>
+        <p:blipFill>
+          <a:blip r:embed="rId10">
+            <a:extLst>
+              <a:ext uri="{28A0092B-C50C-407E-A947-70E740481C1C}">
+                <a14:useLocalDpi xmlns:a14="http://schemas.microsoft.com/office/drawing/2010/main" val="0"/>
+              </a:ext>
+            </a:extLst>
+          </a:blip>
+          <a:stretch>
+            <a:fillRect/>
+          </a:stretch>
+        </p:blipFill>
+        <p:spPr>
+          <a:xfrm>
+            <a:off x="-36796" y="5301976"/>
+            <a:ext cx="1749972" cy="1749972"/>
+          </a:xfrm>
+          <a:prstGeom prst="rect">
+            <a:avLst/>
+          </a:prstGeom>
+        </p:spPr>
+      </p:pic>
+    </p:spTree>
+    <p:extLst>
+      <p:ext uri="{BB962C8B-B14F-4D97-AF65-F5344CB8AC3E}">
+        <p14:creationId xmlns:p14="http://schemas.microsoft.com/office/powerpoint/2010/main" val="2063393909"/>
       </p:ext>
     </p:extLst>
   </p:cSld>

--- a/MakettMester.pptx
+++ b/MakettMester.pptx
@@ -27844,7 +27844,7 @@
           <a:p>
             <a:fld id="{3F4F195F-7F2C-40F3-B247-AEA4312FB65B}" type="datetimeFigureOut">
               <a:rPr lang="hu-HU" smtClean="0"/>
-              <a:t>2026. 05. 30.</a:t>
+              <a:t>2026. 05. 31.</a:t>
             </a:fld>
             <a:endParaRPr lang="hu-HU"/>
           </a:p>
@@ -28157,15 +28157,7 @@
           <a:p>
             <a:r>
               <a:rPr lang="hu-HU" noProof="0" dirty="0"/>
-              <a:t>Helló, a nevem Patrik, és szeretném bemutatni a projektünket a csapattársaimmal, </a:t>
-            </a:r>
-            <a:r>
-              <a:rPr lang="hu-HU" noProof="0" dirty="0" err="1"/>
-              <a:t>Hohn</a:t>
-            </a:r>
-            <a:r>
-              <a:rPr lang="hu-HU" noProof="0" dirty="0"/>
-              <a:t> Mártonnal és Szabados Bendegúz Henrikkel együtt. A projektünk neve </a:t>
+              <a:t>Jónapot, a nevem Patrik, és szeretném bemutatni a projektünket a csapattársaimmal, Hohn Mártonnal és Szabados Bendegúz Henrikkel együtt. A projektünk neve </a:t>
             </a:r>
             <a:r>
               <a:rPr lang="hu-HU" noProof="0" dirty="0" err="1"/>
@@ -30867,7 +30859,7 @@
           <a:p>
             <a:fld id="{F6C265F0-9B0B-43BF-8579-E8996E214BEE}" type="datetimeFigureOut">
               <a:rPr lang="hu-HU" smtClean="0"/>
-              <a:t>2026. 05. 30.</a:t>
+              <a:t>2026. 05. 31.</a:t>
             </a:fld>
             <a:endParaRPr lang="hu-HU"/>
           </a:p>
@@ -31065,7 +31057,7 @@
           <a:p>
             <a:fld id="{F6C265F0-9B0B-43BF-8579-E8996E214BEE}" type="datetimeFigureOut">
               <a:rPr lang="hu-HU" smtClean="0"/>
-              <a:t>2026. 05. 30.</a:t>
+              <a:t>2026. 05. 31.</a:t>
             </a:fld>
             <a:endParaRPr lang="hu-HU"/>
           </a:p>
@@ -31273,7 +31265,7 @@
           <a:p>
             <a:fld id="{F6C265F0-9B0B-43BF-8579-E8996E214BEE}" type="datetimeFigureOut">
               <a:rPr lang="hu-HU" smtClean="0"/>
-              <a:t>2026. 05. 30.</a:t>
+              <a:t>2026. 05. 31.</a:t>
             </a:fld>
             <a:endParaRPr lang="hu-HU"/>
           </a:p>
@@ -31471,7 +31463,7 @@
           <a:p>
             <a:fld id="{F6C265F0-9B0B-43BF-8579-E8996E214BEE}" type="datetimeFigureOut">
               <a:rPr lang="hu-HU" smtClean="0"/>
-              <a:t>2026. 05. 30.</a:t>
+              <a:t>2026. 05. 31.</a:t>
             </a:fld>
             <a:endParaRPr lang="hu-HU"/>
           </a:p>
@@ -31746,7 +31738,7 @@
           <a:p>
             <a:fld id="{F6C265F0-9B0B-43BF-8579-E8996E214BEE}" type="datetimeFigureOut">
               <a:rPr lang="hu-HU" smtClean="0"/>
-              <a:t>2026. 05. 30.</a:t>
+              <a:t>2026. 05. 31.</a:t>
             </a:fld>
             <a:endParaRPr lang="hu-HU"/>
           </a:p>
@@ -32011,7 +32003,7 @@
           <a:p>
             <a:fld id="{F6C265F0-9B0B-43BF-8579-E8996E214BEE}" type="datetimeFigureOut">
               <a:rPr lang="hu-HU" smtClean="0"/>
-              <a:t>2026. 05. 30.</a:t>
+              <a:t>2026. 05. 31.</a:t>
             </a:fld>
             <a:endParaRPr lang="hu-HU"/>
           </a:p>
@@ -32423,7 +32415,7 @@
           <a:p>
             <a:fld id="{F6C265F0-9B0B-43BF-8579-E8996E214BEE}" type="datetimeFigureOut">
               <a:rPr lang="hu-HU" smtClean="0"/>
-              <a:t>2026. 05. 30.</a:t>
+              <a:t>2026. 05. 31.</a:t>
             </a:fld>
             <a:endParaRPr lang="hu-HU"/>
           </a:p>
@@ -32564,7 +32556,7 @@
           <a:p>
             <a:fld id="{F6C265F0-9B0B-43BF-8579-E8996E214BEE}" type="datetimeFigureOut">
               <a:rPr lang="hu-HU" smtClean="0"/>
-              <a:t>2026. 05. 30.</a:t>
+              <a:t>2026. 05. 31.</a:t>
             </a:fld>
             <a:endParaRPr lang="hu-HU"/>
           </a:p>
@@ -32677,7 +32669,7 @@
           <a:p>
             <a:fld id="{F6C265F0-9B0B-43BF-8579-E8996E214BEE}" type="datetimeFigureOut">
               <a:rPr lang="hu-HU" smtClean="0"/>
-              <a:t>2026. 05. 30.</a:t>
+              <a:t>2026. 05. 31.</a:t>
             </a:fld>
             <a:endParaRPr lang="hu-HU"/>
           </a:p>
@@ -32988,7 +32980,7 @@
           <a:p>
             <a:fld id="{F6C265F0-9B0B-43BF-8579-E8996E214BEE}" type="datetimeFigureOut">
               <a:rPr lang="hu-HU" smtClean="0"/>
-              <a:t>2026. 05. 30.</a:t>
+              <a:t>2026. 05. 31.</a:t>
             </a:fld>
             <a:endParaRPr lang="hu-HU"/>
           </a:p>
@@ -33276,7 +33268,7 @@
           <a:p>
             <a:fld id="{F6C265F0-9B0B-43BF-8579-E8996E214BEE}" type="datetimeFigureOut">
               <a:rPr lang="hu-HU" smtClean="0"/>
-              <a:t>2026. 05. 30.</a:t>
+              <a:t>2026. 05. 31.</a:t>
             </a:fld>
             <a:endParaRPr lang="hu-HU"/>
           </a:p>
@@ -33517,7 +33509,7 @@
           <a:p>
             <a:fld id="{F6C265F0-9B0B-43BF-8579-E8996E214BEE}" type="datetimeFigureOut">
               <a:rPr lang="hu-HU" smtClean="0"/>
-              <a:t>2026. 05. 30.</a:t>
+              <a:t>2026. 05. 31.</a:t>
             </a:fld>
             <a:endParaRPr lang="hu-HU"/>
           </a:p>

--- a/MakettMester.pptx
+++ b/MakettMester.pptx
@@ -34192,7 +34192,7 @@
                   <a:schemeClr val="bg1"/>
                 </a:solidFill>
               </a:rPr>
-              <a:t>készitette</a:t>
+              <a:t>Készitette</a:t>
             </a:r>
             <a:r>
               <a:rPr lang="hu-HU" sz="2000" dirty="0">
